--- a/docs/导出验证/sample_export.pptx
+++ b/docs/导出验证/sample_export.pptx
@@ -10,6 +10,7 @@
     <p:sldId id="258" r:id="rId9"/>
     <p:sldId id="259" r:id="rId10"/>
     <p:sldId id="260" r:id="rId11"/>
+    <p:sldId id="261" r:id="rId12"/>
   </p:sldIdLst>
   <p:sldSz cx="12191999" cy="6858000" type="screen4x3"/>
   <p:notesSz cx="6858000" cy="9144000"/>
@@ -3087,9 +3088,17 @@
   <p:cSld>
     <p:bg>
       <p:bgPr>
-        <a:solidFill>
-          <a:srgbClr val="F5F8FA"/>
-        </a:solidFill>
+        <a:gradFill rotWithShape="1">
+          <a:gsLst>
+            <a:gs pos="0">
+              <a:srgbClr val="4361EE"/>
+            </a:gs>
+            <a:gs pos="100000">
+              <a:srgbClr val="7209B7"/>
+            </a:gs>
+          </a:gsLst>
+          <a:lin scaled="0" ang="13500000"/>
+        </a:gradFill>
         <a:effectLst/>
       </p:bgPr>
     </p:bg>
@@ -3102,64 +3111,20 @@
       <p:grpSpPr/>
       <p:sp>
         <p:nvSpPr>
-          <p:cNvPr id="2" name="TextBox 1"/>
-          <p:cNvSpPr txBox="1"/>
-          <p:nvPr/>
-        </p:nvSpPr>
-        <p:spPr>
-          <a:xfrm>
-            <a:off x="11292840" y="6446520"/>
-            <a:ext cx="411480" cy="201168"/>
-          </a:xfrm>
-          <a:prstGeom prst="rect">
-            <a:avLst/>
-          </a:prstGeom>
-          <a:noFill/>
-        </p:spPr>
-        <p:txBody>
-          <a:bodyPr wrap="square" anchor="t" lIns="18288" rIns="18288" tIns="9144" bIns="9144">
-            <a:noAutofit/>
-          </a:bodyPr>
-          <a:lstStyle/>
-          <a:p>
-            <a:pPr algn="r">
-              <a:defRPr sz="900" b="0">
-                <a:solidFill>
-                  <a:srgbClr val="627987"/>
-                </a:solidFill>
-                <a:latin typeface="Microsoft YaHei"/>
-                <a:ea typeface="微软雅黑"/>
-              </a:defRPr>
-            </a:pPr>
-            <a:r>
-              <a:rPr sz="900" b="0">
-                <a:solidFill>
-                  <a:srgbClr val="627987"/>
-                </a:solidFill>
-                <a:latin typeface="Microsoft YaHei"/>
-                <a:ea typeface="微软雅黑"/>
-              </a:rPr>
-              <a:t>1</a:t>
-            </a:r>
-          </a:p>
-        </p:txBody>
-      </p:sp>
-      <p:sp>
-        <p:nvSpPr>
-          <p:cNvPr id="3" name="Rectangle 2"/>
+          <p:cNvPr id="2" name="Rounded Rectangle 1"/>
           <p:cNvSpPr/>
           <p:nvPr/>
         </p:nvSpPr>
         <p:spPr>
           <a:xfrm>
-            <a:off x="0" y="0"/>
-            <a:ext cx="3840480" cy="6858000"/>
-          </a:xfrm>
-          <a:prstGeom prst="rect">
+            <a:off x="11027664" y="246888"/>
+            <a:ext cx="566928" cy="283464"/>
+          </a:xfrm>
+          <a:prstGeom prst="roundRect">
             <a:avLst/>
           </a:prstGeom>
           <a:solidFill>
-            <a:srgbClr val="245B78"/>
+            <a:srgbClr val="7209B7"/>
           </a:solidFill>
           <a:ln>
             <a:noFill/>
@@ -3189,20 +3154,230 @@
       </p:sp>
       <p:sp>
         <p:nvSpPr>
-          <p:cNvPr id="4" name="Rectangle 3"/>
-          <p:cNvSpPr/>
+          <p:cNvPr id="3" name="TextBox 2"/>
+          <p:cNvSpPr txBox="1"/>
           <p:nvPr/>
         </p:nvSpPr>
         <p:spPr>
           <a:xfrm>
-            <a:off x="3840480" y="0"/>
-            <a:ext cx="109728" cy="6858000"/>
+            <a:off x="11045952" y="278892"/>
+            <a:ext cx="530352" cy="182880"/>
           </a:xfrm>
           <a:prstGeom prst="rect">
             <a:avLst/>
           </a:prstGeom>
+          <a:noFill/>
+        </p:spPr>
+        <p:txBody>
+          <a:bodyPr wrap="square" anchor="ctr" lIns="18288" rIns="18288" tIns="9144" bIns="9144">
+            <a:noAutofit/>
+          </a:bodyPr>
+          <a:lstStyle/>
+          <a:p>
+            <a:pPr algn="ctr">
+              <a:defRPr sz="900" b="0">
+                <a:solidFill>
+                  <a:srgbClr val="FFFFFF"/>
+                </a:solidFill>
+                <a:latin typeface="Microsoft YaHei"/>
+                <a:ea typeface="微软雅黑"/>
+              </a:defRPr>
+            </a:pPr>
+            <a:r>
+              <a:rPr sz="900" b="0">
+                <a:solidFill>
+                  <a:srgbClr val="FFFFFF"/>
+                </a:solidFill>
+                <a:latin typeface="Microsoft YaHei"/>
+                <a:ea typeface="微软雅黑"/>
+              </a:rPr>
+              <a:t>1</a:t>
+            </a:r>
+          </a:p>
+        </p:txBody>
+      </p:sp>
+      <p:sp>
+        <p:nvSpPr>
+          <p:cNvPr id="4" name="TextBox 3"/>
+          <p:cNvSpPr txBox="1"/>
+          <p:nvPr/>
+        </p:nvSpPr>
+        <p:spPr>
+          <a:xfrm>
+            <a:off x="960120" y="1965960"/>
+            <a:ext cx="10149840" cy="1508760"/>
+          </a:xfrm>
+          <a:prstGeom prst="rect">
+            <a:avLst/>
+          </a:prstGeom>
+          <a:noFill/>
+        </p:spPr>
+        <p:txBody>
+          <a:bodyPr wrap="square" anchor="ctr" lIns="18288" rIns="18288" tIns="9144" bIns="9144">
+            <a:noAutofit/>
+          </a:bodyPr>
+          <a:lstStyle/>
+          <a:p>
+            <a:pPr algn="l">
+              <a:defRPr sz="5000" b="1">
+                <a:solidFill>
+                  <a:srgbClr val="FFFFFF"/>
+                </a:solidFill>
+                <a:latin typeface="Microsoft YaHei"/>
+                <a:ea typeface="微软雅黑"/>
+              </a:defRPr>
+            </a:pPr>
+            <a:r>
+              <a:rPr sz="5000" b="1">
+                <a:solidFill>
+                  <a:srgbClr val="FFFFFF"/>
+                </a:solidFill>
+                <a:latin typeface="Microsoft YaHei"/>
+                <a:ea typeface="微软雅黑"/>
+              </a:rPr>
+              <a:t>排序算法教学课件</a:t>
+            </a:r>
+          </a:p>
+        </p:txBody>
+      </p:sp>
+      <p:sp>
+        <p:nvSpPr>
+          <p:cNvPr id="5" name="TextBox 4"/>
+          <p:cNvSpPr txBox="1"/>
+          <p:nvPr/>
+        </p:nvSpPr>
+        <p:spPr>
+          <a:xfrm>
+            <a:off x="987552" y="3703320"/>
+            <a:ext cx="8961120" cy="868680"/>
+          </a:xfrm>
+          <a:prstGeom prst="rect">
+            <a:avLst/>
+          </a:prstGeom>
+          <a:noFill/>
+        </p:spPr>
+        <p:txBody>
+          <a:bodyPr wrap="square" anchor="t" lIns="18288" rIns="18288" tIns="9144" bIns="9144">
+            <a:noAutofit/>
+          </a:bodyPr>
+          <a:lstStyle/>
+          <a:p>
+            <a:pPr algn="l">
+              <a:defRPr sz="2800" b="0">
+                <a:solidFill>
+                  <a:srgbClr val="FFFFFF"/>
+                </a:solidFill>
+                <a:latin typeface="Microsoft YaHei"/>
+                <a:ea typeface="微软雅黑"/>
+              </a:defRPr>
+            </a:pPr>
+            <a:r>
+              <a:rPr sz="2800" b="0">
+                <a:solidFill>
+                  <a:srgbClr val="FFFFFF"/>
+                </a:solidFill>
+                <a:latin typeface="Microsoft YaHei"/>
+                <a:ea typeface="微软雅黑"/>
+              </a:rPr>
+              <a:t>从直观比较到分治优化</a:t>
+            </a:r>
+          </a:p>
+        </p:txBody>
+      </p:sp>
+      <p:sp>
+        <p:nvSpPr>
+          <p:cNvPr id="6" name="TextBox 5"/>
+          <p:cNvSpPr txBox="1"/>
+          <p:nvPr/>
+        </p:nvSpPr>
+        <p:spPr>
+          <a:xfrm>
+            <a:off x="987552" y="5660136"/>
+            <a:ext cx="3108960" cy="274320"/>
+          </a:xfrm>
+          <a:prstGeom prst="rect">
+            <a:avLst/>
+          </a:prstGeom>
+          <a:noFill/>
+        </p:spPr>
+        <p:txBody>
+          <a:bodyPr wrap="square" anchor="t" lIns="18288" rIns="18288" tIns="9144" bIns="9144">
+            <a:noAutofit/>
+          </a:bodyPr>
+          <a:lstStyle/>
+          <a:p>
+            <a:pPr algn="l">
+              <a:defRPr sz="1100" b="1">
+                <a:solidFill>
+                  <a:srgbClr val="FFFFFF"/>
+                </a:solidFill>
+                <a:latin typeface="Microsoft YaHei"/>
+                <a:ea typeface="微软雅黑"/>
+              </a:defRPr>
+            </a:pPr>
+            <a:r>
+              <a:rPr sz="1100" b="1">
+                <a:solidFill>
+                  <a:srgbClr val="FFFFFF"/>
+                </a:solidFill>
+                <a:latin typeface="Microsoft YaHei"/>
+                <a:ea typeface="微软雅黑"/>
+              </a:rPr>
+              <a:t>通用教学</a:t>
+            </a:r>
+          </a:p>
+        </p:txBody>
+      </p:sp>
+    </p:spTree>
+  </p:cSld>
+  <p:clrMapOvr>
+    <a:masterClrMapping/>
+  </p:clrMapOvr>
+</p:sld>
+</file>
+
+<file path=ppt/slides/slide2.xml><?xml version="1.0" encoding="utf-8"?>
+<p:sld xmlns:a="http://schemas.openxmlformats.org/drawingml/2006/main" xmlns:p="http://schemas.openxmlformats.org/presentationml/2006/main" xmlns:r="http://schemas.openxmlformats.org/officeDocument/2006/relationships">
+  <p:cSld>
+    <p:bg>
+      <p:bgPr>
+        <a:gradFill rotWithShape="1">
+          <a:gsLst>
+            <a:gs pos="0">
+              <a:srgbClr val="F72585"/>
+            </a:gs>
+            <a:gs pos="100000">
+              <a:srgbClr val="7209B7"/>
+            </a:gs>
+          </a:gsLst>
+          <a:lin scaled="0" ang="13500000"/>
+        </a:gradFill>
+        <a:effectLst/>
+      </p:bgPr>
+    </p:bg>
+    <p:spTree>
+      <p:nvGrpSpPr>
+        <p:cNvPr id="1" name=""/>
+        <p:cNvGrpSpPr/>
+        <p:nvPr/>
+      </p:nvGrpSpPr>
+      <p:grpSpPr/>
+      <p:sp>
+        <p:nvSpPr>
+          <p:cNvPr id="2" name="Rounded Rectangle 1"/>
+          <p:cNvSpPr/>
+          <p:nvPr/>
+        </p:nvSpPr>
+        <p:spPr>
+          <a:xfrm>
+            <a:off x="11027664" y="246888"/>
+            <a:ext cx="566928" cy="283464"/>
+          </a:xfrm>
+          <a:prstGeom prst="roundRect">
+            <a:avLst/>
+          </a:prstGeom>
           <a:solidFill>
-            <a:srgbClr val="E89B52"/>
+            <a:srgbClr val="7209B7"/>
           </a:solidFill>
           <a:ln>
             <a:noFill/>
@@ -3232,14 +3407,14 @@
       </p:sp>
       <p:sp>
         <p:nvSpPr>
-          <p:cNvPr id="5" name="TextBox 4"/>
+          <p:cNvPr id="3" name="TextBox 2"/>
           <p:cNvSpPr txBox="1"/>
           <p:nvPr/>
         </p:nvSpPr>
         <p:spPr>
           <a:xfrm>
-            <a:off x="685800" y="1234440"/>
-            <a:ext cx="2103120" cy="914400"/>
+            <a:off x="11045952" y="278892"/>
+            <a:ext cx="530352" cy="182880"/>
           </a:xfrm>
           <a:prstGeom prst="rect">
             <a:avLst/>
@@ -3247,13 +3422,13 @@
           <a:noFill/>
         </p:spPr>
         <p:txBody>
-          <a:bodyPr wrap="square" anchor="t" lIns="18288" rIns="18288" tIns="9144" bIns="9144">
+          <a:bodyPr wrap="square" anchor="ctr" lIns="18288" rIns="18288" tIns="9144" bIns="9144">
             <a:noAutofit/>
           </a:bodyPr>
           <a:lstStyle/>
           <a:p>
-            <a:pPr algn="l">
-              <a:defRPr sz="4600" b="1">
+            <a:pPr algn="ctr">
+              <a:defRPr sz="900" b="0">
                 <a:solidFill>
                   <a:srgbClr val="FFFFFF"/>
                 </a:solidFill>
@@ -3262,28 +3437,28 @@
               </a:defRPr>
             </a:pPr>
             <a:r>
-              <a:rPr sz="4600" b="1">
+              <a:rPr sz="900" b="0">
                 <a:solidFill>
                   <a:srgbClr val="FFFFFF"/>
                 </a:solidFill>
                 <a:latin typeface="Microsoft YaHei"/>
                 <a:ea typeface="微软雅黑"/>
               </a:rPr>
-              <a:t>01</a:t>
-            </a:r>
-          </a:p>
-        </p:txBody>
-      </p:sp>
-      <p:sp>
-        <p:nvSpPr>
-          <p:cNvPr id="6" name="TextBox 5"/>
+              <a:t>2</a:t>
+            </a:r>
+          </a:p>
+        </p:txBody>
+      </p:sp>
+      <p:sp>
+        <p:nvSpPr>
+          <p:cNvPr id="4" name="TextBox 3"/>
           <p:cNvSpPr txBox="1"/>
           <p:nvPr/>
         </p:nvSpPr>
         <p:spPr>
           <a:xfrm>
-            <a:off x="4526280" y="2057400"/>
-            <a:ext cx="6812280" cy="1554480"/>
+            <a:off x="749808" y="1115568"/>
+            <a:ext cx="2103120" cy="914400"/>
           </a:xfrm>
           <a:prstGeom prst="rect">
             <a:avLst/>
@@ -3291,43 +3466,43 @@
           <a:noFill/>
         </p:spPr>
         <p:txBody>
-          <a:bodyPr wrap="square" anchor="ctr" lIns="18288" rIns="18288" tIns="9144" bIns="9144">
+          <a:bodyPr wrap="square" anchor="t" lIns="18288" rIns="18288" tIns="9144" bIns="9144">
             <a:noAutofit/>
           </a:bodyPr>
           <a:lstStyle/>
           <a:p>
             <a:pPr algn="l">
-              <a:defRPr sz="4200" b="1">
-                <a:solidFill>
-                  <a:srgbClr val="183042"/>
+              <a:defRPr sz="4600" b="1">
+                <a:solidFill>
+                  <a:srgbClr val="FFFFFF"/>
                 </a:solidFill>
                 <a:latin typeface="Microsoft YaHei"/>
                 <a:ea typeface="微软雅黑"/>
               </a:defRPr>
             </a:pPr>
             <a:r>
-              <a:rPr sz="4200" b="1">
-                <a:solidFill>
-                  <a:srgbClr val="183042"/>
+              <a:rPr sz="4600" b="1">
+                <a:solidFill>
+                  <a:srgbClr val="FFFFFF"/>
                 </a:solidFill>
                 <a:latin typeface="Microsoft YaHei"/>
                 <a:ea typeface="微软雅黑"/>
               </a:rPr>
-              <a:t>第一章 排序算法概述</a:t>
-            </a:r>
-          </a:p>
-        </p:txBody>
-      </p:sp>
-      <p:sp>
-        <p:nvSpPr>
-          <p:cNvPr id="7" name="TextBox 6"/>
+              <a:t>02</a:t>
+            </a:r>
+          </a:p>
+        </p:txBody>
+      </p:sp>
+      <p:sp>
+        <p:nvSpPr>
+          <p:cNvPr id="5" name="TextBox 4"/>
           <p:cNvSpPr txBox="1"/>
           <p:nvPr/>
         </p:nvSpPr>
         <p:spPr>
           <a:xfrm>
-            <a:off x="4572000" y="3794760"/>
-            <a:ext cx="6309360" cy="914400"/>
+            <a:off x="932688" y="2331720"/>
+            <a:ext cx="10149840" cy="1234440"/>
           </a:xfrm>
           <a:prstGeom prst="rect">
             <a:avLst/>
@@ -3335,207 +3510,49 @@
           <a:noFill/>
         </p:spPr>
         <p:txBody>
-          <a:bodyPr wrap="square" anchor="t" lIns="18288" rIns="18288" tIns="9144" bIns="9144">
+          <a:bodyPr wrap="square" anchor="ctr" lIns="18288" rIns="18288" tIns="9144" bIns="9144">
             <a:noAutofit/>
           </a:bodyPr>
           <a:lstStyle/>
           <a:p>
             <a:pPr algn="l">
-              <a:defRPr sz="2300" b="0">
-                <a:solidFill>
-                  <a:srgbClr val="627987"/>
+              <a:defRPr sz="4200" b="1">
+                <a:solidFill>
+                  <a:srgbClr val="FFFFFF"/>
                 </a:solidFill>
                 <a:latin typeface="Microsoft YaHei"/>
                 <a:ea typeface="微软雅黑"/>
               </a:defRPr>
             </a:pPr>
             <a:r>
-              <a:rPr sz="2300" b="0">
-                <a:solidFill>
-                  <a:srgbClr val="627987"/>
+              <a:rPr sz="4200" b="1">
+                <a:solidFill>
+                  <a:srgbClr val="FFFFFF"/>
                 </a:solidFill>
                 <a:latin typeface="Microsoft YaHei"/>
                 <a:ea typeface="微软雅黑"/>
               </a:rPr>
-              <a:t>理解常见排序算法的思想与复杂度差异。</a:t>
-            </a:r>
-          </a:p>
-        </p:txBody>
-      </p:sp>
-    </p:spTree>
-  </p:cSld>
-  <p:clrMapOvr>
-    <a:masterClrMapping/>
-  </p:clrMapOvr>
-</p:sld>
-</file>
-
-<file path=ppt/slides/slide2.xml><?xml version="1.0" encoding="utf-8"?>
-<p:sld xmlns:a="http://schemas.openxmlformats.org/drawingml/2006/main" xmlns:p="http://schemas.openxmlformats.org/presentationml/2006/main" xmlns:r="http://schemas.openxmlformats.org/officeDocument/2006/relationships">
-  <p:cSld>
-    <p:bg>
-      <p:bgPr>
-        <a:solidFill>
-          <a:srgbClr val="F5F8FA"/>
-        </a:solidFill>
-        <a:effectLst/>
-      </p:bgPr>
-    </p:bg>
-    <p:spTree>
-      <p:nvGrpSpPr>
-        <p:cNvPr id="1" name=""/>
-        <p:cNvGrpSpPr/>
-        <p:nvPr/>
-      </p:nvGrpSpPr>
-      <p:grpSpPr/>
-      <p:sp>
-        <p:nvSpPr>
-          <p:cNvPr id="2" name="TextBox 1"/>
-          <p:cNvSpPr txBox="1"/>
-          <p:nvPr/>
-        </p:nvSpPr>
-        <p:spPr>
-          <a:xfrm>
-            <a:off x="11292840" y="6446520"/>
-            <a:ext cx="411480" cy="201168"/>
-          </a:xfrm>
-          <a:prstGeom prst="rect">
-            <a:avLst/>
-          </a:prstGeom>
-          <a:noFill/>
-        </p:spPr>
-        <p:txBody>
-          <a:bodyPr wrap="square" anchor="t" lIns="18288" rIns="18288" tIns="9144" bIns="9144">
-            <a:noAutofit/>
-          </a:bodyPr>
-          <a:lstStyle/>
-          <a:p>
-            <a:pPr algn="r">
-              <a:defRPr sz="900" b="0">
-                <a:solidFill>
-                  <a:srgbClr val="627987"/>
-                </a:solidFill>
-                <a:latin typeface="Microsoft YaHei"/>
-                <a:ea typeface="微软雅黑"/>
-              </a:defRPr>
-            </a:pPr>
-            <a:r>
-              <a:rPr sz="900" b="0">
-                <a:solidFill>
-                  <a:srgbClr val="627987"/>
-                </a:solidFill>
-                <a:latin typeface="Microsoft YaHei"/>
-                <a:ea typeface="微软雅黑"/>
-              </a:rPr>
-              <a:t>2</a:t>
-            </a:r>
-          </a:p>
-        </p:txBody>
-      </p:sp>
-      <p:sp>
-        <p:nvSpPr>
-          <p:cNvPr id="3" name="TextBox 2"/>
-          <p:cNvSpPr txBox="1"/>
-          <p:nvPr/>
-        </p:nvSpPr>
-        <p:spPr>
-          <a:xfrm>
-            <a:off x="685800" y="365760"/>
-            <a:ext cx="2011680" cy="219456"/>
-          </a:xfrm>
-          <a:prstGeom prst="rect">
-            <a:avLst/>
-          </a:prstGeom>
-          <a:noFill/>
-        </p:spPr>
-        <p:txBody>
-          <a:bodyPr wrap="square" anchor="t" lIns="18288" rIns="18288" tIns="9144" bIns="9144">
-            <a:noAutofit/>
-          </a:bodyPr>
-          <a:lstStyle/>
-          <a:p>
-            <a:pPr algn="l">
-              <a:defRPr sz="1000" b="1">
-                <a:solidFill>
-                  <a:srgbClr val="E89B52"/>
-                </a:solidFill>
-                <a:latin typeface="Microsoft YaHei"/>
-                <a:ea typeface="微软雅黑"/>
-              </a:defRPr>
-            </a:pPr>
-            <a:r>
-              <a:rPr sz="1000" b="1">
-                <a:solidFill>
-                  <a:srgbClr val="E89B52"/>
-                </a:solidFill>
-                <a:latin typeface="Microsoft YaHei"/>
-                <a:ea typeface="微软雅黑"/>
-              </a:rPr>
-              <a:t>CONTENT</a:t>
-            </a:r>
-          </a:p>
-        </p:txBody>
-      </p:sp>
-      <p:sp>
-        <p:nvSpPr>
-          <p:cNvPr id="4" name="TextBox 3"/>
-          <p:cNvSpPr txBox="1"/>
-          <p:nvPr/>
-        </p:nvSpPr>
-        <p:spPr>
-          <a:xfrm>
-            <a:off x="658368" y="640080"/>
-            <a:ext cx="10744200" cy="512064"/>
-          </a:xfrm>
-          <a:prstGeom prst="rect">
-            <a:avLst/>
-          </a:prstGeom>
-          <a:noFill/>
-        </p:spPr>
-        <p:txBody>
-          <a:bodyPr wrap="square" anchor="t" lIns="18288" rIns="18288" tIns="9144" bIns="9144">
-            <a:noAutofit/>
-          </a:bodyPr>
-          <a:lstStyle/>
-          <a:p>
-            <a:pPr algn="l">
-              <a:defRPr sz="3400" b="1">
-                <a:solidFill>
-                  <a:srgbClr val="183042"/>
-                </a:solidFill>
-                <a:latin typeface="Microsoft YaHei"/>
-                <a:ea typeface="微软雅黑"/>
-              </a:defRPr>
-            </a:pPr>
-            <a:r>
-              <a:rPr sz="3400" b="1">
-                <a:solidFill>
-                  <a:srgbClr val="183042"/>
-                </a:solidFill>
-                <a:latin typeface="Microsoft YaHei"/>
-                <a:ea typeface="微软雅黑"/>
-              </a:rPr>
-              <a:t>冒泡排序与快速排序</a:t>
-            </a:r>
-          </a:p>
-        </p:txBody>
-      </p:sp>
-      <p:sp>
-        <p:nvSpPr>
-          <p:cNvPr id="5" name="Rectangle 4"/>
+              <a:t>第一章 排序算法概述</a:t>
+            </a:r>
+          </a:p>
+        </p:txBody>
+      </p:sp>
+      <p:sp>
+        <p:nvSpPr>
+          <p:cNvPr id="6" name="Rectangle 5"/>
           <p:cNvSpPr/>
           <p:nvPr/>
         </p:nvSpPr>
         <p:spPr>
           <a:xfrm>
-            <a:off x="658368" y="1161288"/>
-            <a:ext cx="10863072" cy="18288"/>
+            <a:off x="950976" y="3675887"/>
+            <a:ext cx="685800" cy="45720"/>
           </a:xfrm>
           <a:prstGeom prst="rect">
             <a:avLst/>
           </a:prstGeom>
           <a:solidFill>
-            <a:srgbClr val="2F7E83"/>
+            <a:srgbClr val="FFFFFF"/>
           </a:solidFill>
           <a:ln>
             <a:noFill/>
@@ -3565,25 +3582,93 @@
       </p:sp>
       <p:sp>
         <p:nvSpPr>
-          <p:cNvPr id="6" name="Rounded Rectangle 5"/>
+          <p:cNvPr id="7" name="TextBox 6"/>
+          <p:cNvSpPr txBox="1"/>
+          <p:nvPr/>
+        </p:nvSpPr>
+        <p:spPr>
+          <a:xfrm>
+            <a:off x="950976" y="3950208"/>
+            <a:ext cx="9692640" cy="914400"/>
+          </a:xfrm>
+          <a:prstGeom prst="rect">
+            <a:avLst/>
+          </a:prstGeom>
+          <a:noFill/>
+        </p:spPr>
+        <p:txBody>
+          <a:bodyPr wrap="square" anchor="t" lIns="18288" rIns="18288" tIns="9144" bIns="9144">
+            <a:noAutofit/>
+          </a:bodyPr>
+          <a:lstStyle/>
+          <a:p>
+            <a:pPr algn="l">
+              <a:defRPr sz="2300" b="0">
+                <a:solidFill>
+                  <a:srgbClr val="FFFFFF"/>
+                </a:solidFill>
+                <a:latin typeface="Microsoft YaHei"/>
+                <a:ea typeface="微软雅黑"/>
+              </a:defRPr>
+            </a:pPr>
+            <a:r>
+              <a:rPr sz="2300" b="0">
+                <a:solidFill>
+                  <a:srgbClr val="FFFFFF"/>
+                </a:solidFill>
+                <a:latin typeface="Microsoft YaHei"/>
+                <a:ea typeface="微软雅黑"/>
+              </a:rPr>
+              <a:t>理解常见排序算法的思想与复杂度差异。</a:t>
+            </a:r>
+          </a:p>
+        </p:txBody>
+      </p:sp>
+    </p:spTree>
+  </p:cSld>
+  <p:clrMapOvr>
+    <a:masterClrMapping/>
+  </p:clrMapOvr>
+</p:sld>
+</file>
+
+<file path=ppt/slides/slide3.xml><?xml version="1.0" encoding="utf-8"?>
+<p:sld xmlns:a="http://schemas.openxmlformats.org/drawingml/2006/main" xmlns:p="http://schemas.openxmlformats.org/presentationml/2006/main" xmlns:r="http://schemas.openxmlformats.org/officeDocument/2006/relationships">
+  <p:cSld>
+    <p:bg>
+      <p:bgPr>
+        <a:solidFill>
+          <a:srgbClr val="FFFFFF"/>
+        </a:solidFill>
+        <a:effectLst/>
+      </p:bgPr>
+    </p:bg>
+    <p:spTree>
+      <p:nvGrpSpPr>
+        <p:cNvPr id="1" name=""/>
+        <p:cNvGrpSpPr/>
+        <p:nvPr/>
+      </p:nvGrpSpPr>
+      <p:grpSpPr/>
+      <p:sp>
+        <p:nvSpPr>
+          <p:cNvPr id="2" name="Rounded Rectangle 1"/>
           <p:cNvSpPr/>
           <p:nvPr/>
         </p:nvSpPr>
         <p:spPr>
           <a:xfrm>
-            <a:off x="658368" y="1298448"/>
-            <a:ext cx="5358384" cy="4892040"/>
+            <a:off x="11027664" y="246888"/>
+            <a:ext cx="566928" cy="283464"/>
           </a:xfrm>
           <a:prstGeom prst="roundRect">
             <a:avLst/>
           </a:prstGeom>
           <a:solidFill>
-            <a:srgbClr val="FFFFFF"/>
+            <a:srgbClr val="EEF1F5"/>
           </a:solidFill>
           <a:ln>
-            <a:solidFill>
-              <a:srgbClr val="627987"/>
-            </a:solidFill>
+            <a:noFill/>
           </a:ln>
         </p:spPr>
         <p:style>
@@ -3610,14 +3695,14 @@
       </p:sp>
       <p:sp>
         <p:nvSpPr>
-          <p:cNvPr id="7" name="TextBox 6"/>
+          <p:cNvPr id="3" name="TextBox 2"/>
           <p:cNvSpPr txBox="1"/>
           <p:nvPr/>
         </p:nvSpPr>
         <p:spPr>
           <a:xfrm>
-            <a:off x="914400" y="1463039"/>
-            <a:ext cx="4846320" cy="329184"/>
+            <a:off x="11045952" y="278892"/>
+            <a:ext cx="530352" cy="182880"/>
           </a:xfrm>
           <a:prstGeom prst="rect">
             <a:avLst/>
@@ -3625,43 +3710,43 @@
           <a:noFill/>
         </p:spPr>
         <p:txBody>
-          <a:bodyPr wrap="square" anchor="t" lIns="18288" rIns="18288" tIns="9144" bIns="9144">
+          <a:bodyPr wrap="square" anchor="ctr" lIns="18288" rIns="18288" tIns="9144" bIns="9144">
             <a:noAutofit/>
           </a:bodyPr>
           <a:lstStyle/>
           <a:p>
-            <a:pPr algn="l">
-              <a:defRPr sz="1500" b="1">
-                <a:solidFill>
-                  <a:srgbClr val="2F7E83"/>
+            <a:pPr algn="ctr">
+              <a:defRPr sz="900" b="0">
+                <a:solidFill>
+                  <a:srgbClr val="5F6C84"/>
                 </a:solidFill>
                 <a:latin typeface="Microsoft YaHei"/>
                 <a:ea typeface="微软雅黑"/>
               </a:defRPr>
             </a:pPr>
             <a:r>
-              <a:rPr sz="1500" b="1">
-                <a:solidFill>
-                  <a:srgbClr val="2F7E83"/>
+              <a:rPr sz="900" b="0">
+                <a:solidFill>
+                  <a:srgbClr val="5F6C84"/>
                 </a:solidFill>
                 <a:latin typeface="Microsoft YaHei"/>
                 <a:ea typeface="微软雅黑"/>
               </a:rPr>
-              <a:t>教学内容</a:t>
-            </a:r>
-          </a:p>
-        </p:txBody>
-      </p:sp>
-      <p:sp>
-        <p:nvSpPr>
-          <p:cNvPr id="8" name="TextBox 7"/>
+              <a:t>3</a:t>
+            </a:r>
+          </a:p>
+        </p:txBody>
+      </p:sp>
+      <p:sp>
+        <p:nvSpPr>
+          <p:cNvPr id="4" name="TextBox 3"/>
           <p:cNvSpPr txBox="1"/>
           <p:nvPr/>
         </p:nvSpPr>
         <p:spPr>
           <a:xfrm>
-            <a:off x="905256" y="1920240"/>
-            <a:ext cx="4864608" cy="4069079"/>
+            <a:off x="685800" y="365760"/>
+            <a:ext cx="2011680" cy="219456"/>
           </a:xfrm>
           <a:prstGeom prst="rect">
             <a:avLst/>
@@ -3669,114 +3754,96 @@
           <a:noFill/>
         </p:spPr>
         <p:txBody>
-          <a:bodyPr wrap="square" lIns="27432" rIns="27432" tIns="18288" bIns="18288">
+          <a:bodyPr wrap="square" anchor="t" lIns="18288" rIns="18288" tIns="9144" bIns="9144">
             <a:noAutofit/>
           </a:bodyPr>
           <a:lstStyle/>
           <a:p>
-            <a:pPr>
-              <a:lnSpc>
-                <a:spcPct val="113000"/>
-              </a:lnSpc>
-              <a:spcAft>
-                <a:spcPts val="700"/>
-              </a:spcAft>
-              <a:defRPr sz="1800">
-                <a:solidFill>
-                  <a:srgbClr val="183042"/>
+            <a:pPr algn="l">
+              <a:defRPr sz="1000" b="1">
+                <a:solidFill>
+                  <a:srgbClr val="F72585"/>
                 </a:solidFill>
                 <a:latin typeface="Microsoft YaHei"/>
                 <a:ea typeface="微软雅黑"/>
               </a:defRPr>
             </a:pPr>
             <a:r>
-              <a:rPr sz="1800">
-                <a:solidFill>
-                  <a:srgbClr val="183042"/>
+              <a:rPr sz="1000" b="1">
+                <a:solidFill>
+                  <a:srgbClr val="F72585"/>
                 </a:solidFill>
                 <a:latin typeface="Microsoft YaHei"/>
                 <a:ea typeface="微软雅黑"/>
               </a:rPr>
-              <a:t>正文｜冒泡排序通过相邻元素两两比较将最大值逐步移动到末尾，实现简单但平均复杂度为 O(n²)。快速排序采用分治思想，选取基准元素将序列划分为两部分，平均复杂度 O(n log n)。</a:t>
-            </a:r>
-          </a:p>
-          <a:p>
-            <a:pPr>
-              <a:lnSpc>
-                <a:spcPct val="113000"/>
-              </a:lnSpc>
-              <a:spcAft>
-                <a:spcPts val="700"/>
-              </a:spcAft>
-              <a:defRPr sz="1800">
-                <a:solidFill>
-                  <a:srgbClr val="183042"/>
+              <a:t>CONTENT</a:t>
+            </a:r>
+          </a:p>
+        </p:txBody>
+      </p:sp>
+      <p:sp>
+        <p:nvSpPr>
+          <p:cNvPr id="5" name="TextBox 4"/>
+          <p:cNvSpPr txBox="1"/>
+          <p:nvPr/>
+        </p:nvSpPr>
+        <p:spPr>
+          <a:xfrm>
+            <a:off x="658368" y="640080"/>
+            <a:ext cx="10012680" cy="512064"/>
+          </a:xfrm>
+          <a:prstGeom prst="rect">
+            <a:avLst/>
+          </a:prstGeom>
+          <a:noFill/>
+        </p:spPr>
+        <p:txBody>
+          <a:bodyPr wrap="square" anchor="t" lIns="18288" rIns="18288" tIns="9144" bIns="9144">
+            <a:noAutofit/>
+          </a:bodyPr>
+          <a:lstStyle/>
+          <a:p>
+            <a:pPr algn="l">
+              <a:defRPr sz="3400" b="1">
+                <a:solidFill>
+                  <a:srgbClr val="1A1A2E"/>
                 </a:solidFill>
                 <a:latin typeface="Microsoft YaHei"/>
                 <a:ea typeface="微软雅黑"/>
               </a:defRPr>
             </a:pPr>
             <a:r>
-              <a:rPr sz="1800">
-                <a:solidFill>
-                  <a:srgbClr val="183042"/>
+              <a:rPr sz="3400" b="1">
+                <a:solidFill>
+                  <a:srgbClr val="1A1A2E"/>
                 </a:solidFill>
                 <a:latin typeface="Microsoft YaHei"/>
                 <a:ea typeface="微软雅黑"/>
               </a:rPr>
-              <a:t>• 要点｜冒泡排序：稳定，O(n²)</a:t>
-            </a:r>
-          </a:p>
-          <a:p>
-            <a:pPr>
-              <a:lnSpc>
-                <a:spcPct val="113000"/>
-              </a:lnSpc>
-              <a:spcAft>
-                <a:spcPts val="700"/>
-              </a:spcAft>
-              <a:defRPr sz="1800">
-                <a:solidFill>
-                  <a:srgbClr val="183042"/>
-                </a:solidFill>
-                <a:latin typeface="Microsoft YaHei"/>
-                <a:ea typeface="微软雅黑"/>
-              </a:defRPr>
-            </a:pPr>
-            <a:r>
-              <a:rPr sz="1800">
-                <a:solidFill>
-                  <a:srgbClr val="183042"/>
-                </a:solidFill>
-                <a:latin typeface="Microsoft YaHei"/>
-                <a:ea typeface="微软雅黑"/>
-              </a:rPr>
-              <a:t>• 要点｜快速排序：不稳定，平均 O(n log n)</a:t>
-            </a:r>
-          </a:p>
-        </p:txBody>
-      </p:sp>
-      <p:sp>
-        <p:nvSpPr>
-          <p:cNvPr id="9" name="Rounded Rectangle 8"/>
+              <a:t>冒泡排序与快速排序</a:t>
+            </a:r>
+          </a:p>
+        </p:txBody>
+      </p:sp>
+      <p:sp>
+        <p:nvSpPr>
+          <p:cNvPr id="6" name="Rectangle 5"/>
           <p:cNvSpPr/>
           <p:nvPr/>
         </p:nvSpPr>
         <p:spPr>
           <a:xfrm>
-            <a:off x="6199632" y="1298448"/>
-            <a:ext cx="5321808" cy="4892040"/>
-          </a:xfrm>
-          <a:prstGeom prst="roundRect">
+            <a:off x="658368" y="1161288"/>
+            <a:ext cx="10863072" cy="18288"/>
+          </a:xfrm>
+          <a:prstGeom prst="rect">
             <a:avLst/>
           </a:prstGeom>
           <a:solidFill>
-            <a:srgbClr val="FFFFFF"/>
+            <a:srgbClr val="7209B7"/>
           </a:solidFill>
           <a:ln>
-            <a:solidFill>
-              <a:srgbClr val="627987"/>
-            </a:solidFill>
+            <a:noFill/>
           </a:ln>
         </p:spPr>
         <p:style>
@@ -3803,302 +3870,25 @@
       </p:sp>
       <p:sp>
         <p:nvSpPr>
-          <p:cNvPr id="10" name="TextBox 9"/>
-          <p:cNvSpPr txBox="1"/>
-          <p:nvPr/>
-        </p:nvSpPr>
-        <p:spPr>
-          <a:xfrm>
-            <a:off x="6455664" y="1463039"/>
-            <a:ext cx="4809744" cy="329184"/>
-          </a:xfrm>
-          <a:prstGeom prst="rect">
-            <a:avLst/>
-          </a:prstGeom>
-          <a:noFill/>
-        </p:spPr>
-        <p:txBody>
-          <a:bodyPr wrap="square" anchor="t" lIns="18288" rIns="18288" tIns="9144" bIns="9144">
-            <a:noAutofit/>
-          </a:bodyPr>
-          <a:lstStyle/>
-          <a:p>
-            <a:pPr algn="l">
-              <a:defRPr sz="1500" b="1">
-                <a:solidFill>
-                  <a:srgbClr val="2F7E83"/>
-                </a:solidFill>
-                <a:latin typeface="Microsoft YaHei"/>
-                <a:ea typeface="微软雅黑"/>
-              </a:defRPr>
-            </a:pPr>
-            <a:r>
-              <a:rPr sz="1500" b="1">
-                <a:solidFill>
-                  <a:srgbClr val="2F7E83"/>
-                </a:solidFill>
-                <a:latin typeface="Microsoft YaHei"/>
-                <a:ea typeface="微软雅黑"/>
-              </a:rPr>
-              <a:t>讲授分段</a:t>
-            </a:r>
-          </a:p>
-        </p:txBody>
-      </p:sp>
-      <p:sp>
-        <p:nvSpPr>
-          <p:cNvPr id="11" name="TextBox 10"/>
-          <p:cNvSpPr txBox="1"/>
-          <p:nvPr/>
-        </p:nvSpPr>
-        <p:spPr>
-          <a:xfrm>
-            <a:off x="6446520" y="1920240"/>
-            <a:ext cx="4828032" cy="4069079"/>
-          </a:xfrm>
-          <a:prstGeom prst="rect">
-            <a:avLst/>
-          </a:prstGeom>
-          <a:noFill/>
-        </p:spPr>
-        <p:txBody>
-          <a:bodyPr wrap="square" lIns="27432" rIns="27432" tIns="18288" bIns="18288">
-            <a:noAutofit/>
-          </a:bodyPr>
-          <a:lstStyle/>
-          <a:p>
-            <a:pPr>
-              <a:lnSpc>
-                <a:spcPct val="113000"/>
-              </a:lnSpc>
-              <a:spcAft>
-                <a:spcPts val="700"/>
-              </a:spcAft>
-              <a:defRPr sz="1800">
-                <a:solidFill>
-                  <a:srgbClr val="183042"/>
-                </a:solidFill>
-                <a:latin typeface="Microsoft YaHei"/>
-                <a:ea typeface="微软雅黑"/>
-              </a:defRPr>
-            </a:pPr>
-            <a:r>
-              <a:rPr sz="1800">
-                <a:solidFill>
-                  <a:srgbClr val="183042"/>
-                </a:solidFill>
-                <a:latin typeface="Microsoft YaHei"/>
-                <a:ea typeface="微软雅黑"/>
-              </a:rPr>
-              <a:t>讲解 · 2分钟｜先演示冒泡排序的一轮比较过程。</a:t>
-            </a:r>
-          </a:p>
-          <a:p>
-            <a:pPr>
-              <a:lnSpc>
-                <a:spcPct val="113000"/>
-              </a:lnSpc>
-              <a:spcAft>
-                <a:spcPts val="700"/>
-              </a:spcAft>
-              <a:defRPr sz="1800">
-                <a:solidFill>
-                  <a:srgbClr val="183042"/>
-                </a:solidFill>
-                <a:latin typeface="Microsoft YaHei"/>
-                <a:ea typeface="微软雅黑"/>
-              </a:defRPr>
-            </a:pPr>
-            <a:r>
-              <a:rPr sz="1800">
-                <a:solidFill>
-                  <a:srgbClr val="183042"/>
-                </a:solidFill>
-                <a:latin typeface="Microsoft YaHei"/>
-                <a:ea typeface="微软雅黑"/>
-              </a:rPr>
-              <a:t>互动 · 3分钟｜请学生手动模拟对 [5, 3, 8, 1] 的一轮冒泡。</a:t>
-            </a:r>
-          </a:p>
-        </p:txBody>
-      </p:sp>
-    </p:spTree>
-  </p:cSld>
-  <p:clrMapOvr>
-    <a:masterClrMapping/>
-  </p:clrMapOvr>
-</p:sld>
-</file>
-
-<file path=ppt/slides/slide3.xml><?xml version="1.0" encoding="utf-8"?>
-<p:sld xmlns:a="http://schemas.openxmlformats.org/drawingml/2006/main" xmlns:p="http://schemas.openxmlformats.org/presentationml/2006/main" xmlns:r="http://schemas.openxmlformats.org/officeDocument/2006/relationships">
-  <p:cSld>
-    <p:bg>
-      <p:bgPr>
-        <a:solidFill>
-          <a:srgbClr val="F5F8FA"/>
-        </a:solidFill>
-        <a:effectLst/>
-      </p:bgPr>
-    </p:bg>
-    <p:spTree>
-      <p:nvGrpSpPr>
-        <p:cNvPr id="1" name=""/>
-        <p:cNvGrpSpPr/>
-        <p:nvPr/>
-      </p:nvGrpSpPr>
-      <p:grpSpPr/>
-      <p:sp>
-        <p:nvSpPr>
-          <p:cNvPr id="2" name="TextBox 1"/>
-          <p:cNvSpPr txBox="1"/>
-          <p:nvPr/>
-        </p:nvSpPr>
-        <p:spPr>
-          <a:xfrm>
-            <a:off x="11292840" y="6446520"/>
-            <a:ext cx="411480" cy="201168"/>
-          </a:xfrm>
-          <a:prstGeom prst="rect">
-            <a:avLst/>
-          </a:prstGeom>
-          <a:noFill/>
-        </p:spPr>
-        <p:txBody>
-          <a:bodyPr wrap="square" anchor="t" lIns="18288" rIns="18288" tIns="9144" bIns="9144">
-            <a:noAutofit/>
-          </a:bodyPr>
-          <a:lstStyle/>
-          <a:p>
-            <a:pPr algn="r">
-              <a:defRPr sz="900" b="0">
-                <a:solidFill>
-                  <a:srgbClr val="627987"/>
-                </a:solidFill>
-                <a:latin typeface="Microsoft YaHei"/>
-                <a:ea typeface="微软雅黑"/>
-              </a:defRPr>
-            </a:pPr>
-            <a:r>
-              <a:rPr sz="900" b="0">
-                <a:solidFill>
-                  <a:srgbClr val="627987"/>
-                </a:solidFill>
-                <a:latin typeface="Microsoft YaHei"/>
-                <a:ea typeface="微软雅黑"/>
-              </a:rPr>
-              <a:t>3</a:t>
-            </a:r>
-          </a:p>
-        </p:txBody>
-      </p:sp>
-      <p:sp>
-        <p:nvSpPr>
-          <p:cNvPr id="3" name="TextBox 2"/>
-          <p:cNvSpPr txBox="1"/>
-          <p:nvPr/>
-        </p:nvSpPr>
-        <p:spPr>
-          <a:xfrm>
-            <a:off x="685800" y="365760"/>
-            <a:ext cx="2011680" cy="219456"/>
-          </a:xfrm>
-          <a:prstGeom prst="rect">
-            <a:avLst/>
-          </a:prstGeom>
-          <a:noFill/>
-        </p:spPr>
-        <p:txBody>
-          <a:bodyPr wrap="square" anchor="t" lIns="18288" rIns="18288" tIns="9144" bIns="9144">
-            <a:noAutofit/>
-          </a:bodyPr>
-          <a:lstStyle/>
-          <a:p>
-            <a:pPr algn="l">
-              <a:defRPr sz="1000" b="1">
-                <a:solidFill>
-                  <a:srgbClr val="E89B52"/>
-                </a:solidFill>
-                <a:latin typeface="Microsoft YaHei"/>
-                <a:ea typeface="微软雅黑"/>
-              </a:defRPr>
-            </a:pPr>
-            <a:r>
-              <a:rPr sz="1000" b="1">
-                <a:solidFill>
-                  <a:srgbClr val="E89B52"/>
-                </a:solidFill>
-                <a:latin typeface="Microsoft YaHei"/>
-                <a:ea typeface="微软雅黑"/>
-              </a:rPr>
-              <a:t>INTERACTION</a:t>
-            </a:r>
-          </a:p>
-        </p:txBody>
-      </p:sp>
-      <p:sp>
-        <p:nvSpPr>
-          <p:cNvPr id="4" name="TextBox 3"/>
-          <p:cNvSpPr txBox="1"/>
-          <p:nvPr/>
-        </p:nvSpPr>
-        <p:spPr>
-          <a:xfrm>
-            <a:off x="658368" y="640080"/>
-            <a:ext cx="10744200" cy="512064"/>
-          </a:xfrm>
-          <a:prstGeom prst="rect">
-            <a:avLst/>
-          </a:prstGeom>
-          <a:noFill/>
-        </p:spPr>
-        <p:txBody>
-          <a:bodyPr wrap="square" anchor="t" lIns="18288" rIns="18288" tIns="9144" bIns="9144">
-            <a:noAutofit/>
-          </a:bodyPr>
-          <a:lstStyle/>
-          <a:p>
-            <a:pPr algn="l">
-              <a:defRPr sz="3400" b="1">
-                <a:solidFill>
-                  <a:srgbClr val="183042"/>
-                </a:solidFill>
-                <a:latin typeface="Microsoft YaHei"/>
-                <a:ea typeface="微软雅黑"/>
-              </a:defRPr>
-            </a:pPr>
-            <a:r>
-              <a:rPr sz="3400" b="1">
-                <a:solidFill>
-                  <a:srgbClr val="183042"/>
-                </a:solidFill>
-                <a:latin typeface="Microsoft YaHei"/>
-                <a:ea typeface="微软雅黑"/>
-              </a:rPr>
-              <a:t>课堂练习：排序算法</a:t>
-            </a:r>
-          </a:p>
-        </p:txBody>
-      </p:sp>
-      <p:sp>
-        <p:nvSpPr>
-          <p:cNvPr id="5" name="Rectangle 4"/>
+          <p:cNvPr id="7" name="Rounded Rectangle 6"/>
           <p:cNvSpPr/>
           <p:nvPr/>
         </p:nvSpPr>
         <p:spPr>
           <a:xfrm>
-            <a:off x="658368" y="1161288"/>
-            <a:ext cx="10863072" cy="18288"/>
-          </a:xfrm>
-          <a:prstGeom prst="rect">
+            <a:off x="658368" y="1298448"/>
+            <a:ext cx="5358384" cy="4892040"/>
+          </a:xfrm>
+          <a:prstGeom prst="roundRect">
             <a:avLst/>
           </a:prstGeom>
           <a:solidFill>
-            <a:srgbClr val="2F7E83"/>
+            <a:srgbClr val="FFFFFF"/>
           </a:solidFill>
           <a:ln>
-            <a:noFill/>
+            <a:solidFill>
+              <a:srgbClr val="5F6C84"/>
+            </a:solidFill>
           </a:ln>
         </p:spPr>
         <p:style>
@@ -4125,23 +3915,173 @@
       </p:sp>
       <p:sp>
         <p:nvSpPr>
-          <p:cNvPr id="6" name="Rounded Rectangle 5"/>
+          <p:cNvPr id="8" name="TextBox 7"/>
+          <p:cNvSpPr txBox="1"/>
+          <p:nvPr/>
+        </p:nvSpPr>
+        <p:spPr>
+          <a:xfrm>
+            <a:off x="914400" y="1463039"/>
+            <a:ext cx="4846320" cy="329184"/>
+          </a:xfrm>
+          <a:prstGeom prst="rect">
+            <a:avLst/>
+          </a:prstGeom>
+          <a:noFill/>
+        </p:spPr>
+        <p:txBody>
+          <a:bodyPr wrap="square" anchor="t" lIns="18288" rIns="18288" tIns="9144" bIns="9144">
+            <a:noAutofit/>
+          </a:bodyPr>
+          <a:lstStyle/>
+          <a:p>
+            <a:pPr algn="l">
+              <a:defRPr sz="1500" b="1">
+                <a:solidFill>
+                  <a:srgbClr val="7209B7"/>
+                </a:solidFill>
+                <a:latin typeface="Microsoft YaHei"/>
+                <a:ea typeface="微软雅黑"/>
+              </a:defRPr>
+            </a:pPr>
+            <a:r>
+              <a:rPr sz="1500" b="1">
+                <a:solidFill>
+                  <a:srgbClr val="7209B7"/>
+                </a:solidFill>
+                <a:latin typeface="Microsoft YaHei"/>
+                <a:ea typeface="微软雅黑"/>
+              </a:rPr>
+              <a:t>教学内容</a:t>
+            </a:r>
+          </a:p>
+        </p:txBody>
+      </p:sp>
+      <p:sp>
+        <p:nvSpPr>
+          <p:cNvPr id="9" name="TextBox 8"/>
+          <p:cNvSpPr txBox="1"/>
+          <p:nvPr/>
+        </p:nvSpPr>
+        <p:spPr>
+          <a:xfrm>
+            <a:off x="905256" y="1920240"/>
+            <a:ext cx="4864608" cy="4069079"/>
+          </a:xfrm>
+          <a:prstGeom prst="rect">
+            <a:avLst/>
+          </a:prstGeom>
+          <a:noFill/>
+        </p:spPr>
+        <p:txBody>
+          <a:bodyPr wrap="square" lIns="27432" rIns="27432" tIns="18288" bIns="18288">
+            <a:noAutofit/>
+          </a:bodyPr>
+          <a:lstStyle/>
+          <a:p>
+            <a:pPr>
+              <a:lnSpc>
+                <a:spcPct val="113000"/>
+              </a:lnSpc>
+              <a:spcAft>
+                <a:spcPts val="700"/>
+              </a:spcAft>
+              <a:defRPr sz="1800">
+                <a:solidFill>
+                  <a:srgbClr val="1A1A2E"/>
+                </a:solidFill>
+                <a:latin typeface="Microsoft YaHei"/>
+                <a:ea typeface="微软雅黑"/>
+              </a:defRPr>
+            </a:pPr>
+            <a:r>
+              <a:rPr sz="1800">
+                <a:solidFill>
+                  <a:srgbClr val="1A1A2E"/>
+                </a:solidFill>
+                <a:latin typeface="Microsoft YaHei"/>
+                <a:ea typeface="微软雅黑"/>
+              </a:rPr>
+              <a:t>正文｜冒泡排序通过相邻元素两两比较将最大值逐步移动到末尾，实现简单但平均复杂度为 O(n²)。快速排序采用分治思想，选取基准元素将序列划分为两部分，平均复杂度 O(n log n)。</a:t>
+            </a:r>
+          </a:p>
+          <a:p>
+            <a:pPr>
+              <a:lnSpc>
+                <a:spcPct val="113000"/>
+              </a:lnSpc>
+              <a:spcAft>
+                <a:spcPts val="700"/>
+              </a:spcAft>
+              <a:defRPr sz="1800">
+                <a:solidFill>
+                  <a:srgbClr val="1A1A2E"/>
+                </a:solidFill>
+                <a:latin typeface="Microsoft YaHei"/>
+                <a:ea typeface="微软雅黑"/>
+              </a:defRPr>
+            </a:pPr>
+            <a:r>
+              <a:rPr sz="1800">
+                <a:solidFill>
+                  <a:srgbClr val="1A1A2E"/>
+                </a:solidFill>
+                <a:latin typeface="Microsoft YaHei"/>
+                <a:ea typeface="微软雅黑"/>
+              </a:rPr>
+              <a:t>• 要点｜冒泡排序：稳定，O(n²)</a:t>
+            </a:r>
+          </a:p>
+          <a:p>
+            <a:pPr>
+              <a:lnSpc>
+                <a:spcPct val="113000"/>
+              </a:lnSpc>
+              <a:spcAft>
+                <a:spcPts val="700"/>
+              </a:spcAft>
+              <a:defRPr sz="1800">
+                <a:solidFill>
+                  <a:srgbClr val="1A1A2E"/>
+                </a:solidFill>
+                <a:latin typeface="Microsoft YaHei"/>
+                <a:ea typeface="微软雅黑"/>
+              </a:defRPr>
+            </a:pPr>
+            <a:r>
+              <a:rPr sz="1800">
+                <a:solidFill>
+                  <a:srgbClr val="1A1A2E"/>
+                </a:solidFill>
+                <a:latin typeface="Microsoft YaHei"/>
+                <a:ea typeface="微软雅黑"/>
+              </a:rPr>
+              <a:t>• 要点｜快速排序：不稳定，平均 O(n log n)</a:t>
+            </a:r>
+          </a:p>
+        </p:txBody>
+      </p:sp>
+      <p:sp>
+        <p:nvSpPr>
+          <p:cNvPr id="10" name="Rounded Rectangle 9"/>
           <p:cNvSpPr/>
           <p:nvPr/>
         </p:nvSpPr>
         <p:spPr>
           <a:xfrm>
-            <a:off x="777240" y="1417320"/>
-            <a:ext cx="530352" cy="530352"/>
+            <a:off x="6199632" y="1298448"/>
+            <a:ext cx="5321808" cy="4892040"/>
           </a:xfrm>
           <a:prstGeom prst="roundRect">
             <a:avLst/>
           </a:prstGeom>
           <a:solidFill>
-            <a:srgbClr val="E89B52"/>
+            <a:srgbClr val="FFFFFF"/>
           </a:solidFill>
           <a:ln>
-            <a:noFill/>
+            <a:solidFill>
+              <a:srgbClr val="5F6C84"/>
+            </a:solidFill>
           </a:ln>
         </p:spPr>
         <p:style>
@@ -4168,14 +4108,14 @@
       </p:sp>
       <p:sp>
         <p:nvSpPr>
-          <p:cNvPr id="7" name="TextBox 6"/>
+          <p:cNvPr id="11" name="TextBox 10"/>
           <p:cNvSpPr txBox="1"/>
           <p:nvPr/>
         </p:nvSpPr>
         <p:spPr>
           <a:xfrm>
-            <a:off x="777240" y="1435608"/>
-            <a:ext cx="530352" cy="384048"/>
+            <a:off x="6455664" y="1463039"/>
+            <a:ext cx="4809744" cy="329184"/>
           </a:xfrm>
           <a:prstGeom prst="rect">
             <a:avLst/>
@@ -4188,38 +4128,38 @@
           </a:bodyPr>
           <a:lstStyle/>
           <a:p>
-            <a:pPr algn="ctr">
-              <a:defRPr sz="1700" b="1">
-                <a:solidFill>
-                  <a:srgbClr val="FFFFFF"/>
+            <a:pPr algn="l">
+              <a:defRPr sz="1500" b="1">
+                <a:solidFill>
+                  <a:srgbClr val="7209B7"/>
                 </a:solidFill>
                 <a:latin typeface="Microsoft YaHei"/>
                 <a:ea typeface="微软雅黑"/>
               </a:defRPr>
             </a:pPr>
             <a:r>
-              <a:rPr sz="1700" b="1">
-                <a:solidFill>
-                  <a:srgbClr val="FFFFFF"/>
+              <a:rPr sz="1500" b="1">
+                <a:solidFill>
+                  <a:srgbClr val="7209B7"/>
                 </a:solidFill>
                 <a:latin typeface="Microsoft YaHei"/>
                 <a:ea typeface="微软雅黑"/>
               </a:rPr>
-              <a:t>1</a:t>
-            </a:r>
-          </a:p>
-        </p:txBody>
-      </p:sp>
-      <p:sp>
-        <p:nvSpPr>
-          <p:cNvPr id="8" name="TextBox 7"/>
+              <a:t>讲授分段</a:t>
+            </a:r>
+          </a:p>
+        </p:txBody>
+      </p:sp>
+      <p:sp>
+        <p:nvSpPr>
+          <p:cNvPr id="12" name="TextBox 11"/>
           <p:cNvSpPr txBox="1"/>
           <p:nvPr/>
         </p:nvSpPr>
         <p:spPr>
           <a:xfrm>
-            <a:off x="1536192" y="1399032"/>
-            <a:ext cx="9646920" cy="749808"/>
+            <a:off x="6446520" y="1920240"/>
+            <a:ext cx="4828032" cy="4069079"/>
           </a:xfrm>
           <a:prstGeom prst="rect">
             <a:avLst/>
@@ -4227,137 +4167,108 @@
           <a:noFill/>
         </p:spPr>
         <p:txBody>
-          <a:bodyPr wrap="square" anchor="t" lIns="18288" rIns="18288" tIns="9144" bIns="9144">
+          <a:bodyPr wrap="square" lIns="27432" rIns="27432" tIns="18288" bIns="18288">
             <a:noAutofit/>
           </a:bodyPr>
           <a:lstStyle/>
           <a:p>
-            <a:pPr algn="l">
-              <a:defRPr sz="2400" b="1">
-                <a:solidFill>
-                  <a:srgbClr val="183042"/>
+            <a:pPr>
+              <a:lnSpc>
+                <a:spcPct val="113000"/>
+              </a:lnSpc>
+              <a:spcAft>
+                <a:spcPts val="700"/>
+              </a:spcAft>
+              <a:defRPr sz="1800">
+                <a:solidFill>
+                  <a:srgbClr val="1A1A2E"/>
                 </a:solidFill>
                 <a:latin typeface="Microsoft YaHei"/>
                 <a:ea typeface="微软雅黑"/>
               </a:defRPr>
             </a:pPr>
             <a:r>
-              <a:rPr sz="2400" b="1">
-                <a:solidFill>
-                  <a:srgbClr val="183042"/>
+              <a:rPr sz="1800">
+                <a:solidFill>
+                  <a:srgbClr val="1A1A2E"/>
                 </a:solidFill>
                 <a:latin typeface="Microsoft YaHei"/>
                 <a:ea typeface="微软雅黑"/>
               </a:rPr>
-              <a:t>快速排序的平均时间复杂度是？</a:t>
-            </a:r>
-          </a:p>
-        </p:txBody>
-      </p:sp>
-      <p:sp>
-        <p:nvSpPr>
-          <p:cNvPr id="9" name="TextBox 8"/>
-          <p:cNvSpPr txBox="1"/>
-          <p:nvPr/>
-        </p:nvSpPr>
-        <p:spPr>
-          <a:xfrm>
-            <a:off x="1536192" y="2167128"/>
-            <a:ext cx="9646920" cy="566928"/>
-          </a:xfrm>
-          <a:prstGeom prst="rect">
-            <a:avLst/>
-          </a:prstGeom>
-          <a:noFill/>
-        </p:spPr>
-        <p:txBody>
-          <a:bodyPr wrap="square" anchor="t" lIns="18288" rIns="18288" tIns="9144" bIns="9144">
-            <a:noAutofit/>
-          </a:bodyPr>
-          <a:lstStyle/>
-          <a:p>
-            <a:pPr algn="l">
-              <a:defRPr sz="1500" b="0">
-                <a:solidFill>
-                  <a:srgbClr val="183042"/>
+              <a:t>讲解 · 2分钟｜先演示冒泡排序的一轮比较过程。</a:t>
+            </a:r>
+          </a:p>
+          <a:p>
+            <a:pPr>
+              <a:lnSpc>
+                <a:spcPct val="113000"/>
+              </a:lnSpc>
+              <a:spcAft>
+                <a:spcPts val="700"/>
+              </a:spcAft>
+              <a:defRPr sz="1800">
+                <a:solidFill>
+                  <a:srgbClr val="1A1A2E"/>
                 </a:solidFill>
                 <a:latin typeface="Microsoft YaHei"/>
                 <a:ea typeface="微软雅黑"/>
               </a:defRPr>
             </a:pPr>
             <a:r>
-              <a:rPr sz="1500" b="0">
-                <a:solidFill>
-                  <a:srgbClr val="183042"/>
+              <a:rPr sz="1800">
+                <a:solidFill>
+                  <a:srgbClr val="1A1A2E"/>
                 </a:solidFill>
                 <a:latin typeface="Microsoft YaHei"/>
                 <a:ea typeface="微软雅黑"/>
               </a:rPr>
-              <a:t>A．O(n)    B．O(n log n)    C．O(n²)    D．O(log n)</a:t>
-            </a:r>
-          </a:p>
-        </p:txBody>
-      </p:sp>
-      <p:sp>
-        <p:nvSpPr>
-          <p:cNvPr id="10" name="TextBox 9"/>
-          <p:cNvSpPr txBox="1"/>
-          <p:nvPr/>
-        </p:nvSpPr>
-        <p:spPr>
-          <a:xfrm>
-            <a:off x="1536192" y="2807208"/>
-            <a:ext cx="9646920" cy="365760"/>
-          </a:xfrm>
-          <a:prstGeom prst="rect">
-            <a:avLst/>
-          </a:prstGeom>
-          <a:noFill/>
-        </p:spPr>
-        <p:txBody>
-          <a:bodyPr wrap="square" anchor="t" lIns="18288" rIns="18288" tIns="9144" bIns="9144">
-            <a:noAutofit/>
-          </a:bodyPr>
-          <a:lstStyle/>
-          <a:p>
-            <a:pPr algn="l">
-              <a:defRPr sz="1300" b="1">
-                <a:solidFill>
-                  <a:srgbClr val="2F7E83"/>
-                </a:solidFill>
-                <a:latin typeface="Microsoft YaHei"/>
-                <a:ea typeface="微软雅黑"/>
-              </a:defRPr>
-            </a:pPr>
-            <a:r>
-              <a:rPr sz="1300" b="1">
-                <a:solidFill>
-                  <a:srgbClr val="2F7E83"/>
-                </a:solidFill>
-                <a:latin typeface="Microsoft YaHei"/>
-                <a:ea typeface="微软雅黑"/>
-              </a:rPr>
-              <a:t>参考答案：B</a:t>
-            </a:r>
-          </a:p>
-        </p:txBody>
-      </p:sp>
-      <p:sp>
-        <p:nvSpPr>
-          <p:cNvPr id="11" name="Rounded Rectangle 10"/>
+              <a:t>互动 · 3分钟｜请学生手动模拟对 [5, 3, 8, 1] 的一轮冒泡。</a:t>
+            </a:r>
+          </a:p>
+        </p:txBody>
+      </p:sp>
+    </p:spTree>
+  </p:cSld>
+  <p:clrMapOvr>
+    <a:masterClrMapping/>
+  </p:clrMapOvr>
+</p:sld>
+</file>
+
+<file path=ppt/slides/slide4.xml><?xml version="1.0" encoding="utf-8"?>
+<p:sld xmlns:a="http://schemas.openxmlformats.org/drawingml/2006/main" xmlns:p="http://schemas.openxmlformats.org/presentationml/2006/main" xmlns:r="http://schemas.openxmlformats.org/officeDocument/2006/relationships">
+  <p:cSld>
+    <p:bg>
+      <p:bgPr>
+        <a:solidFill>
+          <a:srgbClr val="FFF5F9"/>
+        </a:solidFill>
+        <a:effectLst/>
+      </p:bgPr>
+    </p:bg>
+    <p:spTree>
+      <p:nvGrpSpPr>
+        <p:cNvPr id="1" name=""/>
+        <p:cNvGrpSpPr/>
+        <p:nvPr/>
+      </p:nvGrpSpPr>
+      <p:grpSpPr/>
+      <p:sp>
+        <p:nvSpPr>
+          <p:cNvPr id="2" name="Rounded Rectangle 1"/>
           <p:cNvSpPr/>
           <p:nvPr/>
         </p:nvSpPr>
         <p:spPr>
           <a:xfrm>
-            <a:off x="777240" y="3657600"/>
-            <a:ext cx="530352" cy="530352"/>
+            <a:off x="11027664" y="246888"/>
+            <a:ext cx="566928" cy="283464"/>
           </a:xfrm>
           <a:prstGeom prst="roundRect">
             <a:avLst/>
           </a:prstGeom>
           <a:solidFill>
-            <a:srgbClr val="E89B52"/>
+            <a:srgbClr val="EEF1F5"/>
           </a:solidFill>
           <a:ln>
             <a:noFill/>
@@ -4387,14 +4298,14 @@
       </p:sp>
       <p:sp>
         <p:nvSpPr>
-          <p:cNvPr id="12" name="TextBox 11"/>
+          <p:cNvPr id="3" name="TextBox 2"/>
           <p:cNvSpPr txBox="1"/>
           <p:nvPr/>
         </p:nvSpPr>
         <p:spPr>
           <a:xfrm>
-            <a:off x="777240" y="3675887"/>
-            <a:ext cx="530352" cy="384048"/>
+            <a:off x="11045952" y="278892"/>
+            <a:ext cx="530352" cy="182880"/>
           </a:xfrm>
           <a:prstGeom prst="rect">
             <a:avLst/>
@@ -4402,43 +4313,43 @@
           <a:noFill/>
         </p:spPr>
         <p:txBody>
-          <a:bodyPr wrap="square" anchor="t" lIns="18288" rIns="18288" tIns="9144" bIns="9144">
+          <a:bodyPr wrap="square" anchor="ctr" lIns="18288" rIns="18288" tIns="9144" bIns="9144">
             <a:noAutofit/>
           </a:bodyPr>
           <a:lstStyle/>
           <a:p>
             <a:pPr algn="ctr">
-              <a:defRPr sz="1700" b="1">
-                <a:solidFill>
-                  <a:srgbClr val="FFFFFF"/>
+              <a:defRPr sz="900" b="0">
+                <a:solidFill>
+                  <a:srgbClr val="5F6C84"/>
                 </a:solidFill>
                 <a:latin typeface="Microsoft YaHei"/>
                 <a:ea typeface="微软雅黑"/>
               </a:defRPr>
             </a:pPr>
             <a:r>
-              <a:rPr sz="1700" b="1">
-                <a:solidFill>
-                  <a:srgbClr val="FFFFFF"/>
+              <a:rPr sz="900" b="0">
+                <a:solidFill>
+                  <a:srgbClr val="5F6C84"/>
                 </a:solidFill>
                 <a:latin typeface="Microsoft YaHei"/>
                 <a:ea typeface="微软雅黑"/>
               </a:rPr>
-              <a:t>2</a:t>
-            </a:r>
-          </a:p>
-        </p:txBody>
-      </p:sp>
-      <p:sp>
-        <p:nvSpPr>
-          <p:cNvPr id="13" name="TextBox 12"/>
+              <a:t>4</a:t>
+            </a:r>
+          </a:p>
+        </p:txBody>
+      </p:sp>
+      <p:sp>
+        <p:nvSpPr>
+          <p:cNvPr id="4" name="TextBox 3"/>
           <p:cNvSpPr txBox="1"/>
           <p:nvPr/>
         </p:nvSpPr>
         <p:spPr>
           <a:xfrm>
-            <a:off x="1536192" y="3639312"/>
-            <a:ext cx="9646920" cy="749808"/>
+            <a:off x="685800" y="365760"/>
+            <a:ext cx="2011680" cy="219456"/>
           </a:xfrm>
           <a:prstGeom prst="rect">
             <a:avLst/>
@@ -4452,37 +4363,37 @@
           <a:lstStyle/>
           <a:p>
             <a:pPr algn="l">
-              <a:defRPr sz="2400" b="1">
-                <a:solidFill>
-                  <a:srgbClr val="183042"/>
+              <a:defRPr sz="1000" b="1">
+                <a:solidFill>
+                  <a:srgbClr val="F72585"/>
                 </a:solidFill>
                 <a:latin typeface="Microsoft YaHei"/>
                 <a:ea typeface="微软雅黑"/>
               </a:defRPr>
             </a:pPr>
             <a:r>
-              <a:rPr sz="2400" b="1">
-                <a:solidFill>
-                  <a:srgbClr val="183042"/>
+              <a:rPr sz="1000" b="1">
+                <a:solidFill>
+                  <a:srgbClr val="F72585"/>
                 </a:solidFill>
                 <a:latin typeface="Microsoft YaHei"/>
                 <a:ea typeface="微软雅黑"/>
               </a:rPr>
-              <a:t>下列哪种排序算法是稳定的？</a:t>
-            </a:r>
-          </a:p>
-        </p:txBody>
-      </p:sp>
-      <p:sp>
-        <p:nvSpPr>
-          <p:cNvPr id="14" name="TextBox 13"/>
+              <a:t>INTERACTION</a:t>
+            </a:r>
+          </a:p>
+        </p:txBody>
+      </p:sp>
+      <p:sp>
+        <p:nvSpPr>
+          <p:cNvPr id="5" name="TextBox 4"/>
           <p:cNvSpPr txBox="1"/>
           <p:nvPr/>
         </p:nvSpPr>
         <p:spPr>
           <a:xfrm>
-            <a:off x="1536192" y="4407408"/>
-            <a:ext cx="9646920" cy="566928"/>
+            <a:off x="658368" y="640080"/>
+            <a:ext cx="10012680" cy="512064"/>
           </a:xfrm>
           <a:prstGeom prst="rect">
             <a:avLst/>
@@ -4496,232 +4407,30 @@
           <a:lstStyle/>
           <a:p>
             <a:pPr algn="l">
-              <a:defRPr sz="1800" b="0">
-                <a:solidFill>
-                  <a:srgbClr val="183042"/>
+              <a:defRPr sz="3400" b="1">
+                <a:solidFill>
+                  <a:srgbClr val="1A1A2E"/>
                 </a:solidFill>
                 <a:latin typeface="Microsoft YaHei"/>
                 <a:ea typeface="微软雅黑"/>
               </a:defRPr>
             </a:pPr>
             <a:r>
-              <a:rPr sz="1800" b="0">
-                <a:solidFill>
-                  <a:srgbClr val="183042"/>
+              <a:rPr sz="3400" b="1">
+                <a:solidFill>
+                  <a:srgbClr val="1A1A2E"/>
                 </a:solidFill>
                 <a:latin typeface="Microsoft YaHei"/>
                 <a:ea typeface="微软雅黑"/>
               </a:rPr>
-              <a:t>A．快速排序    B．堆排序    C．冒泡排序    D．选择排序</a:t>
-            </a:r>
-          </a:p>
-        </p:txBody>
-      </p:sp>
-      <p:sp>
-        <p:nvSpPr>
-          <p:cNvPr id="15" name="TextBox 14"/>
-          <p:cNvSpPr txBox="1"/>
-          <p:nvPr/>
-        </p:nvSpPr>
-        <p:spPr>
-          <a:xfrm>
-            <a:off x="1536192" y="5047488"/>
-            <a:ext cx="9646920" cy="365760"/>
-          </a:xfrm>
-          <a:prstGeom prst="rect">
-            <a:avLst/>
-          </a:prstGeom>
-          <a:noFill/>
-        </p:spPr>
-        <p:txBody>
-          <a:bodyPr wrap="square" anchor="t" lIns="18288" rIns="18288" tIns="9144" bIns="9144">
-            <a:noAutofit/>
-          </a:bodyPr>
-          <a:lstStyle/>
-          <a:p>
-            <a:pPr algn="l">
-              <a:defRPr sz="1300" b="1">
-                <a:solidFill>
-                  <a:srgbClr val="2F7E83"/>
-                </a:solidFill>
-                <a:latin typeface="Microsoft YaHei"/>
-                <a:ea typeface="微软雅黑"/>
-              </a:defRPr>
-            </a:pPr>
-            <a:r>
-              <a:rPr sz="1300" b="1">
-                <a:solidFill>
-                  <a:srgbClr val="2F7E83"/>
-                </a:solidFill>
-                <a:latin typeface="Microsoft YaHei"/>
-                <a:ea typeface="微软雅黑"/>
-              </a:rPr>
-              <a:t>参考答案：C</a:t>
-            </a:r>
-          </a:p>
-        </p:txBody>
-      </p:sp>
-    </p:spTree>
-  </p:cSld>
-  <p:clrMapOvr>
-    <a:masterClrMapping/>
-  </p:clrMapOvr>
-</p:sld>
-</file>
-
-<file path=ppt/slides/slide4.xml><?xml version="1.0" encoding="utf-8"?>
-<p:sld xmlns:a="http://schemas.openxmlformats.org/drawingml/2006/main" xmlns:p="http://schemas.openxmlformats.org/presentationml/2006/main" xmlns:r="http://schemas.openxmlformats.org/officeDocument/2006/relationships">
-  <p:cSld>
-    <p:bg>
-      <p:bgPr>
-        <a:solidFill>
-          <a:srgbClr val="F5F8FA"/>
-        </a:solidFill>
-        <a:effectLst/>
-      </p:bgPr>
-    </p:bg>
-    <p:spTree>
-      <p:nvGrpSpPr>
-        <p:cNvPr id="1" name=""/>
-        <p:cNvGrpSpPr/>
-        <p:nvPr/>
-      </p:nvGrpSpPr>
-      <p:grpSpPr/>
-      <p:sp>
-        <p:nvSpPr>
-          <p:cNvPr id="2" name="TextBox 1"/>
-          <p:cNvSpPr txBox="1"/>
-          <p:nvPr/>
-        </p:nvSpPr>
-        <p:spPr>
-          <a:xfrm>
-            <a:off x="11292840" y="6446520"/>
-            <a:ext cx="411480" cy="201168"/>
-          </a:xfrm>
-          <a:prstGeom prst="rect">
-            <a:avLst/>
-          </a:prstGeom>
-          <a:noFill/>
-        </p:spPr>
-        <p:txBody>
-          <a:bodyPr wrap="square" anchor="t" lIns="18288" rIns="18288" tIns="9144" bIns="9144">
-            <a:noAutofit/>
-          </a:bodyPr>
-          <a:lstStyle/>
-          <a:p>
-            <a:pPr algn="r">
-              <a:defRPr sz="900" b="0">
-                <a:solidFill>
-                  <a:srgbClr val="627987"/>
-                </a:solidFill>
-                <a:latin typeface="Microsoft YaHei"/>
-                <a:ea typeface="微软雅黑"/>
-              </a:defRPr>
-            </a:pPr>
-            <a:r>
-              <a:rPr sz="900" b="0">
-                <a:solidFill>
-                  <a:srgbClr val="627987"/>
-                </a:solidFill>
-                <a:latin typeface="Microsoft YaHei"/>
-                <a:ea typeface="微软雅黑"/>
-              </a:rPr>
-              <a:t>3</a:t>
-            </a:r>
-          </a:p>
-        </p:txBody>
-      </p:sp>
-      <p:sp>
-        <p:nvSpPr>
-          <p:cNvPr id="3" name="TextBox 2"/>
-          <p:cNvSpPr txBox="1"/>
-          <p:nvPr/>
-        </p:nvSpPr>
-        <p:spPr>
-          <a:xfrm>
-            <a:off x="685800" y="365760"/>
-            <a:ext cx="2011680" cy="219456"/>
-          </a:xfrm>
-          <a:prstGeom prst="rect">
-            <a:avLst/>
-          </a:prstGeom>
-          <a:noFill/>
-        </p:spPr>
-        <p:txBody>
-          <a:bodyPr wrap="square" anchor="t" lIns="18288" rIns="18288" tIns="9144" bIns="9144">
-            <a:noAutofit/>
-          </a:bodyPr>
-          <a:lstStyle/>
-          <a:p>
-            <a:pPr algn="l">
-              <a:defRPr sz="1000" b="1">
-                <a:solidFill>
-                  <a:srgbClr val="E89B52"/>
-                </a:solidFill>
-                <a:latin typeface="Microsoft YaHei"/>
-                <a:ea typeface="微软雅黑"/>
-              </a:defRPr>
-            </a:pPr>
-            <a:r>
-              <a:rPr sz="1000" b="1">
-                <a:solidFill>
-                  <a:srgbClr val="E89B52"/>
-                </a:solidFill>
-                <a:latin typeface="Microsoft YaHei"/>
-                <a:ea typeface="微软雅黑"/>
-              </a:rPr>
-              <a:t>INTERACTION</a:t>
-            </a:r>
-          </a:p>
-        </p:txBody>
-      </p:sp>
-      <p:sp>
-        <p:nvSpPr>
-          <p:cNvPr id="4" name="TextBox 3"/>
-          <p:cNvSpPr txBox="1"/>
-          <p:nvPr/>
-        </p:nvSpPr>
-        <p:spPr>
-          <a:xfrm>
-            <a:off x="658368" y="640080"/>
-            <a:ext cx="10744200" cy="512064"/>
-          </a:xfrm>
-          <a:prstGeom prst="rect">
-            <a:avLst/>
-          </a:prstGeom>
-          <a:noFill/>
-        </p:spPr>
-        <p:txBody>
-          <a:bodyPr wrap="square" anchor="t" lIns="18288" rIns="18288" tIns="9144" bIns="9144">
-            <a:noAutofit/>
-          </a:bodyPr>
-          <a:lstStyle/>
-          <a:p>
-            <a:pPr algn="l">
-              <a:defRPr sz="3400" b="1">
-                <a:solidFill>
-                  <a:srgbClr val="183042"/>
-                </a:solidFill>
-                <a:latin typeface="Microsoft YaHei"/>
-                <a:ea typeface="微软雅黑"/>
-              </a:defRPr>
-            </a:pPr>
-            <a:r>
-              <a:rPr sz="3400" b="1">
-                <a:solidFill>
-                  <a:srgbClr val="183042"/>
-                </a:solidFill>
-                <a:latin typeface="Microsoft YaHei"/>
-                <a:ea typeface="微软雅黑"/>
-              </a:rPr>
-              <a:t>课堂练习：排序算法（续）</a:t>
-            </a:r>
-          </a:p>
-        </p:txBody>
-      </p:sp>
-      <p:sp>
-        <p:nvSpPr>
-          <p:cNvPr id="5" name="Rectangle 4"/>
+              <a:t>课堂练习：排序算法</a:t>
+            </a:r>
+          </a:p>
+        </p:txBody>
+      </p:sp>
+      <p:sp>
+        <p:nvSpPr>
+          <p:cNvPr id="6" name="Rectangle 5"/>
           <p:cNvSpPr/>
           <p:nvPr/>
         </p:nvSpPr>
@@ -4734,7 +4443,7 @@
             <a:avLst/>
           </a:prstGeom>
           <a:solidFill>
-            <a:srgbClr val="2F7E83"/>
+            <a:srgbClr val="7209B7"/>
           </a:solidFill>
           <a:ln>
             <a:noFill/>
@@ -4764,7 +4473,7 @@
       </p:sp>
       <p:sp>
         <p:nvSpPr>
-          <p:cNvPr id="6" name="Rounded Rectangle 5"/>
+          <p:cNvPr id="7" name="Rounded Rectangle 6"/>
           <p:cNvSpPr/>
           <p:nvPr/>
         </p:nvSpPr>
@@ -4777,7 +4486,7 @@
             <a:avLst/>
           </a:prstGeom>
           <a:solidFill>
-            <a:srgbClr val="E89B52"/>
+            <a:srgbClr val="F72585"/>
           </a:solidFill>
           <a:ln>
             <a:noFill/>
@@ -4807,7 +4516,7 @@
       </p:sp>
       <p:sp>
         <p:nvSpPr>
-          <p:cNvPr id="7" name="TextBox 6"/>
+          <p:cNvPr id="8" name="TextBox 7"/>
           <p:cNvSpPr txBox="1"/>
           <p:nvPr/>
         </p:nvSpPr>
@@ -4844,14 +4553,14 @@
                 <a:latin typeface="Microsoft YaHei"/>
                 <a:ea typeface="微软雅黑"/>
               </a:rPr>
-              <a:t>3</a:t>
-            </a:r>
-          </a:p>
-        </p:txBody>
-      </p:sp>
-      <p:sp>
-        <p:nvSpPr>
-          <p:cNvPr id="8" name="TextBox 7"/>
+              <a:t>1</a:t>
+            </a:r>
+          </a:p>
+        </p:txBody>
+      </p:sp>
+      <p:sp>
+        <p:nvSpPr>
+          <p:cNvPr id="9" name="TextBox 8"/>
           <p:cNvSpPr txBox="1"/>
           <p:nvPr/>
         </p:nvSpPr>
@@ -4874,7 +4583,7 @@
             <a:pPr algn="l">
               <a:defRPr sz="2400" b="1">
                 <a:solidFill>
-                  <a:srgbClr val="183042"/>
+                  <a:srgbClr val="1A1A2E"/>
                 </a:solidFill>
                 <a:latin typeface="Microsoft YaHei"/>
                 <a:ea typeface="微软雅黑"/>
@@ -4883,12 +4592,319 @@
             <a:r>
               <a:rPr sz="2400" b="1">
                 <a:solidFill>
-                  <a:srgbClr val="183042"/>
+                  <a:srgbClr val="1A1A2E"/>
                 </a:solidFill>
                 <a:latin typeface="Microsoft YaHei"/>
                 <a:ea typeface="微软雅黑"/>
               </a:rPr>
-              <a:t>开放题：结合本节内容说明什么场景下应选择插入排序。</a:t>
+              <a:t>快速排序的平均时间复杂度是？</a:t>
+            </a:r>
+          </a:p>
+        </p:txBody>
+      </p:sp>
+      <p:sp>
+        <p:nvSpPr>
+          <p:cNvPr id="10" name="TextBox 9"/>
+          <p:cNvSpPr txBox="1"/>
+          <p:nvPr/>
+        </p:nvSpPr>
+        <p:spPr>
+          <a:xfrm>
+            <a:off x="1536192" y="2167128"/>
+            <a:ext cx="9646920" cy="566928"/>
+          </a:xfrm>
+          <a:prstGeom prst="rect">
+            <a:avLst/>
+          </a:prstGeom>
+          <a:noFill/>
+        </p:spPr>
+        <p:txBody>
+          <a:bodyPr wrap="square" anchor="t" lIns="18288" rIns="18288" tIns="9144" bIns="9144">
+            <a:noAutofit/>
+          </a:bodyPr>
+          <a:lstStyle/>
+          <a:p>
+            <a:pPr algn="l">
+              <a:defRPr sz="1500" b="0">
+                <a:solidFill>
+                  <a:srgbClr val="1A1A2E"/>
+                </a:solidFill>
+                <a:latin typeface="Microsoft YaHei"/>
+                <a:ea typeface="微软雅黑"/>
+              </a:defRPr>
+            </a:pPr>
+            <a:r>
+              <a:rPr sz="1500" b="0">
+                <a:solidFill>
+                  <a:srgbClr val="1A1A2E"/>
+                </a:solidFill>
+                <a:latin typeface="Microsoft YaHei"/>
+                <a:ea typeface="微软雅黑"/>
+              </a:rPr>
+              <a:t>A．O(n)    B．O(n log n)    C．O(n²)    D．O(log n)</a:t>
+            </a:r>
+          </a:p>
+        </p:txBody>
+      </p:sp>
+      <p:sp>
+        <p:nvSpPr>
+          <p:cNvPr id="11" name="TextBox 10"/>
+          <p:cNvSpPr txBox="1"/>
+          <p:nvPr/>
+        </p:nvSpPr>
+        <p:spPr>
+          <a:xfrm>
+            <a:off x="1536192" y="2807208"/>
+            <a:ext cx="9646920" cy="365760"/>
+          </a:xfrm>
+          <a:prstGeom prst="rect">
+            <a:avLst/>
+          </a:prstGeom>
+          <a:noFill/>
+        </p:spPr>
+        <p:txBody>
+          <a:bodyPr wrap="square" anchor="t" lIns="18288" rIns="18288" tIns="9144" bIns="9144">
+            <a:noAutofit/>
+          </a:bodyPr>
+          <a:lstStyle/>
+          <a:p>
+            <a:pPr algn="l">
+              <a:defRPr sz="1300" b="1">
+                <a:solidFill>
+                  <a:srgbClr val="7209B7"/>
+                </a:solidFill>
+                <a:latin typeface="Microsoft YaHei"/>
+                <a:ea typeface="微软雅黑"/>
+              </a:defRPr>
+            </a:pPr>
+            <a:r>
+              <a:rPr sz="1300" b="1">
+                <a:solidFill>
+                  <a:srgbClr val="7209B7"/>
+                </a:solidFill>
+                <a:latin typeface="Microsoft YaHei"/>
+                <a:ea typeface="微软雅黑"/>
+              </a:rPr>
+              <a:t>参考答案：B</a:t>
+            </a:r>
+          </a:p>
+        </p:txBody>
+      </p:sp>
+      <p:sp>
+        <p:nvSpPr>
+          <p:cNvPr id="12" name="Rounded Rectangle 11"/>
+          <p:cNvSpPr/>
+          <p:nvPr/>
+        </p:nvSpPr>
+        <p:spPr>
+          <a:xfrm>
+            <a:off x="777240" y="3657600"/>
+            <a:ext cx="530352" cy="530352"/>
+          </a:xfrm>
+          <a:prstGeom prst="roundRect">
+            <a:avLst/>
+          </a:prstGeom>
+          <a:solidFill>
+            <a:srgbClr val="F72585"/>
+          </a:solidFill>
+          <a:ln>
+            <a:noFill/>
+          </a:ln>
+        </p:spPr>
+        <p:style>
+          <a:lnRef idx="1">
+            <a:schemeClr val="accent1"/>
+          </a:lnRef>
+          <a:fillRef idx="3">
+            <a:schemeClr val="accent1"/>
+          </a:fillRef>
+          <a:effectRef idx="2">
+            <a:schemeClr val="accent1"/>
+          </a:effectRef>
+          <a:fontRef idx="minor">
+            <a:schemeClr val="lt1"/>
+          </a:fontRef>
+        </p:style>
+        <p:txBody>
+          <a:bodyPr rtlCol="0" anchor="ctr"/>
+          <a:lstStyle/>
+          <a:p>
+            <a:pPr algn="ctr"/>
+          </a:p>
+        </p:txBody>
+      </p:sp>
+      <p:sp>
+        <p:nvSpPr>
+          <p:cNvPr id="13" name="TextBox 12"/>
+          <p:cNvSpPr txBox="1"/>
+          <p:nvPr/>
+        </p:nvSpPr>
+        <p:spPr>
+          <a:xfrm>
+            <a:off x="777240" y="3675887"/>
+            <a:ext cx="530352" cy="384048"/>
+          </a:xfrm>
+          <a:prstGeom prst="rect">
+            <a:avLst/>
+          </a:prstGeom>
+          <a:noFill/>
+        </p:spPr>
+        <p:txBody>
+          <a:bodyPr wrap="square" anchor="t" lIns="18288" rIns="18288" tIns="9144" bIns="9144">
+            <a:noAutofit/>
+          </a:bodyPr>
+          <a:lstStyle/>
+          <a:p>
+            <a:pPr algn="ctr">
+              <a:defRPr sz="1700" b="1">
+                <a:solidFill>
+                  <a:srgbClr val="FFFFFF"/>
+                </a:solidFill>
+                <a:latin typeface="Microsoft YaHei"/>
+                <a:ea typeface="微软雅黑"/>
+              </a:defRPr>
+            </a:pPr>
+            <a:r>
+              <a:rPr sz="1700" b="1">
+                <a:solidFill>
+                  <a:srgbClr val="FFFFFF"/>
+                </a:solidFill>
+                <a:latin typeface="Microsoft YaHei"/>
+                <a:ea typeface="微软雅黑"/>
+              </a:rPr>
+              <a:t>2</a:t>
+            </a:r>
+          </a:p>
+        </p:txBody>
+      </p:sp>
+      <p:sp>
+        <p:nvSpPr>
+          <p:cNvPr id="14" name="TextBox 13"/>
+          <p:cNvSpPr txBox="1"/>
+          <p:nvPr/>
+        </p:nvSpPr>
+        <p:spPr>
+          <a:xfrm>
+            <a:off x="1536192" y="3639312"/>
+            <a:ext cx="9646920" cy="749808"/>
+          </a:xfrm>
+          <a:prstGeom prst="rect">
+            <a:avLst/>
+          </a:prstGeom>
+          <a:noFill/>
+        </p:spPr>
+        <p:txBody>
+          <a:bodyPr wrap="square" anchor="t" lIns="18288" rIns="18288" tIns="9144" bIns="9144">
+            <a:noAutofit/>
+          </a:bodyPr>
+          <a:lstStyle/>
+          <a:p>
+            <a:pPr algn="l">
+              <a:defRPr sz="2400" b="1">
+                <a:solidFill>
+                  <a:srgbClr val="1A1A2E"/>
+                </a:solidFill>
+                <a:latin typeface="Microsoft YaHei"/>
+                <a:ea typeface="微软雅黑"/>
+              </a:defRPr>
+            </a:pPr>
+            <a:r>
+              <a:rPr sz="2400" b="1">
+                <a:solidFill>
+                  <a:srgbClr val="1A1A2E"/>
+                </a:solidFill>
+                <a:latin typeface="Microsoft YaHei"/>
+                <a:ea typeface="微软雅黑"/>
+              </a:rPr>
+              <a:t>下列哪种排序算法是稳定的？</a:t>
+            </a:r>
+          </a:p>
+        </p:txBody>
+      </p:sp>
+      <p:sp>
+        <p:nvSpPr>
+          <p:cNvPr id="15" name="TextBox 14"/>
+          <p:cNvSpPr txBox="1"/>
+          <p:nvPr/>
+        </p:nvSpPr>
+        <p:spPr>
+          <a:xfrm>
+            <a:off x="1536192" y="4407408"/>
+            <a:ext cx="9646920" cy="566928"/>
+          </a:xfrm>
+          <a:prstGeom prst="rect">
+            <a:avLst/>
+          </a:prstGeom>
+          <a:noFill/>
+        </p:spPr>
+        <p:txBody>
+          <a:bodyPr wrap="square" anchor="t" lIns="18288" rIns="18288" tIns="9144" bIns="9144">
+            <a:noAutofit/>
+          </a:bodyPr>
+          <a:lstStyle/>
+          <a:p>
+            <a:pPr algn="l">
+              <a:defRPr sz="1800" b="0">
+                <a:solidFill>
+                  <a:srgbClr val="1A1A2E"/>
+                </a:solidFill>
+                <a:latin typeface="Microsoft YaHei"/>
+                <a:ea typeface="微软雅黑"/>
+              </a:defRPr>
+            </a:pPr>
+            <a:r>
+              <a:rPr sz="1800" b="0">
+                <a:solidFill>
+                  <a:srgbClr val="1A1A2E"/>
+                </a:solidFill>
+                <a:latin typeface="Microsoft YaHei"/>
+                <a:ea typeface="微软雅黑"/>
+              </a:rPr>
+              <a:t>A．快速排序    B．堆排序    C．冒泡排序    D．选择排序</a:t>
+            </a:r>
+          </a:p>
+        </p:txBody>
+      </p:sp>
+      <p:sp>
+        <p:nvSpPr>
+          <p:cNvPr id="16" name="TextBox 15"/>
+          <p:cNvSpPr txBox="1"/>
+          <p:nvPr/>
+        </p:nvSpPr>
+        <p:spPr>
+          <a:xfrm>
+            <a:off x="1536192" y="5047488"/>
+            <a:ext cx="9646920" cy="365760"/>
+          </a:xfrm>
+          <a:prstGeom prst="rect">
+            <a:avLst/>
+          </a:prstGeom>
+          <a:noFill/>
+        </p:spPr>
+        <p:txBody>
+          <a:bodyPr wrap="square" anchor="t" lIns="18288" rIns="18288" tIns="9144" bIns="9144">
+            <a:noAutofit/>
+          </a:bodyPr>
+          <a:lstStyle/>
+          <a:p>
+            <a:pPr algn="l">
+              <a:defRPr sz="1300" b="1">
+                <a:solidFill>
+                  <a:srgbClr val="7209B7"/>
+                </a:solidFill>
+                <a:latin typeface="Microsoft YaHei"/>
+                <a:ea typeface="微软雅黑"/>
+              </a:defRPr>
+            </a:pPr>
+            <a:r>
+              <a:rPr sz="1300" b="1">
+                <a:solidFill>
+                  <a:srgbClr val="7209B7"/>
+                </a:solidFill>
+                <a:latin typeface="Microsoft YaHei"/>
+                <a:ea typeface="微软雅黑"/>
+              </a:rPr>
+              <a:t>参考答案：C</a:t>
             </a:r>
           </a:p>
         </p:txBody>
@@ -4907,7 +4923,7 @@
     <p:bg>
       <p:bgPr>
         <a:solidFill>
-          <a:srgbClr val="F5F8FA"/>
+          <a:srgbClr val="FFF5F9"/>
         </a:solidFill>
         <a:effectLst/>
       </p:bgPr>
@@ -4921,152 +4937,20 @@
       <p:grpSpPr/>
       <p:sp>
         <p:nvSpPr>
-          <p:cNvPr id="2" name="TextBox 1"/>
-          <p:cNvSpPr txBox="1"/>
-          <p:nvPr/>
-        </p:nvSpPr>
-        <p:spPr>
-          <a:xfrm>
-            <a:off x="11292840" y="6446520"/>
-            <a:ext cx="411480" cy="201168"/>
-          </a:xfrm>
-          <a:prstGeom prst="rect">
-            <a:avLst/>
-          </a:prstGeom>
-          <a:noFill/>
-        </p:spPr>
-        <p:txBody>
-          <a:bodyPr wrap="square" anchor="t" lIns="18288" rIns="18288" tIns="9144" bIns="9144">
-            <a:noAutofit/>
-          </a:bodyPr>
-          <a:lstStyle/>
-          <a:p>
-            <a:pPr algn="r">
-              <a:defRPr sz="900" b="0">
-                <a:solidFill>
-                  <a:srgbClr val="627987"/>
-                </a:solidFill>
-                <a:latin typeface="Microsoft YaHei"/>
-                <a:ea typeface="微软雅黑"/>
-              </a:defRPr>
-            </a:pPr>
-            <a:r>
-              <a:rPr sz="900" b="0">
-                <a:solidFill>
-                  <a:srgbClr val="627987"/>
-                </a:solidFill>
-                <a:latin typeface="Microsoft YaHei"/>
-                <a:ea typeface="微软雅黑"/>
-              </a:rPr>
-              <a:t>4</a:t>
-            </a:r>
-          </a:p>
-        </p:txBody>
-      </p:sp>
-      <p:sp>
-        <p:nvSpPr>
-          <p:cNvPr id="3" name="TextBox 2"/>
-          <p:cNvSpPr txBox="1"/>
-          <p:nvPr/>
-        </p:nvSpPr>
-        <p:spPr>
-          <a:xfrm>
-            <a:off x="685800" y="365760"/>
-            <a:ext cx="2011680" cy="219456"/>
-          </a:xfrm>
-          <a:prstGeom prst="rect">
-            <a:avLst/>
-          </a:prstGeom>
-          <a:noFill/>
-        </p:spPr>
-        <p:txBody>
-          <a:bodyPr wrap="square" anchor="t" lIns="18288" rIns="18288" tIns="9144" bIns="9144">
-            <a:noAutofit/>
-          </a:bodyPr>
-          <a:lstStyle/>
-          <a:p>
-            <a:pPr algn="l">
-              <a:defRPr sz="1000" b="1">
-                <a:solidFill>
-                  <a:srgbClr val="E89B52"/>
-                </a:solidFill>
-                <a:latin typeface="Microsoft YaHei"/>
-                <a:ea typeface="微软雅黑"/>
-              </a:defRPr>
-            </a:pPr>
-            <a:r>
-              <a:rPr sz="1000" b="1">
-                <a:solidFill>
-                  <a:srgbClr val="E89B52"/>
-                </a:solidFill>
-                <a:latin typeface="Microsoft YaHei"/>
-                <a:ea typeface="微软雅黑"/>
-              </a:rPr>
-              <a:t>SUMMARY</a:t>
-            </a:r>
-          </a:p>
-        </p:txBody>
-      </p:sp>
-      <p:sp>
-        <p:nvSpPr>
-          <p:cNvPr id="4" name="TextBox 3"/>
-          <p:cNvSpPr txBox="1"/>
-          <p:nvPr/>
-        </p:nvSpPr>
-        <p:spPr>
-          <a:xfrm>
-            <a:off x="658368" y="640080"/>
-            <a:ext cx="10744200" cy="512064"/>
-          </a:xfrm>
-          <a:prstGeom prst="rect">
-            <a:avLst/>
-          </a:prstGeom>
-          <a:noFill/>
-        </p:spPr>
-        <p:txBody>
-          <a:bodyPr wrap="square" anchor="t" lIns="18288" rIns="18288" tIns="9144" bIns="9144">
-            <a:noAutofit/>
-          </a:bodyPr>
-          <a:lstStyle/>
-          <a:p>
-            <a:pPr algn="l">
-              <a:defRPr sz="3400" b="1">
-                <a:solidFill>
-                  <a:srgbClr val="183042"/>
-                </a:solidFill>
-                <a:latin typeface="Microsoft YaHei"/>
-                <a:ea typeface="微软雅黑"/>
-              </a:defRPr>
-            </a:pPr>
-            <a:r>
-              <a:rPr sz="3400" b="1">
-                <a:solidFill>
-                  <a:srgbClr val="183042"/>
-                </a:solidFill>
-                <a:latin typeface="Microsoft YaHei"/>
-                <a:ea typeface="微软雅黑"/>
-              </a:rPr>
-              <a:t>本节小结</a:t>
-            </a:r>
-          </a:p>
-        </p:txBody>
-      </p:sp>
-      <p:sp>
-        <p:nvSpPr>
-          <p:cNvPr id="5" name="Rectangle 4"/>
+          <p:cNvPr id="2" name="Rounded Rectangle 1"/>
           <p:cNvSpPr/>
           <p:nvPr/>
         </p:nvSpPr>
         <p:spPr>
           <a:xfrm>
-            <a:off x="658368" y="1161288"/>
-            <a:ext cx="10863072" cy="18288"/>
-          </a:xfrm>
-          <a:prstGeom prst="rect">
+            <a:off x="11027664" y="246888"/>
+            <a:ext cx="566928" cy="283464"/>
+          </a:xfrm>
+          <a:prstGeom prst="roundRect">
             <a:avLst/>
           </a:prstGeom>
           <a:solidFill>
-            <a:srgbClr val="2F7E83"/>
+            <a:srgbClr val="EEF1F5"/>
           </a:solidFill>
           <a:ln>
             <a:noFill/>
@@ -5096,20 +4980,152 @@
       </p:sp>
       <p:sp>
         <p:nvSpPr>
+          <p:cNvPr id="3" name="TextBox 2"/>
+          <p:cNvSpPr txBox="1"/>
+          <p:nvPr/>
+        </p:nvSpPr>
+        <p:spPr>
+          <a:xfrm>
+            <a:off x="11045952" y="278892"/>
+            <a:ext cx="530352" cy="182880"/>
+          </a:xfrm>
+          <a:prstGeom prst="rect">
+            <a:avLst/>
+          </a:prstGeom>
+          <a:noFill/>
+        </p:spPr>
+        <p:txBody>
+          <a:bodyPr wrap="square" anchor="ctr" lIns="18288" rIns="18288" tIns="9144" bIns="9144">
+            <a:noAutofit/>
+          </a:bodyPr>
+          <a:lstStyle/>
+          <a:p>
+            <a:pPr algn="ctr">
+              <a:defRPr sz="900" b="0">
+                <a:solidFill>
+                  <a:srgbClr val="5F6C84"/>
+                </a:solidFill>
+                <a:latin typeface="Microsoft YaHei"/>
+                <a:ea typeface="微软雅黑"/>
+              </a:defRPr>
+            </a:pPr>
+            <a:r>
+              <a:rPr sz="900" b="0">
+                <a:solidFill>
+                  <a:srgbClr val="5F6C84"/>
+                </a:solidFill>
+                <a:latin typeface="Microsoft YaHei"/>
+                <a:ea typeface="微软雅黑"/>
+              </a:rPr>
+              <a:t>4</a:t>
+            </a:r>
+          </a:p>
+        </p:txBody>
+      </p:sp>
+      <p:sp>
+        <p:nvSpPr>
+          <p:cNvPr id="4" name="TextBox 3"/>
+          <p:cNvSpPr txBox="1"/>
+          <p:nvPr/>
+        </p:nvSpPr>
+        <p:spPr>
+          <a:xfrm>
+            <a:off x="685800" y="365760"/>
+            <a:ext cx="2011680" cy="219456"/>
+          </a:xfrm>
+          <a:prstGeom prst="rect">
+            <a:avLst/>
+          </a:prstGeom>
+          <a:noFill/>
+        </p:spPr>
+        <p:txBody>
+          <a:bodyPr wrap="square" anchor="t" lIns="18288" rIns="18288" tIns="9144" bIns="9144">
+            <a:noAutofit/>
+          </a:bodyPr>
+          <a:lstStyle/>
+          <a:p>
+            <a:pPr algn="l">
+              <a:defRPr sz="1000" b="1">
+                <a:solidFill>
+                  <a:srgbClr val="F72585"/>
+                </a:solidFill>
+                <a:latin typeface="Microsoft YaHei"/>
+                <a:ea typeface="微软雅黑"/>
+              </a:defRPr>
+            </a:pPr>
+            <a:r>
+              <a:rPr sz="1000" b="1">
+                <a:solidFill>
+                  <a:srgbClr val="F72585"/>
+                </a:solidFill>
+                <a:latin typeface="Microsoft YaHei"/>
+                <a:ea typeface="微软雅黑"/>
+              </a:rPr>
+              <a:t>INTERACTION</a:t>
+            </a:r>
+          </a:p>
+        </p:txBody>
+      </p:sp>
+      <p:sp>
+        <p:nvSpPr>
+          <p:cNvPr id="5" name="TextBox 4"/>
+          <p:cNvSpPr txBox="1"/>
+          <p:nvPr/>
+        </p:nvSpPr>
+        <p:spPr>
+          <a:xfrm>
+            <a:off x="658368" y="640080"/>
+            <a:ext cx="10012680" cy="512064"/>
+          </a:xfrm>
+          <a:prstGeom prst="rect">
+            <a:avLst/>
+          </a:prstGeom>
+          <a:noFill/>
+        </p:spPr>
+        <p:txBody>
+          <a:bodyPr wrap="square" anchor="t" lIns="18288" rIns="18288" tIns="9144" bIns="9144">
+            <a:noAutofit/>
+          </a:bodyPr>
+          <a:lstStyle/>
+          <a:p>
+            <a:pPr algn="l">
+              <a:defRPr sz="3400" b="1">
+                <a:solidFill>
+                  <a:srgbClr val="1A1A2E"/>
+                </a:solidFill>
+                <a:latin typeface="Microsoft YaHei"/>
+                <a:ea typeface="微软雅黑"/>
+              </a:defRPr>
+            </a:pPr>
+            <a:r>
+              <a:rPr sz="3400" b="1">
+                <a:solidFill>
+                  <a:srgbClr val="1A1A2E"/>
+                </a:solidFill>
+                <a:latin typeface="Microsoft YaHei"/>
+                <a:ea typeface="微软雅黑"/>
+              </a:rPr>
+              <a:t>课堂练习：排序算法（续）</a:t>
+            </a:r>
+          </a:p>
+        </p:txBody>
+      </p:sp>
+      <p:sp>
+        <p:nvSpPr>
           <p:cNvPr id="6" name="Rectangle 5"/>
           <p:cNvSpPr/>
           <p:nvPr/>
         </p:nvSpPr>
         <p:spPr>
           <a:xfrm>
-            <a:off x="658368" y="1353312"/>
-            <a:ext cx="82296" cy="4709160"/>
+            <a:off x="658368" y="1161288"/>
+            <a:ext cx="10863072" cy="18288"/>
           </a:xfrm>
           <a:prstGeom prst="rect">
             <a:avLst/>
           </a:prstGeom>
           <a:solidFill>
-            <a:srgbClr val="E89B52"/>
+            <a:srgbClr val="7209B7"/>
           </a:solidFill>
           <a:ln>
             <a:noFill/>
@@ -5139,20 +5155,20 @@
       </p:sp>
       <p:sp>
         <p:nvSpPr>
-          <p:cNvPr id="7" name="Oval 6"/>
+          <p:cNvPr id="7" name="Rounded Rectangle 6"/>
           <p:cNvSpPr/>
           <p:nvPr/>
         </p:nvSpPr>
         <p:spPr>
           <a:xfrm>
-            <a:off x="987552" y="1600200"/>
-            <a:ext cx="164592" cy="164592"/>
-          </a:xfrm>
-          <a:prstGeom prst="ellipse">
+            <a:off x="777240" y="1417320"/>
+            <a:ext cx="530352" cy="530352"/>
+          </a:xfrm>
+          <a:prstGeom prst="roundRect">
             <a:avLst/>
           </a:prstGeom>
           <a:solidFill>
-            <a:srgbClr val="2F7E83"/>
+            <a:srgbClr val="F72585"/>
           </a:solidFill>
           <a:ln>
             <a:noFill/>
@@ -5188,8 +5204,8 @@
         </p:nvSpPr>
         <p:spPr>
           <a:xfrm>
-            <a:off x="1389888" y="1481328"/>
-            <a:ext cx="9555480" cy="612648"/>
+            <a:off x="777240" y="1435608"/>
+            <a:ext cx="530352" cy="384048"/>
           </a:xfrm>
           <a:prstGeom prst="rect">
             <a:avLst/>
@@ -5202,44 +5218,114 @@
           </a:bodyPr>
           <a:lstStyle/>
           <a:p>
-            <a:pPr algn="l">
-              <a:defRPr sz="2500" b="0">
-                <a:solidFill>
-                  <a:srgbClr val="183042"/>
+            <a:pPr algn="ctr">
+              <a:defRPr sz="1700" b="1">
+                <a:solidFill>
+                  <a:srgbClr val="FFFFFF"/>
                 </a:solidFill>
                 <a:latin typeface="Microsoft YaHei"/>
                 <a:ea typeface="微软雅黑"/>
               </a:defRPr>
             </a:pPr>
             <a:r>
-              <a:rPr sz="2500" b="0">
-                <a:solidFill>
-                  <a:srgbClr val="183042"/>
+              <a:rPr sz="1700" b="1">
+                <a:solidFill>
+                  <a:srgbClr val="FFFFFF"/>
                 </a:solidFill>
                 <a:latin typeface="Microsoft YaHei"/>
                 <a:ea typeface="微软雅黑"/>
               </a:rPr>
-              <a:t>冒泡排序简单但慢</a:t>
-            </a:r>
-          </a:p>
-        </p:txBody>
-      </p:sp>
-      <p:sp>
-        <p:nvSpPr>
-          <p:cNvPr id="9" name="Oval 8"/>
+              <a:t>3</a:t>
+            </a:r>
+          </a:p>
+        </p:txBody>
+      </p:sp>
+      <p:sp>
+        <p:nvSpPr>
+          <p:cNvPr id="9" name="TextBox 8"/>
+          <p:cNvSpPr txBox="1"/>
+          <p:nvPr/>
+        </p:nvSpPr>
+        <p:spPr>
+          <a:xfrm>
+            <a:off x="1536192" y="1399032"/>
+            <a:ext cx="9646920" cy="749808"/>
+          </a:xfrm>
+          <a:prstGeom prst="rect">
+            <a:avLst/>
+          </a:prstGeom>
+          <a:noFill/>
+        </p:spPr>
+        <p:txBody>
+          <a:bodyPr wrap="square" anchor="t" lIns="18288" rIns="18288" tIns="9144" bIns="9144">
+            <a:noAutofit/>
+          </a:bodyPr>
+          <a:lstStyle/>
+          <a:p>
+            <a:pPr algn="l">
+              <a:defRPr sz="2400" b="1">
+                <a:solidFill>
+                  <a:srgbClr val="1A1A2E"/>
+                </a:solidFill>
+                <a:latin typeface="Microsoft YaHei"/>
+                <a:ea typeface="微软雅黑"/>
+              </a:defRPr>
+            </a:pPr>
+            <a:r>
+              <a:rPr sz="2400" b="1">
+                <a:solidFill>
+                  <a:srgbClr val="1A1A2E"/>
+                </a:solidFill>
+                <a:latin typeface="Microsoft YaHei"/>
+                <a:ea typeface="微软雅黑"/>
+              </a:rPr>
+              <a:t>开放题：结合本节内容说明什么场景下应选择插入排序。</a:t>
+            </a:r>
+          </a:p>
+        </p:txBody>
+      </p:sp>
+    </p:spTree>
+  </p:cSld>
+  <p:clrMapOvr>
+    <a:masterClrMapping/>
+  </p:clrMapOvr>
+</p:sld>
+</file>
+
+<file path=ppt/slides/slide6.xml><?xml version="1.0" encoding="utf-8"?>
+<p:sld xmlns:a="http://schemas.openxmlformats.org/drawingml/2006/main" xmlns:p="http://schemas.openxmlformats.org/presentationml/2006/main" xmlns:r="http://schemas.openxmlformats.org/officeDocument/2006/relationships">
+  <p:cSld>
+    <p:bg>
+      <p:bgPr>
+        <a:solidFill>
+          <a:srgbClr val="F8F9FF"/>
+        </a:solidFill>
+        <a:effectLst/>
+      </p:bgPr>
+    </p:bg>
+    <p:spTree>
+      <p:nvGrpSpPr>
+        <p:cNvPr id="1" name=""/>
+        <p:cNvGrpSpPr/>
+        <p:nvPr/>
+      </p:nvGrpSpPr>
+      <p:grpSpPr/>
+      <p:sp>
+        <p:nvSpPr>
+          <p:cNvPr id="2" name="Rounded Rectangle 1"/>
           <p:cNvSpPr/>
           <p:nvPr/>
         </p:nvSpPr>
         <p:spPr>
           <a:xfrm>
-            <a:off x="987552" y="2313432"/>
-            <a:ext cx="164592" cy="164592"/>
-          </a:xfrm>
-          <a:prstGeom prst="ellipse">
+            <a:off x="11027664" y="246888"/>
+            <a:ext cx="566928" cy="283464"/>
+          </a:xfrm>
+          <a:prstGeom prst="roundRect">
             <a:avLst/>
           </a:prstGeom>
           <a:solidFill>
-            <a:srgbClr val="2F7E83"/>
+            <a:srgbClr val="EEF1F5"/>
           </a:solidFill>
           <a:ln>
             <a:noFill/>
@@ -5269,14 +5355,14 @@
       </p:sp>
       <p:sp>
         <p:nvSpPr>
-          <p:cNvPr id="10" name="TextBox 9"/>
+          <p:cNvPr id="3" name="TextBox 2"/>
           <p:cNvSpPr txBox="1"/>
           <p:nvPr/>
         </p:nvSpPr>
         <p:spPr>
           <a:xfrm>
-            <a:off x="1389888" y="2194560"/>
-            <a:ext cx="9555480" cy="612648"/>
+            <a:off x="11045952" y="278892"/>
+            <a:ext cx="530352" cy="182880"/>
           </a:xfrm>
           <a:prstGeom prst="rect">
             <a:avLst/>
@@ -5284,49 +5370,137 @@
           <a:noFill/>
         </p:spPr>
         <p:txBody>
+          <a:bodyPr wrap="square" anchor="ctr" lIns="18288" rIns="18288" tIns="9144" bIns="9144">
+            <a:noAutofit/>
+          </a:bodyPr>
+          <a:lstStyle/>
+          <a:p>
+            <a:pPr algn="ctr">
+              <a:defRPr sz="900" b="0">
+                <a:solidFill>
+                  <a:srgbClr val="5F6C84"/>
+                </a:solidFill>
+                <a:latin typeface="Microsoft YaHei"/>
+                <a:ea typeface="微软雅黑"/>
+              </a:defRPr>
+            </a:pPr>
+            <a:r>
+              <a:rPr sz="900" b="0">
+                <a:solidFill>
+                  <a:srgbClr val="5F6C84"/>
+                </a:solidFill>
+                <a:latin typeface="Microsoft YaHei"/>
+                <a:ea typeface="微软雅黑"/>
+              </a:rPr>
+              <a:t>5</a:t>
+            </a:r>
+          </a:p>
+        </p:txBody>
+      </p:sp>
+      <p:sp>
+        <p:nvSpPr>
+          <p:cNvPr id="4" name="TextBox 3"/>
+          <p:cNvSpPr txBox="1"/>
+          <p:nvPr/>
+        </p:nvSpPr>
+        <p:spPr>
+          <a:xfrm>
+            <a:off x="685800" y="365760"/>
+            <a:ext cx="2011680" cy="219456"/>
+          </a:xfrm>
+          <a:prstGeom prst="rect">
+            <a:avLst/>
+          </a:prstGeom>
+          <a:noFill/>
+        </p:spPr>
+        <p:txBody>
           <a:bodyPr wrap="square" anchor="t" lIns="18288" rIns="18288" tIns="9144" bIns="9144">
             <a:noAutofit/>
           </a:bodyPr>
           <a:lstStyle/>
           <a:p>
             <a:pPr algn="l">
-              <a:defRPr sz="2500" b="0">
-                <a:solidFill>
-                  <a:srgbClr val="183042"/>
+              <a:defRPr sz="1000" b="1">
+                <a:solidFill>
+                  <a:srgbClr val="F72585"/>
                 </a:solidFill>
                 <a:latin typeface="Microsoft YaHei"/>
                 <a:ea typeface="微软雅黑"/>
               </a:defRPr>
             </a:pPr>
             <a:r>
-              <a:rPr sz="2500" b="0">
-                <a:solidFill>
-                  <a:srgbClr val="183042"/>
+              <a:rPr sz="1000" b="1">
+                <a:solidFill>
+                  <a:srgbClr val="F72585"/>
                 </a:solidFill>
                 <a:latin typeface="Microsoft YaHei"/>
                 <a:ea typeface="微软雅黑"/>
               </a:rPr>
-              <a:t>快排分治高效</a:t>
-            </a:r>
-          </a:p>
-        </p:txBody>
-      </p:sp>
-      <p:sp>
-        <p:nvSpPr>
-          <p:cNvPr id="11" name="Oval 10"/>
+              <a:t>SUMMARY</a:t>
+            </a:r>
+          </a:p>
+        </p:txBody>
+      </p:sp>
+      <p:sp>
+        <p:nvSpPr>
+          <p:cNvPr id="5" name="TextBox 4"/>
+          <p:cNvSpPr txBox="1"/>
+          <p:nvPr/>
+        </p:nvSpPr>
+        <p:spPr>
+          <a:xfrm>
+            <a:off x="658368" y="640080"/>
+            <a:ext cx="10012680" cy="512064"/>
+          </a:xfrm>
+          <a:prstGeom prst="rect">
+            <a:avLst/>
+          </a:prstGeom>
+          <a:noFill/>
+        </p:spPr>
+        <p:txBody>
+          <a:bodyPr wrap="square" anchor="t" lIns="18288" rIns="18288" tIns="9144" bIns="9144">
+            <a:noAutofit/>
+          </a:bodyPr>
+          <a:lstStyle/>
+          <a:p>
+            <a:pPr algn="l">
+              <a:defRPr sz="3400" b="1">
+                <a:solidFill>
+                  <a:srgbClr val="1A1A2E"/>
+                </a:solidFill>
+                <a:latin typeface="Microsoft YaHei"/>
+                <a:ea typeface="微软雅黑"/>
+              </a:defRPr>
+            </a:pPr>
+            <a:r>
+              <a:rPr sz="3400" b="1">
+                <a:solidFill>
+                  <a:srgbClr val="1A1A2E"/>
+                </a:solidFill>
+                <a:latin typeface="Microsoft YaHei"/>
+                <a:ea typeface="微软雅黑"/>
+              </a:rPr>
+              <a:t>本节小结</a:t>
+            </a:r>
+          </a:p>
+        </p:txBody>
+      </p:sp>
+      <p:sp>
+        <p:nvSpPr>
+          <p:cNvPr id="6" name="Rectangle 5"/>
           <p:cNvSpPr/>
           <p:nvPr/>
         </p:nvSpPr>
         <p:spPr>
           <a:xfrm>
-            <a:off x="987552" y="3026664"/>
-            <a:ext cx="164592" cy="164592"/>
-          </a:xfrm>
-          <a:prstGeom prst="ellipse">
+            <a:off x="658368" y="1161288"/>
+            <a:ext cx="10863072" cy="18288"/>
+          </a:xfrm>
+          <a:prstGeom prst="rect">
             <a:avLst/>
           </a:prstGeom>
           <a:solidFill>
-            <a:srgbClr val="2F7E83"/>
+            <a:srgbClr val="7209B7"/>
           </a:solidFill>
           <a:ln>
             <a:noFill/>
@@ -5356,13 +5530,99 @@
       </p:sp>
       <p:sp>
         <p:nvSpPr>
-          <p:cNvPr id="12" name="TextBox 11"/>
+          <p:cNvPr id="7" name="Rectangle 6"/>
+          <p:cNvSpPr/>
+          <p:nvPr/>
+        </p:nvSpPr>
+        <p:spPr>
+          <a:xfrm>
+            <a:off x="658368" y="1353312"/>
+            <a:ext cx="82296" cy="4709160"/>
+          </a:xfrm>
+          <a:prstGeom prst="rect">
+            <a:avLst/>
+          </a:prstGeom>
+          <a:solidFill>
+            <a:srgbClr val="4361EE"/>
+          </a:solidFill>
+          <a:ln>
+            <a:noFill/>
+          </a:ln>
+        </p:spPr>
+        <p:style>
+          <a:lnRef idx="1">
+            <a:schemeClr val="accent1"/>
+          </a:lnRef>
+          <a:fillRef idx="3">
+            <a:schemeClr val="accent1"/>
+          </a:fillRef>
+          <a:effectRef idx="2">
+            <a:schemeClr val="accent1"/>
+          </a:effectRef>
+          <a:fontRef idx="minor">
+            <a:schemeClr val="lt1"/>
+          </a:fontRef>
+        </p:style>
+        <p:txBody>
+          <a:bodyPr rtlCol="0" anchor="ctr"/>
+          <a:lstStyle/>
+          <a:p>
+            <a:pPr algn="ctr"/>
+          </a:p>
+        </p:txBody>
+      </p:sp>
+      <p:sp>
+        <p:nvSpPr>
+          <p:cNvPr id="8" name="Oval 7"/>
+          <p:cNvSpPr/>
+          <p:nvPr/>
+        </p:nvSpPr>
+        <p:spPr>
+          <a:xfrm>
+            <a:off x="987552" y="1600200"/>
+            <a:ext cx="164592" cy="164592"/>
+          </a:xfrm>
+          <a:prstGeom prst="ellipse">
+            <a:avLst/>
+          </a:prstGeom>
+          <a:solidFill>
+            <a:srgbClr val="4361EE"/>
+          </a:solidFill>
+          <a:ln>
+            <a:noFill/>
+          </a:ln>
+        </p:spPr>
+        <p:style>
+          <a:lnRef idx="1">
+            <a:schemeClr val="accent1"/>
+          </a:lnRef>
+          <a:fillRef idx="3">
+            <a:schemeClr val="accent1"/>
+          </a:fillRef>
+          <a:effectRef idx="2">
+            <a:schemeClr val="accent1"/>
+          </a:effectRef>
+          <a:fontRef idx="minor">
+            <a:schemeClr val="lt1"/>
+          </a:fontRef>
+        </p:style>
+        <p:txBody>
+          <a:bodyPr rtlCol="0" anchor="ctr"/>
+          <a:lstStyle/>
+          <a:p>
+            <a:pPr algn="ctr"/>
+          </a:p>
+        </p:txBody>
+      </p:sp>
+      <p:sp>
+        <p:nvSpPr>
+          <p:cNvPr id="9" name="TextBox 8"/>
           <p:cNvSpPr txBox="1"/>
           <p:nvPr/>
         </p:nvSpPr>
         <p:spPr>
           <a:xfrm>
-            <a:off x="1389888" y="2907792"/>
+            <a:off x="1389888" y="1481328"/>
             <a:ext cx="9555480" cy="612648"/>
           </a:xfrm>
           <a:prstGeom prst="rect">
@@ -5379,7 +5639,7 @@
             <a:pPr algn="l">
               <a:defRPr sz="2500" b="0">
                 <a:solidFill>
-                  <a:srgbClr val="183042"/>
+                  <a:srgbClr val="1A1A2E"/>
                 </a:solidFill>
                 <a:latin typeface="Microsoft YaHei"/>
                 <a:ea typeface="微软雅黑"/>
@@ -5388,7 +5648,181 @@
             <a:r>
               <a:rPr sz="2500" b="0">
                 <a:solidFill>
-                  <a:srgbClr val="183042"/>
+                  <a:srgbClr val="1A1A2E"/>
+                </a:solidFill>
+                <a:latin typeface="Microsoft YaHei"/>
+                <a:ea typeface="微软雅黑"/>
+              </a:rPr>
+              <a:t>冒泡排序简单但慢</a:t>
+            </a:r>
+          </a:p>
+        </p:txBody>
+      </p:sp>
+      <p:sp>
+        <p:nvSpPr>
+          <p:cNvPr id="10" name="Oval 9"/>
+          <p:cNvSpPr/>
+          <p:nvPr/>
+        </p:nvSpPr>
+        <p:spPr>
+          <a:xfrm>
+            <a:off x="987552" y="2313432"/>
+            <a:ext cx="164592" cy="164592"/>
+          </a:xfrm>
+          <a:prstGeom prst="ellipse">
+            <a:avLst/>
+          </a:prstGeom>
+          <a:solidFill>
+            <a:srgbClr val="4361EE"/>
+          </a:solidFill>
+          <a:ln>
+            <a:noFill/>
+          </a:ln>
+        </p:spPr>
+        <p:style>
+          <a:lnRef idx="1">
+            <a:schemeClr val="accent1"/>
+          </a:lnRef>
+          <a:fillRef idx="3">
+            <a:schemeClr val="accent1"/>
+          </a:fillRef>
+          <a:effectRef idx="2">
+            <a:schemeClr val="accent1"/>
+          </a:effectRef>
+          <a:fontRef idx="minor">
+            <a:schemeClr val="lt1"/>
+          </a:fontRef>
+        </p:style>
+        <p:txBody>
+          <a:bodyPr rtlCol="0" anchor="ctr"/>
+          <a:lstStyle/>
+          <a:p>
+            <a:pPr algn="ctr"/>
+          </a:p>
+        </p:txBody>
+      </p:sp>
+      <p:sp>
+        <p:nvSpPr>
+          <p:cNvPr id="11" name="TextBox 10"/>
+          <p:cNvSpPr txBox="1"/>
+          <p:nvPr/>
+        </p:nvSpPr>
+        <p:spPr>
+          <a:xfrm>
+            <a:off x="1389888" y="2194560"/>
+            <a:ext cx="9555480" cy="612648"/>
+          </a:xfrm>
+          <a:prstGeom prst="rect">
+            <a:avLst/>
+          </a:prstGeom>
+          <a:noFill/>
+        </p:spPr>
+        <p:txBody>
+          <a:bodyPr wrap="square" anchor="t" lIns="18288" rIns="18288" tIns="9144" bIns="9144">
+            <a:noAutofit/>
+          </a:bodyPr>
+          <a:lstStyle/>
+          <a:p>
+            <a:pPr algn="l">
+              <a:defRPr sz="2500" b="0">
+                <a:solidFill>
+                  <a:srgbClr val="1A1A2E"/>
+                </a:solidFill>
+                <a:latin typeface="Microsoft YaHei"/>
+                <a:ea typeface="微软雅黑"/>
+              </a:defRPr>
+            </a:pPr>
+            <a:r>
+              <a:rPr sz="2500" b="0">
+                <a:solidFill>
+                  <a:srgbClr val="1A1A2E"/>
+                </a:solidFill>
+                <a:latin typeface="Microsoft YaHei"/>
+                <a:ea typeface="微软雅黑"/>
+              </a:rPr>
+              <a:t>快排分治高效</a:t>
+            </a:r>
+          </a:p>
+        </p:txBody>
+      </p:sp>
+      <p:sp>
+        <p:nvSpPr>
+          <p:cNvPr id="12" name="Oval 11"/>
+          <p:cNvSpPr/>
+          <p:nvPr/>
+        </p:nvSpPr>
+        <p:spPr>
+          <a:xfrm>
+            <a:off x="987552" y="3026664"/>
+            <a:ext cx="164592" cy="164592"/>
+          </a:xfrm>
+          <a:prstGeom prst="ellipse">
+            <a:avLst/>
+          </a:prstGeom>
+          <a:solidFill>
+            <a:srgbClr val="4361EE"/>
+          </a:solidFill>
+          <a:ln>
+            <a:noFill/>
+          </a:ln>
+        </p:spPr>
+        <p:style>
+          <a:lnRef idx="1">
+            <a:schemeClr val="accent1"/>
+          </a:lnRef>
+          <a:fillRef idx="3">
+            <a:schemeClr val="accent1"/>
+          </a:fillRef>
+          <a:effectRef idx="2">
+            <a:schemeClr val="accent1"/>
+          </a:effectRef>
+          <a:fontRef idx="minor">
+            <a:schemeClr val="lt1"/>
+          </a:fontRef>
+        </p:style>
+        <p:txBody>
+          <a:bodyPr rtlCol="0" anchor="ctr"/>
+          <a:lstStyle/>
+          <a:p>
+            <a:pPr algn="ctr"/>
+          </a:p>
+        </p:txBody>
+      </p:sp>
+      <p:sp>
+        <p:nvSpPr>
+          <p:cNvPr id="13" name="TextBox 12"/>
+          <p:cNvSpPr txBox="1"/>
+          <p:nvPr/>
+        </p:nvSpPr>
+        <p:spPr>
+          <a:xfrm>
+            <a:off x="1389888" y="2907792"/>
+            <a:ext cx="9555480" cy="612648"/>
+          </a:xfrm>
+          <a:prstGeom prst="rect">
+            <a:avLst/>
+          </a:prstGeom>
+          <a:noFill/>
+        </p:spPr>
+        <p:txBody>
+          <a:bodyPr wrap="square" anchor="t" lIns="18288" rIns="18288" tIns="9144" bIns="9144">
+            <a:noAutofit/>
+          </a:bodyPr>
+          <a:lstStyle/>
+          <a:p>
+            <a:pPr algn="l">
+              <a:defRPr sz="2500" b="0">
+                <a:solidFill>
+                  <a:srgbClr val="1A1A2E"/>
+                </a:solidFill>
+                <a:latin typeface="Microsoft YaHei"/>
+                <a:ea typeface="微软雅黑"/>
+              </a:defRPr>
+            </a:pPr>
+            <a:r>
+              <a:rPr sz="2500" b="0">
+                <a:solidFill>
+                  <a:srgbClr val="1A1A2E"/>
                 </a:solidFill>
                 <a:latin typeface="Microsoft YaHei"/>
                 <a:ea typeface="微软雅黑"/>

--- a/docs/导出验证/sample_export.pptx
+++ b/docs/导出验证/sample_export.pptx
@@ -3102,14 +3102,57 @@
       <p:grpSpPr/>
       <p:sp>
         <p:nvSpPr>
-          <p:cNvPr id="2" name="TextBox 1"/>
+          <p:cNvPr id="2" name="Rectangle 1"/>
+          <p:cNvSpPr/>
+          <p:nvPr/>
+        </p:nvSpPr>
+        <p:spPr>
+          <a:xfrm>
+            <a:off x="658368" y="6528816"/>
+            <a:ext cx="10863072" cy="10972"/>
+          </a:xfrm>
+          <a:prstGeom prst="rect">
+            <a:avLst/>
+          </a:prstGeom>
+          <a:solidFill>
+            <a:srgbClr val="627987"/>
+          </a:solidFill>
+          <a:ln>
+            <a:noFill/>
+          </a:ln>
+        </p:spPr>
+        <p:style>
+          <a:lnRef idx="1">
+            <a:schemeClr val="accent1"/>
+          </a:lnRef>
+          <a:fillRef idx="3">
+            <a:schemeClr val="accent1"/>
+          </a:fillRef>
+          <a:effectRef idx="2">
+            <a:schemeClr val="accent1"/>
+          </a:effectRef>
+          <a:fontRef idx="minor">
+            <a:schemeClr val="lt1"/>
+          </a:fontRef>
+        </p:style>
+        <p:txBody>
+          <a:bodyPr rtlCol="0" anchor="ctr"/>
+          <a:lstStyle/>
+          <a:p>
+            <a:pPr algn="ctr"/>
+          </a:p>
+        </p:txBody>
+      </p:sp>
+      <p:sp>
+        <p:nvSpPr>
+          <p:cNvPr id="3" name="TextBox 2"/>
           <p:cNvSpPr txBox="1"/>
           <p:nvPr/>
         </p:nvSpPr>
         <p:spPr>
           <a:xfrm>
-            <a:off x="11292840" y="6446520"/>
-            <a:ext cx="411480" cy="201168"/>
+            <a:off x="658368" y="6400800"/>
+            <a:ext cx="4754880" cy="274320"/>
           </a:xfrm>
           <a:prstGeom prst="rect">
             <a:avLst/>
@@ -3122,7 +3165,7 @@
           </a:bodyPr>
           <a:lstStyle/>
           <a:p>
-            <a:pPr algn="r">
+            <a:pPr algn="l">
               <a:defRPr sz="900" b="0">
                 <a:solidFill>
                   <a:srgbClr val="627987"/>
@@ -3139,14 +3182,14 @@
                 <a:latin typeface="Microsoft YaHei"/>
                 <a:ea typeface="微软雅黑"/>
               </a:rPr>
-              <a:t>1</a:t>
-            </a:r>
-          </a:p>
-        </p:txBody>
-      </p:sp>
-      <p:sp>
-        <p:nvSpPr>
-          <p:cNvPr id="3" name="Rectangle 2"/>
+              <a:t>多模态 AI 互动式教学智能体 · 教学课件</a:t>
+            </a:r>
+          </a:p>
+        </p:txBody>
+      </p:sp>
+      <p:sp>
+        <p:nvSpPr>
+          <p:cNvPr id="4" name="Rectangle 3"/>
           <p:cNvSpPr/>
           <p:nvPr/>
         </p:nvSpPr>
@@ -3189,7 +3232,7 @@
       </p:sp>
       <p:sp>
         <p:nvSpPr>
-          <p:cNvPr id="4" name="Rectangle 3"/>
+          <p:cNvPr id="5" name="Rectangle 4"/>
           <p:cNvSpPr/>
           <p:nvPr/>
         </p:nvSpPr>
@@ -3232,7 +3275,7 @@
       </p:sp>
       <p:sp>
         <p:nvSpPr>
-          <p:cNvPr id="5" name="TextBox 4"/>
+          <p:cNvPr id="6" name="TextBox 5"/>
           <p:cNvSpPr txBox="1"/>
           <p:nvPr/>
         </p:nvSpPr>
@@ -3276,7 +3319,7 @@
       </p:sp>
       <p:sp>
         <p:nvSpPr>
-          <p:cNvPr id="6" name="TextBox 5"/>
+          <p:cNvPr id="7" name="TextBox 6"/>
           <p:cNvSpPr txBox="1"/>
           <p:nvPr/>
         </p:nvSpPr>
@@ -3320,7 +3363,7 @@
       </p:sp>
       <p:sp>
         <p:nvSpPr>
-          <p:cNvPr id="7" name="TextBox 6"/>
+          <p:cNvPr id="8" name="TextBox 7"/>
           <p:cNvSpPr txBox="1"/>
           <p:nvPr/>
         </p:nvSpPr>
@@ -3358,6 +3401,50 @@
                 <a:ea typeface="微软雅黑"/>
               </a:rPr>
               <a:t>理解常见排序算法的思想与复杂度差异。</a:t>
+            </a:r>
+          </a:p>
+        </p:txBody>
+      </p:sp>
+      <p:sp>
+        <p:nvSpPr>
+          <p:cNvPr id="9" name="TextBox 8"/>
+          <p:cNvSpPr txBox="1"/>
+          <p:nvPr/>
+        </p:nvSpPr>
+        <p:spPr>
+          <a:xfrm>
+            <a:off x="11018520" y="6382512"/>
+            <a:ext cx="868680" cy="292608"/>
+          </a:xfrm>
+          <a:prstGeom prst="rect">
+            <a:avLst/>
+          </a:prstGeom>
+          <a:noFill/>
+        </p:spPr>
+        <p:txBody>
+          <a:bodyPr wrap="square" anchor="t" lIns="18288" rIns="18288" tIns="9144" bIns="9144">
+            <a:noAutofit/>
+          </a:bodyPr>
+          <a:lstStyle/>
+          <a:p>
+            <a:pPr algn="r">
+              <a:defRPr sz="1000" b="0">
+                <a:solidFill>
+                  <a:srgbClr val="627987"/>
+                </a:solidFill>
+                <a:latin typeface="Microsoft YaHei"/>
+                <a:ea typeface="微软雅黑"/>
+              </a:defRPr>
+            </a:pPr>
+            <a:r>
+              <a:rPr sz="1000" b="0">
+                <a:solidFill>
+                  <a:srgbClr val="627987"/>
+                </a:solidFill>
+                <a:latin typeface="Microsoft YaHei"/>
+                <a:ea typeface="微软雅黑"/>
+              </a:rPr>
+              <a:t>01</a:t>
             </a:r>
           </a:p>
         </p:txBody>
@@ -3390,152 +3477,20 @@
       <p:grpSpPr/>
       <p:sp>
         <p:nvSpPr>
-          <p:cNvPr id="2" name="TextBox 1"/>
-          <p:cNvSpPr txBox="1"/>
-          <p:nvPr/>
-        </p:nvSpPr>
-        <p:spPr>
-          <a:xfrm>
-            <a:off x="11292840" y="6446520"/>
-            <a:ext cx="411480" cy="201168"/>
+          <p:cNvPr id="2" name="Rectangle 1"/>
+          <p:cNvSpPr/>
+          <p:nvPr/>
+        </p:nvSpPr>
+        <p:spPr>
+          <a:xfrm>
+            <a:off x="658368" y="6528816"/>
+            <a:ext cx="10863072" cy="10972"/>
           </a:xfrm>
           <a:prstGeom prst="rect">
             <a:avLst/>
           </a:prstGeom>
-          <a:noFill/>
-        </p:spPr>
-        <p:txBody>
-          <a:bodyPr wrap="square" anchor="t" lIns="18288" rIns="18288" tIns="9144" bIns="9144">
-            <a:noAutofit/>
-          </a:bodyPr>
-          <a:lstStyle/>
-          <a:p>
-            <a:pPr algn="r">
-              <a:defRPr sz="900" b="0">
-                <a:solidFill>
-                  <a:srgbClr val="627987"/>
-                </a:solidFill>
-                <a:latin typeface="Microsoft YaHei"/>
-                <a:ea typeface="微软雅黑"/>
-              </a:defRPr>
-            </a:pPr>
-            <a:r>
-              <a:rPr sz="900" b="0">
-                <a:solidFill>
-                  <a:srgbClr val="627987"/>
-                </a:solidFill>
-                <a:latin typeface="Microsoft YaHei"/>
-                <a:ea typeface="微软雅黑"/>
-              </a:rPr>
-              <a:t>2</a:t>
-            </a:r>
-          </a:p>
-        </p:txBody>
-      </p:sp>
-      <p:sp>
-        <p:nvSpPr>
-          <p:cNvPr id="3" name="TextBox 2"/>
-          <p:cNvSpPr txBox="1"/>
-          <p:nvPr/>
-        </p:nvSpPr>
-        <p:spPr>
-          <a:xfrm>
-            <a:off x="685800" y="365760"/>
-            <a:ext cx="2011680" cy="219456"/>
-          </a:xfrm>
-          <a:prstGeom prst="rect">
-            <a:avLst/>
-          </a:prstGeom>
-          <a:noFill/>
-        </p:spPr>
-        <p:txBody>
-          <a:bodyPr wrap="square" anchor="t" lIns="18288" rIns="18288" tIns="9144" bIns="9144">
-            <a:noAutofit/>
-          </a:bodyPr>
-          <a:lstStyle/>
-          <a:p>
-            <a:pPr algn="l">
-              <a:defRPr sz="1000" b="1">
-                <a:solidFill>
-                  <a:srgbClr val="E89B52"/>
-                </a:solidFill>
-                <a:latin typeface="Microsoft YaHei"/>
-                <a:ea typeface="微软雅黑"/>
-              </a:defRPr>
-            </a:pPr>
-            <a:r>
-              <a:rPr sz="1000" b="1">
-                <a:solidFill>
-                  <a:srgbClr val="E89B52"/>
-                </a:solidFill>
-                <a:latin typeface="Microsoft YaHei"/>
-                <a:ea typeface="微软雅黑"/>
-              </a:rPr>
-              <a:t>CONTENT</a:t>
-            </a:r>
-          </a:p>
-        </p:txBody>
-      </p:sp>
-      <p:sp>
-        <p:nvSpPr>
-          <p:cNvPr id="4" name="TextBox 3"/>
-          <p:cNvSpPr txBox="1"/>
-          <p:nvPr/>
-        </p:nvSpPr>
-        <p:spPr>
-          <a:xfrm>
-            <a:off x="658368" y="640080"/>
-            <a:ext cx="10744200" cy="512064"/>
-          </a:xfrm>
-          <a:prstGeom prst="rect">
-            <a:avLst/>
-          </a:prstGeom>
-          <a:noFill/>
-        </p:spPr>
-        <p:txBody>
-          <a:bodyPr wrap="square" anchor="t" lIns="18288" rIns="18288" tIns="9144" bIns="9144">
-            <a:noAutofit/>
-          </a:bodyPr>
-          <a:lstStyle/>
-          <a:p>
-            <a:pPr algn="l">
-              <a:defRPr sz="3400" b="1">
-                <a:solidFill>
-                  <a:srgbClr val="183042"/>
-                </a:solidFill>
-                <a:latin typeface="Microsoft YaHei"/>
-                <a:ea typeface="微软雅黑"/>
-              </a:defRPr>
-            </a:pPr>
-            <a:r>
-              <a:rPr sz="3400" b="1">
-                <a:solidFill>
-                  <a:srgbClr val="183042"/>
-                </a:solidFill>
-                <a:latin typeface="Microsoft YaHei"/>
-                <a:ea typeface="微软雅黑"/>
-              </a:rPr>
-              <a:t>冒泡排序与快速排序</a:t>
-            </a:r>
-          </a:p>
-        </p:txBody>
-      </p:sp>
-      <p:sp>
-        <p:nvSpPr>
-          <p:cNvPr id="5" name="Rectangle 4"/>
-          <p:cNvSpPr/>
-          <p:nvPr/>
-        </p:nvSpPr>
-        <p:spPr>
-          <a:xfrm>
-            <a:off x="658368" y="1161288"/>
-            <a:ext cx="10863072" cy="18288"/>
-          </a:xfrm>
-          <a:prstGeom prst="rect">
-            <a:avLst/>
-          </a:prstGeom>
           <a:solidFill>
-            <a:srgbClr val="2F7E83"/>
+            <a:srgbClr val="627987"/>
           </a:solidFill>
           <a:ln>
             <a:noFill/>
@@ -3565,7 +3520,269 @@
       </p:sp>
       <p:sp>
         <p:nvSpPr>
-          <p:cNvPr id="6" name="Rounded Rectangle 5"/>
+          <p:cNvPr id="3" name="TextBox 2"/>
+          <p:cNvSpPr txBox="1"/>
+          <p:nvPr/>
+        </p:nvSpPr>
+        <p:spPr>
+          <a:xfrm>
+            <a:off x="658368" y="6400800"/>
+            <a:ext cx="4754880" cy="274320"/>
+          </a:xfrm>
+          <a:prstGeom prst="rect">
+            <a:avLst/>
+          </a:prstGeom>
+          <a:noFill/>
+        </p:spPr>
+        <p:txBody>
+          <a:bodyPr wrap="square" anchor="t" lIns="18288" rIns="18288" tIns="9144" bIns="9144">
+            <a:noAutofit/>
+          </a:bodyPr>
+          <a:lstStyle/>
+          <a:p>
+            <a:pPr algn="l">
+              <a:defRPr sz="900" b="0">
+                <a:solidFill>
+                  <a:srgbClr val="627987"/>
+                </a:solidFill>
+                <a:latin typeface="Microsoft YaHei"/>
+                <a:ea typeface="微软雅黑"/>
+              </a:defRPr>
+            </a:pPr>
+            <a:r>
+              <a:rPr sz="900" b="0">
+                <a:solidFill>
+                  <a:srgbClr val="627987"/>
+                </a:solidFill>
+                <a:latin typeface="Microsoft YaHei"/>
+                <a:ea typeface="微软雅黑"/>
+              </a:rPr>
+              <a:t>多模态 AI 互动式教学智能体 · 教学课件</a:t>
+            </a:r>
+          </a:p>
+        </p:txBody>
+      </p:sp>
+      <p:sp>
+        <p:nvSpPr>
+          <p:cNvPr id="4" name="Rectangle 3"/>
+          <p:cNvSpPr/>
+          <p:nvPr/>
+        </p:nvSpPr>
+        <p:spPr>
+          <a:xfrm>
+            <a:off x="0" y="0"/>
+            <a:ext cx="12198096" cy="1060704"/>
+          </a:xfrm>
+          <a:prstGeom prst="rect">
+            <a:avLst/>
+          </a:prstGeom>
+          <a:solidFill>
+            <a:srgbClr val="245B78"/>
+          </a:solidFill>
+          <a:ln>
+            <a:noFill/>
+          </a:ln>
+        </p:spPr>
+        <p:style>
+          <a:lnRef idx="1">
+            <a:schemeClr val="accent1"/>
+          </a:lnRef>
+          <a:fillRef idx="3">
+            <a:schemeClr val="accent1"/>
+          </a:fillRef>
+          <a:effectRef idx="2">
+            <a:schemeClr val="accent1"/>
+          </a:effectRef>
+          <a:fontRef idx="minor">
+            <a:schemeClr val="lt1"/>
+          </a:fontRef>
+        </p:style>
+        <p:txBody>
+          <a:bodyPr rtlCol="0" anchor="ctr"/>
+          <a:lstStyle/>
+          <a:p>
+            <a:pPr algn="ctr"/>
+          </a:p>
+        </p:txBody>
+      </p:sp>
+      <p:sp>
+        <p:nvSpPr>
+          <p:cNvPr id="5" name="Rectangle 4"/>
+          <p:cNvSpPr/>
+          <p:nvPr/>
+        </p:nvSpPr>
+        <p:spPr>
+          <a:xfrm>
+            <a:off x="0" y="1060704"/>
+            <a:ext cx="12198096" cy="45720"/>
+          </a:xfrm>
+          <a:prstGeom prst="rect">
+            <a:avLst/>
+          </a:prstGeom>
+          <a:solidFill>
+            <a:srgbClr val="E89B52"/>
+          </a:solidFill>
+          <a:ln>
+            <a:noFill/>
+          </a:ln>
+        </p:spPr>
+        <p:style>
+          <a:lnRef idx="1">
+            <a:schemeClr val="accent1"/>
+          </a:lnRef>
+          <a:fillRef idx="3">
+            <a:schemeClr val="accent1"/>
+          </a:fillRef>
+          <a:effectRef idx="2">
+            <a:schemeClr val="accent1"/>
+          </a:effectRef>
+          <a:fontRef idx="minor">
+            <a:schemeClr val="lt1"/>
+          </a:fontRef>
+        </p:style>
+        <p:txBody>
+          <a:bodyPr rtlCol="0" anchor="ctr"/>
+          <a:lstStyle/>
+          <a:p>
+            <a:pPr algn="ctr"/>
+          </a:p>
+        </p:txBody>
+      </p:sp>
+      <p:sp>
+        <p:nvSpPr>
+          <p:cNvPr id="6" name="TextBox 5"/>
+          <p:cNvSpPr txBox="1"/>
+          <p:nvPr/>
+        </p:nvSpPr>
+        <p:spPr>
+          <a:xfrm>
+            <a:off x="713232" y="164592"/>
+            <a:ext cx="2926080" cy="237744"/>
+          </a:xfrm>
+          <a:prstGeom prst="rect">
+            <a:avLst/>
+          </a:prstGeom>
+          <a:noFill/>
+        </p:spPr>
+        <p:txBody>
+          <a:bodyPr wrap="square" anchor="t" lIns="18288" rIns="18288" tIns="9144" bIns="9144">
+            <a:noAutofit/>
+          </a:bodyPr>
+          <a:lstStyle/>
+          <a:p>
+            <a:pPr algn="l">
+              <a:defRPr sz="1000" b="1">
+                <a:solidFill>
+                  <a:srgbClr val="E89B52"/>
+                </a:solidFill>
+                <a:latin typeface="Microsoft YaHei"/>
+                <a:ea typeface="微软雅黑"/>
+              </a:defRPr>
+            </a:pPr>
+            <a:r>
+              <a:rPr sz="1000" b="1">
+                <a:solidFill>
+                  <a:srgbClr val="E89B52"/>
+                </a:solidFill>
+                <a:latin typeface="Microsoft YaHei"/>
+                <a:ea typeface="微软雅黑"/>
+              </a:rPr>
+              <a:t>CONTENT</a:t>
+            </a:r>
+          </a:p>
+        </p:txBody>
+      </p:sp>
+      <p:sp>
+        <p:nvSpPr>
+          <p:cNvPr id="7" name="TextBox 6"/>
+          <p:cNvSpPr txBox="1"/>
+          <p:nvPr/>
+        </p:nvSpPr>
+        <p:spPr>
+          <a:xfrm>
+            <a:off x="685800" y="402336"/>
+            <a:ext cx="9509760" cy="548640"/>
+          </a:xfrm>
+          <a:prstGeom prst="rect">
+            <a:avLst/>
+          </a:prstGeom>
+          <a:noFill/>
+        </p:spPr>
+        <p:txBody>
+          <a:bodyPr wrap="square" anchor="t" lIns="18288" rIns="18288" tIns="9144" bIns="9144">
+            <a:noAutofit/>
+          </a:bodyPr>
+          <a:lstStyle/>
+          <a:p>
+            <a:pPr algn="l">
+              <a:defRPr sz="3200" b="1">
+                <a:solidFill>
+                  <a:srgbClr val="FFFFFF"/>
+                </a:solidFill>
+                <a:latin typeface="Microsoft YaHei"/>
+                <a:ea typeface="微软雅黑"/>
+              </a:defRPr>
+            </a:pPr>
+            <a:r>
+              <a:rPr sz="3200" b="1">
+                <a:solidFill>
+                  <a:srgbClr val="FFFFFF"/>
+                </a:solidFill>
+                <a:latin typeface="Microsoft YaHei"/>
+                <a:ea typeface="微软雅黑"/>
+              </a:rPr>
+              <a:t>冒泡排序与快速排序</a:t>
+            </a:r>
+          </a:p>
+        </p:txBody>
+      </p:sp>
+      <p:sp>
+        <p:nvSpPr>
+          <p:cNvPr id="8" name="TextBox 7"/>
+          <p:cNvSpPr txBox="1"/>
+          <p:nvPr/>
+        </p:nvSpPr>
+        <p:spPr>
+          <a:xfrm>
+            <a:off x="11064240" y="402336"/>
+            <a:ext cx="822960" cy="402336"/>
+          </a:xfrm>
+          <a:prstGeom prst="rect">
+            <a:avLst/>
+          </a:prstGeom>
+          <a:noFill/>
+        </p:spPr>
+        <p:txBody>
+          <a:bodyPr wrap="square" anchor="t" lIns="18288" rIns="18288" tIns="9144" bIns="9144">
+            <a:noAutofit/>
+          </a:bodyPr>
+          <a:lstStyle/>
+          <a:p>
+            <a:pPr algn="r">
+              <a:defRPr sz="1400" b="1">
+                <a:solidFill>
+                  <a:srgbClr val="FFFFFF"/>
+                </a:solidFill>
+                <a:latin typeface="Microsoft YaHei"/>
+                <a:ea typeface="微软雅黑"/>
+              </a:defRPr>
+            </a:pPr>
+            <a:r>
+              <a:rPr sz="1400" b="1">
+                <a:solidFill>
+                  <a:srgbClr val="FFFFFF"/>
+                </a:solidFill>
+                <a:latin typeface="Microsoft YaHei"/>
+                <a:ea typeface="微软雅黑"/>
+              </a:rPr>
+              <a:t>02</a:t>
+            </a:r>
+          </a:p>
+        </p:txBody>
+      </p:sp>
+      <p:sp>
+        <p:nvSpPr>
+          <p:cNvPr id="9" name="Rounded Rectangle 8"/>
           <p:cNvSpPr/>
           <p:nvPr/>
         </p:nvSpPr>
@@ -3610,7 +3827,7 @@
       </p:sp>
       <p:sp>
         <p:nvSpPr>
-          <p:cNvPr id="7" name="TextBox 6"/>
+          <p:cNvPr id="10" name="TextBox 9"/>
           <p:cNvSpPr txBox="1"/>
           <p:nvPr/>
         </p:nvSpPr>
@@ -3654,7 +3871,7 @@
       </p:sp>
       <p:sp>
         <p:nvSpPr>
-          <p:cNvPr id="8" name="TextBox 7"/>
+          <p:cNvPr id="11" name="TextBox 10"/>
           <p:cNvSpPr txBox="1"/>
           <p:nvPr/>
         </p:nvSpPr>
@@ -3758,7 +3975,7 @@
       </p:sp>
       <p:sp>
         <p:nvSpPr>
-          <p:cNvPr id="9" name="Rounded Rectangle 8"/>
+          <p:cNvPr id="12" name="Rounded Rectangle 11"/>
           <p:cNvSpPr/>
           <p:nvPr/>
         </p:nvSpPr>
@@ -3803,7 +4020,7 @@
       </p:sp>
       <p:sp>
         <p:nvSpPr>
-          <p:cNvPr id="10" name="TextBox 9"/>
+          <p:cNvPr id="13" name="TextBox 12"/>
           <p:cNvSpPr txBox="1"/>
           <p:nvPr/>
         </p:nvSpPr>
@@ -3847,7 +4064,7 @@
       </p:sp>
       <p:sp>
         <p:nvSpPr>
-          <p:cNvPr id="11" name="TextBox 10"/>
+          <p:cNvPr id="14" name="TextBox 13"/>
           <p:cNvSpPr txBox="1"/>
           <p:nvPr/>
         </p:nvSpPr>
@@ -3950,152 +4167,20 @@
       <p:grpSpPr/>
       <p:sp>
         <p:nvSpPr>
-          <p:cNvPr id="2" name="TextBox 1"/>
-          <p:cNvSpPr txBox="1"/>
-          <p:nvPr/>
-        </p:nvSpPr>
-        <p:spPr>
-          <a:xfrm>
-            <a:off x="11292840" y="6446520"/>
-            <a:ext cx="411480" cy="201168"/>
+          <p:cNvPr id="2" name="Rectangle 1"/>
+          <p:cNvSpPr/>
+          <p:nvPr/>
+        </p:nvSpPr>
+        <p:spPr>
+          <a:xfrm>
+            <a:off x="658368" y="6528816"/>
+            <a:ext cx="10863072" cy="10972"/>
           </a:xfrm>
           <a:prstGeom prst="rect">
             <a:avLst/>
           </a:prstGeom>
-          <a:noFill/>
-        </p:spPr>
-        <p:txBody>
-          <a:bodyPr wrap="square" anchor="t" lIns="18288" rIns="18288" tIns="9144" bIns="9144">
-            <a:noAutofit/>
-          </a:bodyPr>
-          <a:lstStyle/>
-          <a:p>
-            <a:pPr algn="r">
-              <a:defRPr sz="900" b="0">
-                <a:solidFill>
-                  <a:srgbClr val="627987"/>
-                </a:solidFill>
-                <a:latin typeface="Microsoft YaHei"/>
-                <a:ea typeface="微软雅黑"/>
-              </a:defRPr>
-            </a:pPr>
-            <a:r>
-              <a:rPr sz="900" b="0">
-                <a:solidFill>
-                  <a:srgbClr val="627987"/>
-                </a:solidFill>
-                <a:latin typeface="Microsoft YaHei"/>
-                <a:ea typeface="微软雅黑"/>
-              </a:rPr>
-              <a:t>3</a:t>
-            </a:r>
-          </a:p>
-        </p:txBody>
-      </p:sp>
-      <p:sp>
-        <p:nvSpPr>
-          <p:cNvPr id="3" name="TextBox 2"/>
-          <p:cNvSpPr txBox="1"/>
-          <p:nvPr/>
-        </p:nvSpPr>
-        <p:spPr>
-          <a:xfrm>
-            <a:off x="685800" y="365760"/>
-            <a:ext cx="2011680" cy="219456"/>
-          </a:xfrm>
-          <a:prstGeom prst="rect">
-            <a:avLst/>
-          </a:prstGeom>
-          <a:noFill/>
-        </p:spPr>
-        <p:txBody>
-          <a:bodyPr wrap="square" anchor="t" lIns="18288" rIns="18288" tIns="9144" bIns="9144">
-            <a:noAutofit/>
-          </a:bodyPr>
-          <a:lstStyle/>
-          <a:p>
-            <a:pPr algn="l">
-              <a:defRPr sz="1000" b="1">
-                <a:solidFill>
-                  <a:srgbClr val="E89B52"/>
-                </a:solidFill>
-                <a:latin typeface="Microsoft YaHei"/>
-                <a:ea typeface="微软雅黑"/>
-              </a:defRPr>
-            </a:pPr>
-            <a:r>
-              <a:rPr sz="1000" b="1">
-                <a:solidFill>
-                  <a:srgbClr val="E89B52"/>
-                </a:solidFill>
-                <a:latin typeface="Microsoft YaHei"/>
-                <a:ea typeface="微软雅黑"/>
-              </a:rPr>
-              <a:t>INTERACTION</a:t>
-            </a:r>
-          </a:p>
-        </p:txBody>
-      </p:sp>
-      <p:sp>
-        <p:nvSpPr>
-          <p:cNvPr id="4" name="TextBox 3"/>
-          <p:cNvSpPr txBox="1"/>
-          <p:nvPr/>
-        </p:nvSpPr>
-        <p:spPr>
-          <a:xfrm>
-            <a:off x="658368" y="640080"/>
-            <a:ext cx="10744200" cy="512064"/>
-          </a:xfrm>
-          <a:prstGeom prst="rect">
-            <a:avLst/>
-          </a:prstGeom>
-          <a:noFill/>
-        </p:spPr>
-        <p:txBody>
-          <a:bodyPr wrap="square" anchor="t" lIns="18288" rIns="18288" tIns="9144" bIns="9144">
-            <a:noAutofit/>
-          </a:bodyPr>
-          <a:lstStyle/>
-          <a:p>
-            <a:pPr algn="l">
-              <a:defRPr sz="3400" b="1">
-                <a:solidFill>
-                  <a:srgbClr val="183042"/>
-                </a:solidFill>
-                <a:latin typeface="Microsoft YaHei"/>
-                <a:ea typeface="微软雅黑"/>
-              </a:defRPr>
-            </a:pPr>
-            <a:r>
-              <a:rPr sz="3400" b="1">
-                <a:solidFill>
-                  <a:srgbClr val="183042"/>
-                </a:solidFill>
-                <a:latin typeface="Microsoft YaHei"/>
-                <a:ea typeface="微软雅黑"/>
-              </a:rPr>
-              <a:t>课堂练习：排序算法</a:t>
-            </a:r>
-          </a:p>
-        </p:txBody>
-      </p:sp>
-      <p:sp>
-        <p:nvSpPr>
-          <p:cNvPr id="5" name="Rectangle 4"/>
-          <p:cNvSpPr/>
-          <p:nvPr/>
-        </p:nvSpPr>
-        <p:spPr>
-          <a:xfrm>
-            <a:off x="658368" y="1161288"/>
-            <a:ext cx="10863072" cy="18288"/>
-          </a:xfrm>
-          <a:prstGeom prst="rect">
-            <a:avLst/>
-          </a:prstGeom>
           <a:solidFill>
-            <a:srgbClr val="2F7E83"/>
+            <a:srgbClr val="627987"/>
           </a:solidFill>
           <a:ln>
             <a:noFill/>
@@ -4125,16 +4210,103 @@
       </p:sp>
       <p:sp>
         <p:nvSpPr>
-          <p:cNvPr id="6" name="Rounded Rectangle 5"/>
+          <p:cNvPr id="3" name="TextBox 2"/>
+          <p:cNvSpPr txBox="1"/>
+          <p:nvPr/>
+        </p:nvSpPr>
+        <p:spPr>
+          <a:xfrm>
+            <a:off x="658368" y="6400800"/>
+            <a:ext cx="4754880" cy="274320"/>
+          </a:xfrm>
+          <a:prstGeom prst="rect">
+            <a:avLst/>
+          </a:prstGeom>
+          <a:noFill/>
+        </p:spPr>
+        <p:txBody>
+          <a:bodyPr wrap="square" anchor="t" lIns="18288" rIns="18288" tIns="9144" bIns="9144">
+            <a:noAutofit/>
+          </a:bodyPr>
+          <a:lstStyle/>
+          <a:p>
+            <a:pPr algn="l">
+              <a:defRPr sz="900" b="0">
+                <a:solidFill>
+                  <a:srgbClr val="627987"/>
+                </a:solidFill>
+                <a:latin typeface="Microsoft YaHei"/>
+                <a:ea typeface="微软雅黑"/>
+              </a:defRPr>
+            </a:pPr>
+            <a:r>
+              <a:rPr sz="900" b="0">
+                <a:solidFill>
+                  <a:srgbClr val="627987"/>
+                </a:solidFill>
+                <a:latin typeface="Microsoft YaHei"/>
+                <a:ea typeface="微软雅黑"/>
+              </a:rPr>
+              <a:t>多模态 AI 互动式教学智能体 · 教学课件</a:t>
+            </a:r>
+          </a:p>
+        </p:txBody>
+      </p:sp>
+      <p:sp>
+        <p:nvSpPr>
+          <p:cNvPr id="4" name="Rectangle 3"/>
           <p:cNvSpPr/>
           <p:nvPr/>
         </p:nvSpPr>
         <p:spPr>
           <a:xfrm>
-            <a:off x="777240" y="1417320"/>
-            <a:ext cx="530352" cy="530352"/>
-          </a:xfrm>
-          <a:prstGeom prst="roundRect">
+            <a:off x="0" y="0"/>
+            <a:ext cx="12198096" cy="1060704"/>
+          </a:xfrm>
+          <a:prstGeom prst="rect">
+            <a:avLst/>
+          </a:prstGeom>
+          <a:solidFill>
+            <a:srgbClr val="245B78"/>
+          </a:solidFill>
+          <a:ln>
+            <a:noFill/>
+          </a:ln>
+        </p:spPr>
+        <p:style>
+          <a:lnRef idx="1">
+            <a:schemeClr val="accent1"/>
+          </a:lnRef>
+          <a:fillRef idx="3">
+            <a:schemeClr val="accent1"/>
+          </a:fillRef>
+          <a:effectRef idx="2">
+            <a:schemeClr val="accent1"/>
+          </a:effectRef>
+          <a:fontRef idx="minor">
+            <a:schemeClr val="lt1"/>
+          </a:fontRef>
+        </p:style>
+        <p:txBody>
+          <a:bodyPr rtlCol="0" anchor="ctr"/>
+          <a:lstStyle/>
+          <a:p>
+            <a:pPr algn="ctr"/>
+          </a:p>
+        </p:txBody>
+      </p:sp>
+      <p:sp>
+        <p:nvSpPr>
+          <p:cNvPr id="5" name="Rectangle 4"/>
+          <p:cNvSpPr/>
+          <p:nvPr/>
+        </p:nvSpPr>
+        <p:spPr>
+          <a:xfrm>
+            <a:off x="0" y="1060704"/>
+            <a:ext cx="12198096" cy="45720"/>
+          </a:xfrm>
+          <a:prstGeom prst="rect">
             <a:avLst/>
           </a:prstGeom>
           <a:solidFill>
@@ -4168,14 +4340,14 @@
       </p:sp>
       <p:sp>
         <p:nvSpPr>
-          <p:cNvPr id="7" name="TextBox 6"/>
+          <p:cNvPr id="6" name="TextBox 5"/>
           <p:cNvSpPr txBox="1"/>
           <p:nvPr/>
         </p:nvSpPr>
         <p:spPr>
           <a:xfrm>
-            <a:off x="777240" y="1435608"/>
-            <a:ext cx="530352" cy="384048"/>
+            <a:off x="713232" y="164592"/>
+            <a:ext cx="2926080" cy="237744"/>
           </a:xfrm>
           <a:prstGeom prst="rect">
             <a:avLst/>
@@ -4188,38 +4360,38 @@
           </a:bodyPr>
           <a:lstStyle/>
           <a:p>
-            <a:pPr algn="ctr">
-              <a:defRPr sz="1700" b="1">
-                <a:solidFill>
-                  <a:srgbClr val="FFFFFF"/>
+            <a:pPr algn="l">
+              <a:defRPr sz="1000" b="1">
+                <a:solidFill>
+                  <a:srgbClr val="E89B52"/>
                 </a:solidFill>
                 <a:latin typeface="Microsoft YaHei"/>
                 <a:ea typeface="微软雅黑"/>
               </a:defRPr>
             </a:pPr>
             <a:r>
-              <a:rPr sz="1700" b="1">
-                <a:solidFill>
-                  <a:srgbClr val="FFFFFF"/>
+              <a:rPr sz="1000" b="1">
+                <a:solidFill>
+                  <a:srgbClr val="E89B52"/>
                 </a:solidFill>
                 <a:latin typeface="Microsoft YaHei"/>
                 <a:ea typeface="微软雅黑"/>
               </a:rPr>
-              <a:t>1</a:t>
-            </a:r>
-          </a:p>
-        </p:txBody>
-      </p:sp>
-      <p:sp>
-        <p:nvSpPr>
-          <p:cNvPr id="8" name="TextBox 7"/>
+              <a:t>INTERACTION</a:t>
+            </a:r>
+          </a:p>
+        </p:txBody>
+      </p:sp>
+      <p:sp>
+        <p:nvSpPr>
+          <p:cNvPr id="7" name="TextBox 6"/>
           <p:cNvSpPr txBox="1"/>
           <p:nvPr/>
         </p:nvSpPr>
         <p:spPr>
           <a:xfrm>
-            <a:off x="1536192" y="1399032"/>
-            <a:ext cx="9646920" cy="749808"/>
+            <a:off x="685800" y="402336"/>
+            <a:ext cx="9509760" cy="548640"/>
           </a:xfrm>
           <a:prstGeom prst="rect">
             <a:avLst/>
@@ -4233,37 +4405,37 @@
           <a:lstStyle/>
           <a:p>
             <a:pPr algn="l">
-              <a:defRPr sz="2400" b="1">
-                <a:solidFill>
-                  <a:srgbClr val="183042"/>
+              <a:defRPr sz="3200" b="1">
+                <a:solidFill>
+                  <a:srgbClr val="FFFFFF"/>
                 </a:solidFill>
                 <a:latin typeface="Microsoft YaHei"/>
                 <a:ea typeface="微软雅黑"/>
               </a:defRPr>
             </a:pPr>
             <a:r>
-              <a:rPr sz="2400" b="1">
-                <a:solidFill>
-                  <a:srgbClr val="183042"/>
+              <a:rPr sz="3200" b="1">
+                <a:solidFill>
+                  <a:srgbClr val="FFFFFF"/>
                 </a:solidFill>
                 <a:latin typeface="Microsoft YaHei"/>
                 <a:ea typeface="微软雅黑"/>
               </a:rPr>
-              <a:t>快速排序的平均时间复杂度是？</a:t>
-            </a:r>
-          </a:p>
-        </p:txBody>
-      </p:sp>
-      <p:sp>
-        <p:nvSpPr>
-          <p:cNvPr id="9" name="TextBox 8"/>
+              <a:t>课堂练习：排序算法</a:t>
+            </a:r>
+          </a:p>
+        </p:txBody>
+      </p:sp>
+      <p:sp>
+        <p:nvSpPr>
+          <p:cNvPr id="8" name="TextBox 7"/>
           <p:cNvSpPr txBox="1"/>
           <p:nvPr/>
         </p:nvSpPr>
         <p:spPr>
           <a:xfrm>
-            <a:off x="1536192" y="2167128"/>
-            <a:ext cx="9646920" cy="566928"/>
+            <a:off x="11064240" y="402336"/>
+            <a:ext cx="822960" cy="402336"/>
           </a:xfrm>
           <a:prstGeom prst="rect">
             <a:avLst/>
@@ -4276,81 +4448,37 @@
           </a:bodyPr>
           <a:lstStyle/>
           <a:p>
-            <a:pPr algn="l">
-              <a:defRPr sz="1500" b="0">
-                <a:solidFill>
-                  <a:srgbClr val="183042"/>
+            <a:pPr algn="r">
+              <a:defRPr sz="1400" b="1">
+                <a:solidFill>
+                  <a:srgbClr val="FFFFFF"/>
                 </a:solidFill>
                 <a:latin typeface="Microsoft YaHei"/>
                 <a:ea typeface="微软雅黑"/>
               </a:defRPr>
             </a:pPr>
             <a:r>
-              <a:rPr sz="1500" b="0">
-                <a:solidFill>
-                  <a:srgbClr val="183042"/>
+              <a:rPr sz="1400" b="1">
+                <a:solidFill>
+                  <a:srgbClr val="FFFFFF"/>
                 </a:solidFill>
                 <a:latin typeface="Microsoft YaHei"/>
                 <a:ea typeface="微软雅黑"/>
               </a:rPr>
-              <a:t>A．O(n)    B．O(n log n)    C．O(n²)    D．O(log n)</a:t>
-            </a:r>
-          </a:p>
-        </p:txBody>
-      </p:sp>
-      <p:sp>
-        <p:nvSpPr>
-          <p:cNvPr id="10" name="TextBox 9"/>
-          <p:cNvSpPr txBox="1"/>
-          <p:nvPr/>
-        </p:nvSpPr>
-        <p:spPr>
-          <a:xfrm>
-            <a:off x="1536192" y="2807208"/>
-            <a:ext cx="9646920" cy="365760"/>
-          </a:xfrm>
-          <a:prstGeom prst="rect">
-            <a:avLst/>
-          </a:prstGeom>
-          <a:noFill/>
-        </p:spPr>
-        <p:txBody>
-          <a:bodyPr wrap="square" anchor="t" lIns="18288" rIns="18288" tIns="9144" bIns="9144">
-            <a:noAutofit/>
-          </a:bodyPr>
-          <a:lstStyle/>
-          <a:p>
-            <a:pPr algn="l">
-              <a:defRPr sz="1300" b="1">
-                <a:solidFill>
-                  <a:srgbClr val="2F7E83"/>
-                </a:solidFill>
-                <a:latin typeface="Microsoft YaHei"/>
-                <a:ea typeface="微软雅黑"/>
-              </a:defRPr>
-            </a:pPr>
-            <a:r>
-              <a:rPr sz="1300" b="1">
-                <a:solidFill>
-                  <a:srgbClr val="2F7E83"/>
-                </a:solidFill>
-                <a:latin typeface="Microsoft YaHei"/>
-                <a:ea typeface="微软雅黑"/>
-              </a:rPr>
-              <a:t>参考答案：B</a:t>
-            </a:r>
-          </a:p>
-        </p:txBody>
-      </p:sp>
-      <p:sp>
-        <p:nvSpPr>
-          <p:cNvPr id="11" name="Rounded Rectangle 10"/>
+              <a:t>03</a:t>
+            </a:r>
+          </a:p>
+        </p:txBody>
+      </p:sp>
+      <p:sp>
+        <p:nvSpPr>
+          <p:cNvPr id="9" name="Rounded Rectangle 8"/>
           <p:cNvSpPr/>
           <p:nvPr/>
         </p:nvSpPr>
         <p:spPr>
           <a:xfrm>
-            <a:off x="777240" y="3657600"/>
+            <a:off x="777240" y="1417320"/>
             <a:ext cx="530352" cy="530352"/>
           </a:xfrm>
           <a:prstGeom prst="roundRect">
@@ -4387,13 +4515,13 @@
       </p:sp>
       <p:sp>
         <p:nvSpPr>
-          <p:cNvPr id="12" name="TextBox 11"/>
+          <p:cNvPr id="10" name="TextBox 9"/>
           <p:cNvSpPr txBox="1"/>
           <p:nvPr/>
         </p:nvSpPr>
         <p:spPr>
           <a:xfrm>
-            <a:off x="777240" y="3675887"/>
+            <a:off x="777240" y="1435608"/>
             <a:ext cx="530352" cy="384048"/>
           </a:xfrm>
           <a:prstGeom prst="rect">
@@ -4424,20 +4552,20 @@
                 <a:latin typeface="Microsoft YaHei"/>
                 <a:ea typeface="微软雅黑"/>
               </a:rPr>
-              <a:t>2</a:t>
-            </a:r>
-          </a:p>
-        </p:txBody>
-      </p:sp>
-      <p:sp>
-        <p:nvSpPr>
-          <p:cNvPr id="13" name="TextBox 12"/>
+              <a:t>1</a:t>
+            </a:r>
+          </a:p>
+        </p:txBody>
+      </p:sp>
+      <p:sp>
+        <p:nvSpPr>
+          <p:cNvPr id="11" name="TextBox 10"/>
           <p:cNvSpPr txBox="1"/>
           <p:nvPr/>
         </p:nvSpPr>
         <p:spPr>
           <a:xfrm>
-            <a:off x="1536192" y="3639312"/>
+            <a:off x="1536192" y="1399032"/>
             <a:ext cx="9646920" cy="749808"/>
           </a:xfrm>
           <a:prstGeom prst="rect">
@@ -4468,20 +4596,20 @@
                 <a:latin typeface="Microsoft YaHei"/>
                 <a:ea typeface="微软雅黑"/>
               </a:rPr>
-              <a:t>下列哪种排序算法是稳定的？</a:t>
-            </a:r>
-          </a:p>
-        </p:txBody>
-      </p:sp>
-      <p:sp>
-        <p:nvSpPr>
-          <p:cNvPr id="14" name="TextBox 13"/>
+              <a:t>快速排序的平均时间复杂度是？</a:t>
+            </a:r>
+          </a:p>
+        </p:txBody>
+      </p:sp>
+      <p:sp>
+        <p:nvSpPr>
+          <p:cNvPr id="12" name="TextBox 11"/>
           <p:cNvSpPr txBox="1"/>
           <p:nvPr/>
         </p:nvSpPr>
         <p:spPr>
           <a:xfrm>
-            <a:off x="1536192" y="4407408"/>
+            <a:off x="1536192" y="2167128"/>
             <a:ext cx="9646920" cy="566928"/>
           </a:xfrm>
           <a:prstGeom prst="rect">
@@ -4496,7 +4624,7 @@
           <a:lstStyle/>
           <a:p>
             <a:pPr algn="l">
-              <a:defRPr sz="1800" b="0">
+              <a:defRPr sz="1500" b="0">
                 <a:solidFill>
                   <a:srgbClr val="183042"/>
                 </a:solidFill>
@@ -4505,6 +4633,225 @@
               </a:defRPr>
             </a:pPr>
             <a:r>
+              <a:rPr sz="1500" b="0">
+                <a:solidFill>
+                  <a:srgbClr val="183042"/>
+                </a:solidFill>
+                <a:latin typeface="Microsoft YaHei"/>
+                <a:ea typeface="微软雅黑"/>
+              </a:rPr>
+              <a:t>A．O(n)    B．O(n log n)    C．O(n²)    D．O(log n)</a:t>
+            </a:r>
+          </a:p>
+        </p:txBody>
+      </p:sp>
+      <p:sp>
+        <p:nvSpPr>
+          <p:cNvPr id="13" name="TextBox 12"/>
+          <p:cNvSpPr txBox="1"/>
+          <p:nvPr/>
+        </p:nvSpPr>
+        <p:spPr>
+          <a:xfrm>
+            <a:off x="1536192" y="2807208"/>
+            <a:ext cx="9646920" cy="365760"/>
+          </a:xfrm>
+          <a:prstGeom prst="rect">
+            <a:avLst/>
+          </a:prstGeom>
+          <a:noFill/>
+        </p:spPr>
+        <p:txBody>
+          <a:bodyPr wrap="square" anchor="t" lIns="18288" rIns="18288" tIns="9144" bIns="9144">
+            <a:noAutofit/>
+          </a:bodyPr>
+          <a:lstStyle/>
+          <a:p>
+            <a:pPr algn="l">
+              <a:defRPr sz="1300" b="1">
+                <a:solidFill>
+                  <a:srgbClr val="2F7E83"/>
+                </a:solidFill>
+                <a:latin typeface="Microsoft YaHei"/>
+                <a:ea typeface="微软雅黑"/>
+              </a:defRPr>
+            </a:pPr>
+            <a:r>
+              <a:rPr sz="1300" b="1">
+                <a:solidFill>
+                  <a:srgbClr val="2F7E83"/>
+                </a:solidFill>
+                <a:latin typeface="Microsoft YaHei"/>
+                <a:ea typeface="微软雅黑"/>
+              </a:rPr>
+              <a:t>参考答案：B</a:t>
+            </a:r>
+          </a:p>
+        </p:txBody>
+      </p:sp>
+      <p:sp>
+        <p:nvSpPr>
+          <p:cNvPr id="14" name="Rounded Rectangle 13"/>
+          <p:cNvSpPr/>
+          <p:nvPr/>
+        </p:nvSpPr>
+        <p:spPr>
+          <a:xfrm>
+            <a:off x="777240" y="3657600"/>
+            <a:ext cx="530352" cy="530352"/>
+          </a:xfrm>
+          <a:prstGeom prst="roundRect">
+            <a:avLst/>
+          </a:prstGeom>
+          <a:solidFill>
+            <a:srgbClr val="E89B52"/>
+          </a:solidFill>
+          <a:ln>
+            <a:noFill/>
+          </a:ln>
+        </p:spPr>
+        <p:style>
+          <a:lnRef idx="1">
+            <a:schemeClr val="accent1"/>
+          </a:lnRef>
+          <a:fillRef idx="3">
+            <a:schemeClr val="accent1"/>
+          </a:fillRef>
+          <a:effectRef idx="2">
+            <a:schemeClr val="accent1"/>
+          </a:effectRef>
+          <a:fontRef idx="minor">
+            <a:schemeClr val="lt1"/>
+          </a:fontRef>
+        </p:style>
+        <p:txBody>
+          <a:bodyPr rtlCol="0" anchor="ctr"/>
+          <a:lstStyle/>
+          <a:p>
+            <a:pPr algn="ctr"/>
+          </a:p>
+        </p:txBody>
+      </p:sp>
+      <p:sp>
+        <p:nvSpPr>
+          <p:cNvPr id="15" name="TextBox 14"/>
+          <p:cNvSpPr txBox="1"/>
+          <p:nvPr/>
+        </p:nvSpPr>
+        <p:spPr>
+          <a:xfrm>
+            <a:off x="777240" y="3675887"/>
+            <a:ext cx="530352" cy="384048"/>
+          </a:xfrm>
+          <a:prstGeom prst="rect">
+            <a:avLst/>
+          </a:prstGeom>
+          <a:noFill/>
+        </p:spPr>
+        <p:txBody>
+          <a:bodyPr wrap="square" anchor="t" lIns="18288" rIns="18288" tIns="9144" bIns="9144">
+            <a:noAutofit/>
+          </a:bodyPr>
+          <a:lstStyle/>
+          <a:p>
+            <a:pPr algn="ctr">
+              <a:defRPr sz="1700" b="1">
+                <a:solidFill>
+                  <a:srgbClr val="FFFFFF"/>
+                </a:solidFill>
+                <a:latin typeface="Microsoft YaHei"/>
+                <a:ea typeface="微软雅黑"/>
+              </a:defRPr>
+            </a:pPr>
+            <a:r>
+              <a:rPr sz="1700" b="1">
+                <a:solidFill>
+                  <a:srgbClr val="FFFFFF"/>
+                </a:solidFill>
+                <a:latin typeface="Microsoft YaHei"/>
+                <a:ea typeface="微软雅黑"/>
+              </a:rPr>
+              <a:t>2</a:t>
+            </a:r>
+          </a:p>
+        </p:txBody>
+      </p:sp>
+      <p:sp>
+        <p:nvSpPr>
+          <p:cNvPr id="16" name="TextBox 15"/>
+          <p:cNvSpPr txBox="1"/>
+          <p:nvPr/>
+        </p:nvSpPr>
+        <p:spPr>
+          <a:xfrm>
+            <a:off x="1536192" y="3639312"/>
+            <a:ext cx="9646920" cy="749808"/>
+          </a:xfrm>
+          <a:prstGeom prst="rect">
+            <a:avLst/>
+          </a:prstGeom>
+          <a:noFill/>
+        </p:spPr>
+        <p:txBody>
+          <a:bodyPr wrap="square" anchor="t" lIns="18288" rIns="18288" tIns="9144" bIns="9144">
+            <a:noAutofit/>
+          </a:bodyPr>
+          <a:lstStyle/>
+          <a:p>
+            <a:pPr algn="l">
+              <a:defRPr sz="2400" b="1">
+                <a:solidFill>
+                  <a:srgbClr val="183042"/>
+                </a:solidFill>
+                <a:latin typeface="Microsoft YaHei"/>
+                <a:ea typeface="微软雅黑"/>
+              </a:defRPr>
+            </a:pPr>
+            <a:r>
+              <a:rPr sz="2400" b="1">
+                <a:solidFill>
+                  <a:srgbClr val="183042"/>
+                </a:solidFill>
+                <a:latin typeface="Microsoft YaHei"/>
+                <a:ea typeface="微软雅黑"/>
+              </a:rPr>
+              <a:t>下列哪种排序算法是稳定的？</a:t>
+            </a:r>
+          </a:p>
+        </p:txBody>
+      </p:sp>
+      <p:sp>
+        <p:nvSpPr>
+          <p:cNvPr id="17" name="TextBox 16"/>
+          <p:cNvSpPr txBox="1"/>
+          <p:nvPr/>
+        </p:nvSpPr>
+        <p:spPr>
+          <a:xfrm>
+            <a:off x="1536192" y="4407408"/>
+            <a:ext cx="9646920" cy="566928"/>
+          </a:xfrm>
+          <a:prstGeom prst="rect">
+            <a:avLst/>
+          </a:prstGeom>
+          <a:noFill/>
+        </p:spPr>
+        <p:txBody>
+          <a:bodyPr wrap="square" anchor="t" lIns="18288" rIns="18288" tIns="9144" bIns="9144">
+            <a:noAutofit/>
+          </a:bodyPr>
+          <a:lstStyle/>
+          <a:p>
+            <a:pPr algn="l">
+              <a:defRPr sz="1800" b="0">
+                <a:solidFill>
+                  <a:srgbClr val="183042"/>
+                </a:solidFill>
+                <a:latin typeface="Microsoft YaHei"/>
+                <a:ea typeface="微软雅黑"/>
+              </a:defRPr>
+            </a:pPr>
+            <a:r>
               <a:rPr sz="1800" b="0">
                 <a:solidFill>
                   <a:srgbClr val="183042"/>
@@ -4519,7 +4866,7 @@
       </p:sp>
       <p:sp>
         <p:nvSpPr>
-          <p:cNvPr id="15" name="TextBox 14"/>
+          <p:cNvPr id="18" name="TextBox 17"/>
           <p:cNvSpPr txBox="1"/>
           <p:nvPr/>
         </p:nvSpPr>
@@ -4589,152 +4936,20 @@
       <p:grpSpPr/>
       <p:sp>
         <p:nvSpPr>
-          <p:cNvPr id="2" name="TextBox 1"/>
-          <p:cNvSpPr txBox="1"/>
-          <p:nvPr/>
-        </p:nvSpPr>
-        <p:spPr>
-          <a:xfrm>
-            <a:off x="11292840" y="6446520"/>
-            <a:ext cx="411480" cy="201168"/>
+          <p:cNvPr id="2" name="Rectangle 1"/>
+          <p:cNvSpPr/>
+          <p:nvPr/>
+        </p:nvSpPr>
+        <p:spPr>
+          <a:xfrm>
+            <a:off x="658368" y="6528816"/>
+            <a:ext cx="10863072" cy="10972"/>
           </a:xfrm>
           <a:prstGeom prst="rect">
             <a:avLst/>
           </a:prstGeom>
-          <a:noFill/>
-        </p:spPr>
-        <p:txBody>
-          <a:bodyPr wrap="square" anchor="t" lIns="18288" rIns="18288" tIns="9144" bIns="9144">
-            <a:noAutofit/>
-          </a:bodyPr>
-          <a:lstStyle/>
-          <a:p>
-            <a:pPr algn="r">
-              <a:defRPr sz="900" b="0">
-                <a:solidFill>
-                  <a:srgbClr val="627987"/>
-                </a:solidFill>
-                <a:latin typeface="Microsoft YaHei"/>
-                <a:ea typeface="微软雅黑"/>
-              </a:defRPr>
-            </a:pPr>
-            <a:r>
-              <a:rPr sz="900" b="0">
-                <a:solidFill>
-                  <a:srgbClr val="627987"/>
-                </a:solidFill>
-                <a:latin typeface="Microsoft YaHei"/>
-                <a:ea typeface="微软雅黑"/>
-              </a:rPr>
-              <a:t>3</a:t>
-            </a:r>
-          </a:p>
-        </p:txBody>
-      </p:sp>
-      <p:sp>
-        <p:nvSpPr>
-          <p:cNvPr id="3" name="TextBox 2"/>
-          <p:cNvSpPr txBox="1"/>
-          <p:nvPr/>
-        </p:nvSpPr>
-        <p:spPr>
-          <a:xfrm>
-            <a:off x="685800" y="365760"/>
-            <a:ext cx="2011680" cy="219456"/>
-          </a:xfrm>
-          <a:prstGeom prst="rect">
-            <a:avLst/>
-          </a:prstGeom>
-          <a:noFill/>
-        </p:spPr>
-        <p:txBody>
-          <a:bodyPr wrap="square" anchor="t" lIns="18288" rIns="18288" tIns="9144" bIns="9144">
-            <a:noAutofit/>
-          </a:bodyPr>
-          <a:lstStyle/>
-          <a:p>
-            <a:pPr algn="l">
-              <a:defRPr sz="1000" b="1">
-                <a:solidFill>
-                  <a:srgbClr val="E89B52"/>
-                </a:solidFill>
-                <a:latin typeface="Microsoft YaHei"/>
-                <a:ea typeface="微软雅黑"/>
-              </a:defRPr>
-            </a:pPr>
-            <a:r>
-              <a:rPr sz="1000" b="1">
-                <a:solidFill>
-                  <a:srgbClr val="E89B52"/>
-                </a:solidFill>
-                <a:latin typeface="Microsoft YaHei"/>
-                <a:ea typeface="微软雅黑"/>
-              </a:rPr>
-              <a:t>INTERACTION</a:t>
-            </a:r>
-          </a:p>
-        </p:txBody>
-      </p:sp>
-      <p:sp>
-        <p:nvSpPr>
-          <p:cNvPr id="4" name="TextBox 3"/>
-          <p:cNvSpPr txBox="1"/>
-          <p:nvPr/>
-        </p:nvSpPr>
-        <p:spPr>
-          <a:xfrm>
-            <a:off x="658368" y="640080"/>
-            <a:ext cx="10744200" cy="512064"/>
-          </a:xfrm>
-          <a:prstGeom prst="rect">
-            <a:avLst/>
-          </a:prstGeom>
-          <a:noFill/>
-        </p:spPr>
-        <p:txBody>
-          <a:bodyPr wrap="square" anchor="t" lIns="18288" rIns="18288" tIns="9144" bIns="9144">
-            <a:noAutofit/>
-          </a:bodyPr>
-          <a:lstStyle/>
-          <a:p>
-            <a:pPr algn="l">
-              <a:defRPr sz="3400" b="1">
-                <a:solidFill>
-                  <a:srgbClr val="183042"/>
-                </a:solidFill>
-                <a:latin typeface="Microsoft YaHei"/>
-                <a:ea typeface="微软雅黑"/>
-              </a:defRPr>
-            </a:pPr>
-            <a:r>
-              <a:rPr sz="3400" b="1">
-                <a:solidFill>
-                  <a:srgbClr val="183042"/>
-                </a:solidFill>
-                <a:latin typeface="Microsoft YaHei"/>
-                <a:ea typeface="微软雅黑"/>
-              </a:rPr>
-              <a:t>课堂练习：排序算法（续）</a:t>
-            </a:r>
-          </a:p>
-        </p:txBody>
-      </p:sp>
-      <p:sp>
-        <p:nvSpPr>
-          <p:cNvPr id="5" name="Rectangle 4"/>
-          <p:cNvSpPr/>
-          <p:nvPr/>
-        </p:nvSpPr>
-        <p:spPr>
-          <a:xfrm>
-            <a:off x="658368" y="1161288"/>
-            <a:ext cx="10863072" cy="18288"/>
-          </a:xfrm>
-          <a:prstGeom prst="rect">
-            <a:avLst/>
-          </a:prstGeom>
           <a:solidFill>
-            <a:srgbClr val="2F7E83"/>
+            <a:srgbClr val="627987"/>
           </a:solidFill>
           <a:ln>
             <a:noFill/>
@@ -4764,16 +4979,103 @@
       </p:sp>
       <p:sp>
         <p:nvSpPr>
-          <p:cNvPr id="6" name="Rounded Rectangle 5"/>
+          <p:cNvPr id="3" name="TextBox 2"/>
+          <p:cNvSpPr txBox="1"/>
+          <p:nvPr/>
+        </p:nvSpPr>
+        <p:spPr>
+          <a:xfrm>
+            <a:off x="658368" y="6400800"/>
+            <a:ext cx="4754880" cy="274320"/>
+          </a:xfrm>
+          <a:prstGeom prst="rect">
+            <a:avLst/>
+          </a:prstGeom>
+          <a:noFill/>
+        </p:spPr>
+        <p:txBody>
+          <a:bodyPr wrap="square" anchor="t" lIns="18288" rIns="18288" tIns="9144" bIns="9144">
+            <a:noAutofit/>
+          </a:bodyPr>
+          <a:lstStyle/>
+          <a:p>
+            <a:pPr algn="l">
+              <a:defRPr sz="900" b="0">
+                <a:solidFill>
+                  <a:srgbClr val="627987"/>
+                </a:solidFill>
+                <a:latin typeface="Microsoft YaHei"/>
+                <a:ea typeface="微软雅黑"/>
+              </a:defRPr>
+            </a:pPr>
+            <a:r>
+              <a:rPr sz="900" b="0">
+                <a:solidFill>
+                  <a:srgbClr val="627987"/>
+                </a:solidFill>
+                <a:latin typeface="Microsoft YaHei"/>
+                <a:ea typeface="微软雅黑"/>
+              </a:rPr>
+              <a:t>多模态 AI 互动式教学智能体 · 教学课件</a:t>
+            </a:r>
+          </a:p>
+        </p:txBody>
+      </p:sp>
+      <p:sp>
+        <p:nvSpPr>
+          <p:cNvPr id="4" name="Rectangle 3"/>
           <p:cNvSpPr/>
           <p:nvPr/>
         </p:nvSpPr>
         <p:spPr>
           <a:xfrm>
-            <a:off x="777240" y="1417320"/>
-            <a:ext cx="530352" cy="530352"/>
-          </a:xfrm>
-          <a:prstGeom prst="roundRect">
+            <a:off x="0" y="0"/>
+            <a:ext cx="12198096" cy="1060704"/>
+          </a:xfrm>
+          <a:prstGeom prst="rect">
+            <a:avLst/>
+          </a:prstGeom>
+          <a:solidFill>
+            <a:srgbClr val="245B78"/>
+          </a:solidFill>
+          <a:ln>
+            <a:noFill/>
+          </a:ln>
+        </p:spPr>
+        <p:style>
+          <a:lnRef idx="1">
+            <a:schemeClr val="accent1"/>
+          </a:lnRef>
+          <a:fillRef idx="3">
+            <a:schemeClr val="accent1"/>
+          </a:fillRef>
+          <a:effectRef idx="2">
+            <a:schemeClr val="accent1"/>
+          </a:effectRef>
+          <a:fontRef idx="minor">
+            <a:schemeClr val="lt1"/>
+          </a:fontRef>
+        </p:style>
+        <p:txBody>
+          <a:bodyPr rtlCol="0" anchor="ctr"/>
+          <a:lstStyle/>
+          <a:p>
+            <a:pPr algn="ctr"/>
+          </a:p>
+        </p:txBody>
+      </p:sp>
+      <p:sp>
+        <p:nvSpPr>
+          <p:cNvPr id="5" name="Rectangle 4"/>
+          <p:cNvSpPr/>
+          <p:nvPr/>
+        </p:nvSpPr>
+        <p:spPr>
+          <a:xfrm>
+            <a:off x="0" y="1060704"/>
+            <a:ext cx="12198096" cy="45720"/>
+          </a:xfrm>
+          <a:prstGeom prst="rect">
             <a:avLst/>
           </a:prstGeom>
           <a:solidFill>
@@ -4807,14 +5109,14 @@
       </p:sp>
       <p:sp>
         <p:nvSpPr>
-          <p:cNvPr id="7" name="TextBox 6"/>
+          <p:cNvPr id="6" name="TextBox 5"/>
           <p:cNvSpPr txBox="1"/>
           <p:nvPr/>
         </p:nvSpPr>
         <p:spPr>
           <a:xfrm>
-            <a:off x="777240" y="1435608"/>
-            <a:ext cx="530352" cy="384048"/>
+            <a:off x="713232" y="164592"/>
+            <a:ext cx="2926080" cy="237744"/>
           </a:xfrm>
           <a:prstGeom prst="rect">
             <a:avLst/>
@@ -4827,6 +5129,181 @@
           </a:bodyPr>
           <a:lstStyle/>
           <a:p>
+            <a:pPr algn="l">
+              <a:defRPr sz="1000" b="1">
+                <a:solidFill>
+                  <a:srgbClr val="E89B52"/>
+                </a:solidFill>
+                <a:latin typeface="Microsoft YaHei"/>
+                <a:ea typeface="微软雅黑"/>
+              </a:defRPr>
+            </a:pPr>
+            <a:r>
+              <a:rPr sz="1000" b="1">
+                <a:solidFill>
+                  <a:srgbClr val="E89B52"/>
+                </a:solidFill>
+                <a:latin typeface="Microsoft YaHei"/>
+                <a:ea typeface="微软雅黑"/>
+              </a:rPr>
+              <a:t>INTERACTION</a:t>
+            </a:r>
+          </a:p>
+        </p:txBody>
+      </p:sp>
+      <p:sp>
+        <p:nvSpPr>
+          <p:cNvPr id="7" name="TextBox 6"/>
+          <p:cNvSpPr txBox="1"/>
+          <p:nvPr/>
+        </p:nvSpPr>
+        <p:spPr>
+          <a:xfrm>
+            <a:off x="685800" y="402336"/>
+            <a:ext cx="9509760" cy="548640"/>
+          </a:xfrm>
+          <a:prstGeom prst="rect">
+            <a:avLst/>
+          </a:prstGeom>
+          <a:noFill/>
+        </p:spPr>
+        <p:txBody>
+          <a:bodyPr wrap="square" anchor="t" lIns="18288" rIns="18288" tIns="9144" bIns="9144">
+            <a:noAutofit/>
+          </a:bodyPr>
+          <a:lstStyle/>
+          <a:p>
+            <a:pPr algn="l">
+              <a:defRPr sz="3200" b="1">
+                <a:solidFill>
+                  <a:srgbClr val="FFFFFF"/>
+                </a:solidFill>
+                <a:latin typeface="Microsoft YaHei"/>
+                <a:ea typeface="微软雅黑"/>
+              </a:defRPr>
+            </a:pPr>
+            <a:r>
+              <a:rPr sz="3200" b="1">
+                <a:solidFill>
+                  <a:srgbClr val="FFFFFF"/>
+                </a:solidFill>
+                <a:latin typeface="Microsoft YaHei"/>
+                <a:ea typeface="微软雅黑"/>
+              </a:rPr>
+              <a:t>课堂练习：排序算法（续）</a:t>
+            </a:r>
+          </a:p>
+        </p:txBody>
+      </p:sp>
+      <p:sp>
+        <p:nvSpPr>
+          <p:cNvPr id="8" name="TextBox 7"/>
+          <p:cNvSpPr txBox="1"/>
+          <p:nvPr/>
+        </p:nvSpPr>
+        <p:spPr>
+          <a:xfrm>
+            <a:off x="11064240" y="402336"/>
+            <a:ext cx="822960" cy="402336"/>
+          </a:xfrm>
+          <a:prstGeom prst="rect">
+            <a:avLst/>
+          </a:prstGeom>
+          <a:noFill/>
+        </p:spPr>
+        <p:txBody>
+          <a:bodyPr wrap="square" anchor="t" lIns="18288" rIns="18288" tIns="9144" bIns="9144">
+            <a:noAutofit/>
+          </a:bodyPr>
+          <a:lstStyle/>
+          <a:p>
+            <a:pPr algn="r">
+              <a:defRPr sz="1400" b="1">
+                <a:solidFill>
+                  <a:srgbClr val="FFFFFF"/>
+                </a:solidFill>
+                <a:latin typeface="Microsoft YaHei"/>
+                <a:ea typeface="微软雅黑"/>
+              </a:defRPr>
+            </a:pPr>
+            <a:r>
+              <a:rPr sz="1400" b="1">
+                <a:solidFill>
+                  <a:srgbClr val="FFFFFF"/>
+                </a:solidFill>
+                <a:latin typeface="Microsoft YaHei"/>
+                <a:ea typeface="微软雅黑"/>
+              </a:rPr>
+              <a:t>03</a:t>
+            </a:r>
+          </a:p>
+        </p:txBody>
+      </p:sp>
+      <p:sp>
+        <p:nvSpPr>
+          <p:cNvPr id="9" name="Rounded Rectangle 8"/>
+          <p:cNvSpPr/>
+          <p:nvPr/>
+        </p:nvSpPr>
+        <p:spPr>
+          <a:xfrm>
+            <a:off x="777240" y="1417320"/>
+            <a:ext cx="530352" cy="530352"/>
+          </a:xfrm>
+          <a:prstGeom prst="roundRect">
+            <a:avLst/>
+          </a:prstGeom>
+          <a:solidFill>
+            <a:srgbClr val="E89B52"/>
+          </a:solidFill>
+          <a:ln>
+            <a:noFill/>
+          </a:ln>
+        </p:spPr>
+        <p:style>
+          <a:lnRef idx="1">
+            <a:schemeClr val="accent1"/>
+          </a:lnRef>
+          <a:fillRef idx="3">
+            <a:schemeClr val="accent1"/>
+          </a:fillRef>
+          <a:effectRef idx="2">
+            <a:schemeClr val="accent1"/>
+          </a:effectRef>
+          <a:fontRef idx="minor">
+            <a:schemeClr val="lt1"/>
+          </a:fontRef>
+        </p:style>
+        <p:txBody>
+          <a:bodyPr rtlCol="0" anchor="ctr"/>
+          <a:lstStyle/>
+          <a:p>
+            <a:pPr algn="ctr"/>
+          </a:p>
+        </p:txBody>
+      </p:sp>
+      <p:sp>
+        <p:nvSpPr>
+          <p:cNvPr id="10" name="TextBox 9"/>
+          <p:cNvSpPr txBox="1"/>
+          <p:nvPr/>
+        </p:nvSpPr>
+        <p:spPr>
+          <a:xfrm>
+            <a:off x="777240" y="1435608"/>
+            <a:ext cx="530352" cy="384048"/>
+          </a:xfrm>
+          <a:prstGeom prst="rect">
+            <a:avLst/>
+          </a:prstGeom>
+          <a:noFill/>
+        </p:spPr>
+        <p:txBody>
+          <a:bodyPr wrap="square" anchor="t" lIns="18288" rIns="18288" tIns="9144" bIns="9144">
+            <a:noAutofit/>
+          </a:bodyPr>
+          <a:lstStyle/>
+          <a:p>
             <a:pPr algn="ctr">
               <a:defRPr sz="1700" b="1">
                 <a:solidFill>
@@ -4851,7 +5328,7 @@
       </p:sp>
       <p:sp>
         <p:nvSpPr>
-          <p:cNvPr id="8" name="TextBox 7"/>
+          <p:cNvPr id="11" name="TextBox 10"/>
           <p:cNvSpPr txBox="1"/>
           <p:nvPr/>
         </p:nvSpPr>
@@ -4907,7 +5384,7 @@
     <p:bg>
       <p:bgPr>
         <a:solidFill>
-          <a:srgbClr val="F5F8FA"/>
+          <a:srgbClr val="E6EDF1"/>
         </a:solidFill>
         <a:effectLst/>
       </p:bgPr>
@@ -4921,14 +5398,57 @@
       <p:grpSpPr/>
       <p:sp>
         <p:nvSpPr>
-          <p:cNvPr id="2" name="TextBox 1"/>
+          <p:cNvPr id="2" name="Rectangle 1"/>
+          <p:cNvSpPr/>
+          <p:nvPr/>
+        </p:nvSpPr>
+        <p:spPr>
+          <a:xfrm>
+            <a:off x="658368" y="6528816"/>
+            <a:ext cx="10863072" cy="10972"/>
+          </a:xfrm>
+          <a:prstGeom prst="rect">
+            <a:avLst/>
+          </a:prstGeom>
+          <a:solidFill>
+            <a:srgbClr val="627987"/>
+          </a:solidFill>
+          <a:ln>
+            <a:noFill/>
+          </a:ln>
+        </p:spPr>
+        <p:style>
+          <a:lnRef idx="1">
+            <a:schemeClr val="accent1"/>
+          </a:lnRef>
+          <a:fillRef idx="3">
+            <a:schemeClr val="accent1"/>
+          </a:fillRef>
+          <a:effectRef idx="2">
+            <a:schemeClr val="accent1"/>
+          </a:effectRef>
+          <a:fontRef idx="minor">
+            <a:schemeClr val="lt1"/>
+          </a:fontRef>
+        </p:style>
+        <p:txBody>
+          <a:bodyPr rtlCol="0" anchor="ctr"/>
+          <a:lstStyle/>
+          <a:p>
+            <a:pPr algn="ctr"/>
+          </a:p>
+        </p:txBody>
+      </p:sp>
+      <p:sp>
+        <p:nvSpPr>
+          <p:cNvPr id="3" name="TextBox 2"/>
           <p:cNvSpPr txBox="1"/>
           <p:nvPr/>
         </p:nvSpPr>
         <p:spPr>
           <a:xfrm>
-            <a:off x="11292840" y="6446520"/>
-            <a:ext cx="411480" cy="201168"/>
+            <a:off x="658368" y="6400800"/>
+            <a:ext cx="4754880" cy="274320"/>
           </a:xfrm>
           <a:prstGeom prst="rect">
             <a:avLst/>
@@ -4941,7 +5461,7 @@
           </a:bodyPr>
           <a:lstStyle/>
           <a:p>
-            <a:pPr algn="r">
+            <a:pPr algn="l">
               <a:defRPr sz="900" b="0">
                 <a:solidFill>
                   <a:srgbClr val="627987"/>
@@ -4958,21 +5478,107 @@
                 <a:latin typeface="Microsoft YaHei"/>
                 <a:ea typeface="微软雅黑"/>
               </a:rPr>
-              <a:t>4</a:t>
-            </a:r>
-          </a:p>
-        </p:txBody>
-      </p:sp>
-      <p:sp>
-        <p:nvSpPr>
-          <p:cNvPr id="3" name="TextBox 2"/>
+              <a:t>多模态 AI 互动式教学智能体 · 教学课件</a:t>
+            </a:r>
+          </a:p>
+        </p:txBody>
+      </p:sp>
+      <p:sp>
+        <p:nvSpPr>
+          <p:cNvPr id="4" name="Rectangle 3"/>
+          <p:cNvSpPr/>
+          <p:nvPr/>
+        </p:nvSpPr>
+        <p:spPr>
+          <a:xfrm>
+            <a:off x="0" y="0"/>
+            <a:ext cx="12198096" cy="1060704"/>
+          </a:xfrm>
+          <a:prstGeom prst="rect">
+            <a:avLst/>
+          </a:prstGeom>
+          <a:solidFill>
+            <a:srgbClr val="245B78"/>
+          </a:solidFill>
+          <a:ln>
+            <a:noFill/>
+          </a:ln>
+        </p:spPr>
+        <p:style>
+          <a:lnRef idx="1">
+            <a:schemeClr val="accent1"/>
+          </a:lnRef>
+          <a:fillRef idx="3">
+            <a:schemeClr val="accent1"/>
+          </a:fillRef>
+          <a:effectRef idx="2">
+            <a:schemeClr val="accent1"/>
+          </a:effectRef>
+          <a:fontRef idx="minor">
+            <a:schemeClr val="lt1"/>
+          </a:fontRef>
+        </p:style>
+        <p:txBody>
+          <a:bodyPr rtlCol="0" anchor="ctr"/>
+          <a:lstStyle/>
+          <a:p>
+            <a:pPr algn="ctr"/>
+          </a:p>
+        </p:txBody>
+      </p:sp>
+      <p:sp>
+        <p:nvSpPr>
+          <p:cNvPr id="5" name="Rectangle 4"/>
+          <p:cNvSpPr/>
+          <p:nvPr/>
+        </p:nvSpPr>
+        <p:spPr>
+          <a:xfrm>
+            <a:off x="0" y="1060704"/>
+            <a:ext cx="12198096" cy="45720"/>
+          </a:xfrm>
+          <a:prstGeom prst="rect">
+            <a:avLst/>
+          </a:prstGeom>
+          <a:solidFill>
+            <a:srgbClr val="E89B52"/>
+          </a:solidFill>
+          <a:ln>
+            <a:noFill/>
+          </a:ln>
+        </p:spPr>
+        <p:style>
+          <a:lnRef idx="1">
+            <a:schemeClr val="accent1"/>
+          </a:lnRef>
+          <a:fillRef idx="3">
+            <a:schemeClr val="accent1"/>
+          </a:fillRef>
+          <a:effectRef idx="2">
+            <a:schemeClr val="accent1"/>
+          </a:effectRef>
+          <a:fontRef idx="minor">
+            <a:schemeClr val="lt1"/>
+          </a:fontRef>
+        </p:style>
+        <p:txBody>
+          <a:bodyPr rtlCol="0" anchor="ctr"/>
+          <a:lstStyle/>
+          <a:p>
+            <a:pPr algn="ctr"/>
+          </a:p>
+        </p:txBody>
+      </p:sp>
+      <p:sp>
+        <p:nvSpPr>
+          <p:cNvPr id="6" name="TextBox 5"/>
           <p:cNvSpPr txBox="1"/>
           <p:nvPr/>
         </p:nvSpPr>
         <p:spPr>
           <a:xfrm>
-            <a:off x="685800" y="365760"/>
-            <a:ext cx="2011680" cy="219456"/>
+            <a:off x="713232" y="164592"/>
+            <a:ext cx="2926080" cy="237744"/>
           </a:xfrm>
           <a:prstGeom prst="rect">
             <a:avLst/>
@@ -5009,14 +5615,14 @@
       </p:sp>
       <p:sp>
         <p:nvSpPr>
-          <p:cNvPr id="4" name="TextBox 3"/>
+          <p:cNvPr id="7" name="TextBox 6"/>
           <p:cNvSpPr txBox="1"/>
           <p:nvPr/>
         </p:nvSpPr>
         <p:spPr>
           <a:xfrm>
-            <a:off x="658368" y="640080"/>
-            <a:ext cx="10744200" cy="512064"/>
+            <a:off x="685800" y="402336"/>
+            <a:ext cx="9509760" cy="548640"/>
           </a:xfrm>
           <a:prstGeom prst="rect">
             <a:avLst/>
@@ -5030,18 +5636,18 @@
           <a:lstStyle/>
           <a:p>
             <a:pPr algn="l">
-              <a:defRPr sz="3400" b="1">
-                <a:solidFill>
-                  <a:srgbClr val="183042"/>
+              <a:defRPr sz="3200" b="1">
+                <a:solidFill>
+                  <a:srgbClr val="FFFFFF"/>
                 </a:solidFill>
                 <a:latin typeface="Microsoft YaHei"/>
                 <a:ea typeface="微软雅黑"/>
               </a:defRPr>
             </a:pPr>
             <a:r>
-              <a:rPr sz="3400" b="1">
-                <a:solidFill>
-                  <a:srgbClr val="183042"/>
+              <a:rPr sz="3200" b="1">
+                <a:solidFill>
+                  <a:srgbClr val="FFFFFF"/>
                 </a:solidFill>
                 <a:latin typeface="Microsoft YaHei"/>
                 <a:ea typeface="微软雅黑"/>
@@ -5053,16 +5659,105 @@
       </p:sp>
       <p:sp>
         <p:nvSpPr>
-          <p:cNvPr id="5" name="Rectangle 4"/>
+          <p:cNvPr id="8" name="TextBox 7"/>
+          <p:cNvSpPr txBox="1"/>
+          <p:nvPr/>
+        </p:nvSpPr>
+        <p:spPr>
+          <a:xfrm>
+            <a:off x="11064240" y="402336"/>
+            <a:ext cx="822960" cy="402336"/>
+          </a:xfrm>
+          <a:prstGeom prst="rect">
+            <a:avLst/>
+          </a:prstGeom>
+          <a:noFill/>
+        </p:spPr>
+        <p:txBody>
+          <a:bodyPr wrap="square" anchor="t" lIns="18288" rIns="18288" tIns="9144" bIns="9144">
+            <a:noAutofit/>
+          </a:bodyPr>
+          <a:lstStyle/>
+          <a:p>
+            <a:pPr algn="r">
+              <a:defRPr sz="1400" b="1">
+                <a:solidFill>
+                  <a:srgbClr val="FFFFFF"/>
+                </a:solidFill>
+                <a:latin typeface="Microsoft YaHei"/>
+                <a:ea typeface="微软雅黑"/>
+              </a:defRPr>
+            </a:pPr>
+            <a:r>
+              <a:rPr sz="1400" b="1">
+                <a:solidFill>
+                  <a:srgbClr val="FFFFFF"/>
+                </a:solidFill>
+                <a:latin typeface="Microsoft YaHei"/>
+                <a:ea typeface="微软雅黑"/>
+              </a:rPr>
+              <a:t>04</a:t>
+            </a:r>
+          </a:p>
+        </p:txBody>
+      </p:sp>
+      <p:sp>
+        <p:nvSpPr>
+          <p:cNvPr id="9" name="Rounded Rectangle 8"/>
           <p:cNvSpPr/>
           <p:nvPr/>
         </p:nvSpPr>
         <p:spPr>
           <a:xfrm>
-            <a:off x="658368" y="1161288"/>
-            <a:ext cx="10863072" cy="18288"/>
-          </a:xfrm>
-          <a:prstGeom prst="rect">
+            <a:off x="658368" y="1481328"/>
+            <a:ext cx="10863072" cy="713232"/>
+          </a:xfrm>
+          <a:prstGeom prst="roundRect">
+            <a:avLst/>
+          </a:prstGeom>
+          <a:solidFill>
+            <a:srgbClr val="FFFFFF"/>
+          </a:solidFill>
+          <a:ln>
+            <a:solidFill>
+              <a:srgbClr val="627987"/>
+            </a:solidFill>
+          </a:ln>
+        </p:spPr>
+        <p:style>
+          <a:lnRef idx="1">
+            <a:schemeClr val="accent1"/>
+          </a:lnRef>
+          <a:fillRef idx="3">
+            <a:schemeClr val="accent1"/>
+          </a:fillRef>
+          <a:effectRef idx="2">
+            <a:schemeClr val="accent1"/>
+          </a:effectRef>
+          <a:fontRef idx="minor">
+            <a:schemeClr val="lt1"/>
+          </a:fontRef>
+        </p:style>
+        <p:txBody>
+          <a:bodyPr rtlCol="0" anchor="ctr"/>
+          <a:lstStyle/>
+          <a:p>
+            <a:pPr algn="ctr"/>
+          </a:p>
+        </p:txBody>
+      </p:sp>
+      <p:sp>
+        <p:nvSpPr>
+          <p:cNvPr id="10" name="Oval 9"/>
+          <p:cNvSpPr/>
+          <p:nvPr/>
+        </p:nvSpPr>
+        <p:spPr>
+          <a:xfrm>
+            <a:off x="914400" y="1655064"/>
+            <a:ext cx="365760" cy="365760"/>
+          </a:xfrm>
+          <a:prstGeom prst="ellipse">
             <a:avLst/>
           </a:prstGeom>
           <a:solidFill>
@@ -5096,23 +5791,113 @@
       </p:sp>
       <p:sp>
         <p:nvSpPr>
-          <p:cNvPr id="6" name="Rectangle 5"/>
+          <p:cNvPr id="11" name="TextBox 10"/>
+          <p:cNvSpPr txBox="1"/>
+          <p:nvPr/>
+        </p:nvSpPr>
+        <p:spPr>
+          <a:xfrm>
+            <a:off x="914400" y="1700784"/>
+            <a:ext cx="365760" cy="292608"/>
+          </a:xfrm>
+          <a:prstGeom prst="rect">
+            <a:avLst/>
+          </a:prstGeom>
+          <a:noFill/>
+        </p:spPr>
+        <p:txBody>
+          <a:bodyPr wrap="square" anchor="t" lIns="18288" rIns="18288" tIns="9144" bIns="9144">
+            <a:noAutofit/>
+          </a:bodyPr>
+          <a:lstStyle/>
+          <a:p>
+            <a:pPr algn="ctr">
+              <a:defRPr sz="1200" b="1">
+                <a:solidFill>
+                  <a:srgbClr val="FFFFFF"/>
+                </a:solidFill>
+                <a:latin typeface="Microsoft YaHei"/>
+                <a:ea typeface="微软雅黑"/>
+              </a:defRPr>
+            </a:pPr>
+            <a:r>
+              <a:rPr sz="1200" b="1">
+                <a:solidFill>
+                  <a:srgbClr val="FFFFFF"/>
+                </a:solidFill>
+                <a:latin typeface="Microsoft YaHei"/>
+                <a:ea typeface="微软雅黑"/>
+              </a:rPr>
+              <a:t>1</a:t>
+            </a:r>
+          </a:p>
+        </p:txBody>
+      </p:sp>
+      <p:sp>
+        <p:nvSpPr>
+          <p:cNvPr id="12" name="TextBox 11"/>
+          <p:cNvSpPr txBox="1"/>
+          <p:nvPr/>
+        </p:nvSpPr>
+        <p:spPr>
+          <a:xfrm>
+            <a:off x="1517904" y="1627632"/>
+            <a:ext cx="9784080" cy="457200"/>
+          </a:xfrm>
+          <a:prstGeom prst="rect">
+            <a:avLst/>
+          </a:prstGeom>
+          <a:noFill/>
+        </p:spPr>
+        <p:txBody>
+          <a:bodyPr wrap="square" anchor="ctr" lIns="18288" rIns="18288" tIns="9144" bIns="9144">
+            <a:noAutofit/>
+          </a:bodyPr>
+          <a:lstStyle/>
+          <a:p>
+            <a:pPr algn="l">
+              <a:defRPr sz="1900" b="0">
+                <a:solidFill>
+                  <a:srgbClr val="183042"/>
+                </a:solidFill>
+                <a:latin typeface="Microsoft YaHei"/>
+                <a:ea typeface="微软雅黑"/>
+              </a:defRPr>
+            </a:pPr>
+            <a:r>
+              <a:rPr sz="1900" b="0">
+                <a:solidFill>
+                  <a:srgbClr val="183042"/>
+                </a:solidFill>
+                <a:latin typeface="Microsoft YaHei"/>
+                <a:ea typeface="微软雅黑"/>
+              </a:rPr>
+              <a:t>冒泡排序简单但慢</a:t>
+            </a:r>
+          </a:p>
+        </p:txBody>
+      </p:sp>
+      <p:sp>
+        <p:nvSpPr>
+          <p:cNvPr id="13" name="Rounded Rectangle 12"/>
           <p:cNvSpPr/>
           <p:nvPr/>
         </p:nvSpPr>
         <p:spPr>
           <a:xfrm>
-            <a:off x="658368" y="1353312"/>
-            <a:ext cx="82296" cy="4709160"/>
-          </a:xfrm>
-          <a:prstGeom prst="rect">
+            <a:off x="658368" y="2304288"/>
+            <a:ext cx="10863072" cy="713232"/>
+          </a:xfrm>
+          <a:prstGeom prst="roundRect">
             <a:avLst/>
           </a:prstGeom>
           <a:solidFill>
-            <a:srgbClr val="E89B52"/>
+            <a:srgbClr val="FFFFFF"/>
           </a:solidFill>
           <a:ln>
-            <a:noFill/>
+            <a:solidFill>
+              <a:srgbClr val="627987"/>
+            </a:solidFill>
           </a:ln>
         </p:spPr>
         <p:style>
@@ -5139,14 +5924,14 @@
       </p:sp>
       <p:sp>
         <p:nvSpPr>
-          <p:cNvPr id="7" name="Oval 6"/>
+          <p:cNvPr id="14" name="Oval 13"/>
           <p:cNvSpPr/>
           <p:nvPr/>
         </p:nvSpPr>
         <p:spPr>
           <a:xfrm>
-            <a:off x="987552" y="1600200"/>
-            <a:ext cx="164592" cy="164592"/>
+            <a:off x="914400" y="2478024"/>
+            <a:ext cx="365760" cy="365760"/>
           </a:xfrm>
           <a:prstGeom prst="ellipse">
             <a:avLst/>
@@ -5182,14 +5967,14 @@
       </p:sp>
       <p:sp>
         <p:nvSpPr>
-          <p:cNvPr id="8" name="TextBox 7"/>
+          <p:cNvPr id="15" name="TextBox 14"/>
           <p:cNvSpPr txBox="1"/>
           <p:nvPr/>
         </p:nvSpPr>
         <p:spPr>
           <a:xfrm>
-            <a:off x="1389888" y="1481328"/>
-            <a:ext cx="9555480" cy="612648"/>
+            <a:off x="914400" y="2523744"/>
+            <a:ext cx="365760" cy="292608"/>
           </a:xfrm>
           <a:prstGeom prst="rect">
             <a:avLst/>
@@ -5202,38 +5987,127 @@
           </a:bodyPr>
           <a:lstStyle/>
           <a:p>
-            <a:pPr algn="l">
-              <a:defRPr sz="2500" b="0">
-                <a:solidFill>
-                  <a:srgbClr val="183042"/>
+            <a:pPr algn="ctr">
+              <a:defRPr sz="1200" b="1">
+                <a:solidFill>
+                  <a:srgbClr val="FFFFFF"/>
                 </a:solidFill>
                 <a:latin typeface="Microsoft YaHei"/>
                 <a:ea typeface="微软雅黑"/>
               </a:defRPr>
             </a:pPr>
             <a:r>
-              <a:rPr sz="2500" b="0">
+              <a:rPr sz="1200" b="1">
+                <a:solidFill>
+                  <a:srgbClr val="FFFFFF"/>
+                </a:solidFill>
+                <a:latin typeface="Microsoft YaHei"/>
+                <a:ea typeface="微软雅黑"/>
+              </a:rPr>
+              <a:t>2</a:t>
+            </a:r>
+          </a:p>
+        </p:txBody>
+      </p:sp>
+      <p:sp>
+        <p:nvSpPr>
+          <p:cNvPr id="16" name="TextBox 15"/>
+          <p:cNvSpPr txBox="1"/>
+          <p:nvPr/>
+        </p:nvSpPr>
+        <p:spPr>
+          <a:xfrm>
+            <a:off x="1517904" y="2450592"/>
+            <a:ext cx="9784080" cy="457200"/>
+          </a:xfrm>
+          <a:prstGeom prst="rect">
+            <a:avLst/>
+          </a:prstGeom>
+          <a:noFill/>
+        </p:spPr>
+        <p:txBody>
+          <a:bodyPr wrap="square" anchor="ctr" lIns="18288" rIns="18288" tIns="9144" bIns="9144">
+            <a:noAutofit/>
+          </a:bodyPr>
+          <a:lstStyle/>
+          <a:p>
+            <a:pPr algn="l">
+              <a:defRPr sz="1900" b="0">
                 <a:solidFill>
                   <a:srgbClr val="183042"/>
                 </a:solidFill>
                 <a:latin typeface="Microsoft YaHei"/>
                 <a:ea typeface="微软雅黑"/>
+              </a:defRPr>
+            </a:pPr>
+            <a:r>
+              <a:rPr sz="1900" b="0">
+                <a:solidFill>
+                  <a:srgbClr val="183042"/>
+                </a:solidFill>
+                <a:latin typeface="Microsoft YaHei"/>
+                <a:ea typeface="微软雅黑"/>
               </a:rPr>
-              <a:t>冒泡排序简单但慢</a:t>
-            </a:r>
-          </a:p>
-        </p:txBody>
-      </p:sp>
-      <p:sp>
-        <p:nvSpPr>
-          <p:cNvPr id="9" name="Oval 8"/>
+              <a:t>快排分治高效</a:t>
+            </a:r>
+          </a:p>
+        </p:txBody>
+      </p:sp>
+      <p:sp>
+        <p:nvSpPr>
+          <p:cNvPr id="17" name="Rounded Rectangle 16"/>
           <p:cNvSpPr/>
           <p:nvPr/>
         </p:nvSpPr>
         <p:spPr>
           <a:xfrm>
-            <a:off x="987552" y="2313432"/>
-            <a:ext cx="164592" cy="164592"/>
+            <a:off x="658368" y="3127248"/>
+            <a:ext cx="10863072" cy="713232"/>
+          </a:xfrm>
+          <a:prstGeom prst="roundRect">
+            <a:avLst/>
+          </a:prstGeom>
+          <a:solidFill>
+            <a:srgbClr val="FFFFFF"/>
+          </a:solidFill>
+          <a:ln>
+            <a:solidFill>
+              <a:srgbClr val="627987"/>
+            </a:solidFill>
+          </a:ln>
+        </p:spPr>
+        <p:style>
+          <a:lnRef idx="1">
+            <a:schemeClr val="accent1"/>
+          </a:lnRef>
+          <a:fillRef idx="3">
+            <a:schemeClr val="accent1"/>
+          </a:fillRef>
+          <a:effectRef idx="2">
+            <a:schemeClr val="accent1"/>
+          </a:effectRef>
+          <a:fontRef idx="minor">
+            <a:schemeClr val="lt1"/>
+          </a:fontRef>
+        </p:style>
+        <p:txBody>
+          <a:bodyPr rtlCol="0" anchor="ctr"/>
+          <a:lstStyle/>
+          <a:p>
+            <a:pPr algn="ctr"/>
+          </a:p>
+        </p:txBody>
+      </p:sp>
+      <p:sp>
+        <p:nvSpPr>
+          <p:cNvPr id="18" name="Oval 17"/>
+          <p:cNvSpPr/>
+          <p:nvPr/>
+        </p:nvSpPr>
+        <p:spPr>
+          <a:xfrm>
+            <a:off x="914400" y="3300984"/>
+            <a:ext cx="365760" cy="365760"/>
           </a:xfrm>
           <a:prstGeom prst="ellipse">
             <a:avLst/>
@@ -5269,14 +6143,14 @@
       </p:sp>
       <p:sp>
         <p:nvSpPr>
-          <p:cNvPr id="10" name="TextBox 9"/>
+          <p:cNvPr id="19" name="TextBox 18"/>
           <p:cNvSpPr txBox="1"/>
           <p:nvPr/>
         </p:nvSpPr>
         <p:spPr>
           <a:xfrm>
-            <a:off x="1389888" y="2194560"/>
-            <a:ext cx="9555480" cy="612648"/>
+            <a:off x="914400" y="3346704"/>
+            <a:ext cx="365760" cy="292608"/>
           </a:xfrm>
           <a:prstGeom prst="rect">
             <a:avLst/>
@@ -5289,44 +6163,88 @@
           </a:bodyPr>
           <a:lstStyle/>
           <a:p>
-            <a:pPr algn="l">
-              <a:defRPr sz="2500" b="0">
-                <a:solidFill>
-                  <a:srgbClr val="183042"/>
+            <a:pPr algn="ctr">
+              <a:defRPr sz="1200" b="1">
+                <a:solidFill>
+                  <a:srgbClr val="FFFFFF"/>
                 </a:solidFill>
                 <a:latin typeface="Microsoft YaHei"/>
                 <a:ea typeface="微软雅黑"/>
               </a:defRPr>
             </a:pPr>
             <a:r>
-              <a:rPr sz="2500" b="0">
+              <a:rPr sz="1200" b="1">
+                <a:solidFill>
+                  <a:srgbClr val="FFFFFF"/>
+                </a:solidFill>
+                <a:latin typeface="Microsoft YaHei"/>
+                <a:ea typeface="微软雅黑"/>
+              </a:rPr>
+              <a:t>3</a:t>
+            </a:r>
+          </a:p>
+        </p:txBody>
+      </p:sp>
+      <p:sp>
+        <p:nvSpPr>
+          <p:cNvPr id="20" name="TextBox 19"/>
+          <p:cNvSpPr txBox="1"/>
+          <p:nvPr/>
+        </p:nvSpPr>
+        <p:spPr>
+          <a:xfrm>
+            <a:off x="1517904" y="3273552"/>
+            <a:ext cx="9784080" cy="457200"/>
+          </a:xfrm>
+          <a:prstGeom prst="rect">
+            <a:avLst/>
+          </a:prstGeom>
+          <a:noFill/>
+        </p:spPr>
+        <p:txBody>
+          <a:bodyPr wrap="square" anchor="ctr" lIns="18288" rIns="18288" tIns="9144" bIns="9144">
+            <a:noAutofit/>
+          </a:bodyPr>
+          <a:lstStyle/>
+          <a:p>
+            <a:pPr algn="l">
+              <a:defRPr sz="1900" b="0">
                 <a:solidFill>
                   <a:srgbClr val="183042"/>
                 </a:solidFill>
                 <a:latin typeface="Microsoft YaHei"/>
                 <a:ea typeface="微软雅黑"/>
+              </a:defRPr>
+            </a:pPr>
+            <a:r>
+              <a:rPr sz="1900" b="0">
+                <a:solidFill>
+                  <a:srgbClr val="183042"/>
+                </a:solidFill>
+                <a:latin typeface="Microsoft YaHei"/>
+                <a:ea typeface="微软雅黑"/>
               </a:rPr>
-              <a:t>快排分治高效</a:t>
-            </a:r>
-          </a:p>
-        </p:txBody>
-      </p:sp>
-      <p:sp>
-        <p:nvSpPr>
-          <p:cNvPr id="11" name="Oval 10"/>
+              <a:t>稳定性影响工程选型</a:t>
+            </a:r>
+          </a:p>
+        </p:txBody>
+      </p:sp>
+      <p:sp>
+        <p:nvSpPr>
+          <p:cNvPr id="21" name="Rounded Rectangle 20"/>
           <p:cNvSpPr/>
           <p:nvPr/>
         </p:nvSpPr>
         <p:spPr>
           <a:xfrm>
-            <a:off x="987552" y="3026664"/>
-            <a:ext cx="164592" cy="164592"/>
-          </a:xfrm>
-          <a:prstGeom prst="ellipse">
+            <a:off x="658368" y="5669280"/>
+            <a:ext cx="10863072" cy="548640"/>
+          </a:xfrm>
+          <a:prstGeom prst="roundRect">
             <a:avLst/>
           </a:prstGeom>
           <a:solidFill>
-            <a:srgbClr val="2F7E83"/>
+            <a:srgbClr val="245B78"/>
           </a:solidFill>
           <a:ln>
             <a:noFill/>
@@ -5356,14 +6274,14 @@
       </p:sp>
       <p:sp>
         <p:nvSpPr>
-          <p:cNvPr id="12" name="TextBox 11"/>
+          <p:cNvPr id="22" name="TextBox 21"/>
           <p:cNvSpPr txBox="1"/>
           <p:nvPr/>
         </p:nvSpPr>
         <p:spPr>
           <a:xfrm>
-            <a:off x="1389888" y="2907792"/>
-            <a:ext cx="9555480" cy="612648"/>
+            <a:off x="658368" y="5779008"/>
+            <a:ext cx="10863072" cy="365760"/>
           </a:xfrm>
           <a:prstGeom prst="rect">
             <a:avLst/>
@@ -5376,24 +6294,24 @@
           </a:bodyPr>
           <a:lstStyle/>
           <a:p>
-            <a:pPr algn="l">
-              <a:defRPr sz="2500" b="0">
-                <a:solidFill>
-                  <a:srgbClr val="183042"/>
+            <a:pPr algn="ctr">
+              <a:defRPr sz="1400" b="1">
+                <a:solidFill>
+                  <a:srgbClr val="FFFFFF"/>
                 </a:solidFill>
                 <a:latin typeface="Microsoft YaHei"/>
                 <a:ea typeface="微软雅黑"/>
               </a:defRPr>
             </a:pPr>
             <a:r>
-              <a:rPr sz="2500" b="0">
-                <a:solidFill>
-                  <a:srgbClr val="183042"/>
+              <a:rPr sz="1400" b="1">
+                <a:solidFill>
+                  <a:srgbClr val="FFFFFF"/>
                 </a:solidFill>
                 <a:latin typeface="Microsoft YaHei"/>
                 <a:ea typeface="微软雅黑"/>
               </a:rPr>
-              <a:t>稳定性影响工程选型</a:t>
+              <a:t>感谢聆听 · 本节内容到此结束</a:t>
             </a:r>
           </a:p>
         </p:txBody>
